--- a/Slides/Week01/13：大型語言模型.pptx
+++ b/Slides/Week01/13：大型語言模型.pptx
@@ -6,29 +6,30 @@
     <p:sldMasterId id="2147483660" r:id="rId2"/>
   </p:sldMasterIdLst>
   <p:notesMasterIdLst>
-    <p:notesMasterId r:id="rId23"/>
+    <p:notesMasterId r:id="rId24"/>
   </p:notesMasterIdLst>
   <p:sldIdLst>
     <p:sldId id="1102" r:id="rId3"/>
     <p:sldId id="1138" r:id="rId4"/>
     <p:sldId id="1131" r:id="rId5"/>
-    <p:sldId id="1128" r:id="rId6"/>
-    <p:sldId id="1139" r:id="rId7"/>
-    <p:sldId id="926" r:id="rId8"/>
-    <p:sldId id="869" r:id="rId9"/>
-    <p:sldId id="911" r:id="rId10"/>
-    <p:sldId id="915" r:id="rId11"/>
-    <p:sldId id="865" r:id="rId12"/>
-    <p:sldId id="912" r:id="rId13"/>
-    <p:sldId id="914" r:id="rId14"/>
-    <p:sldId id="913" r:id="rId15"/>
-    <p:sldId id="1136" r:id="rId16"/>
-    <p:sldId id="1137" r:id="rId17"/>
-    <p:sldId id="1103" r:id="rId18"/>
-    <p:sldId id="811" r:id="rId19"/>
-    <p:sldId id="813" r:id="rId20"/>
-    <p:sldId id="814" r:id="rId21"/>
-    <p:sldId id="821" r:id="rId22"/>
+    <p:sldId id="1139" r:id="rId6"/>
+    <p:sldId id="926" r:id="rId7"/>
+    <p:sldId id="869" r:id="rId8"/>
+    <p:sldId id="911" r:id="rId9"/>
+    <p:sldId id="915" r:id="rId10"/>
+    <p:sldId id="865" r:id="rId11"/>
+    <p:sldId id="912" r:id="rId12"/>
+    <p:sldId id="914" r:id="rId13"/>
+    <p:sldId id="1128" r:id="rId14"/>
+    <p:sldId id="1140" r:id="rId15"/>
+    <p:sldId id="913" r:id="rId16"/>
+    <p:sldId id="1136" r:id="rId17"/>
+    <p:sldId id="1137" r:id="rId18"/>
+    <p:sldId id="1103" r:id="rId19"/>
+    <p:sldId id="811" r:id="rId20"/>
+    <p:sldId id="813" r:id="rId21"/>
+    <p:sldId id="814" r:id="rId22"/>
+    <p:sldId id="821" r:id="rId23"/>
   </p:sldIdLst>
   <p:sldSz cx="9144000" cy="6858000" type="screen4x3"/>
   <p:notesSz cx="6858000" cy="9144000"/>
@@ -273,7 +274,7 @@
           <a:p>
             <a:fld id="{AC849949-4CF4-47DD-B405-86D0B4A6E412}" type="datetimeFigureOut">
               <a:rPr lang="zh-TW" altLang="en-US" smtClean="0"/>
-              <a:t>2024/3/14</a:t>
+              <a:t>2024/11/27</a:t>
             </a:fld>
             <a:endParaRPr lang="zh-TW" altLang="en-US"/>
           </a:p>
@@ -832,7 +833,7 @@
     </p:spTree>
     <p:extLst>
       <p:ext uri="{BB962C8B-B14F-4D97-AF65-F5344CB8AC3E}">
-        <p14:creationId xmlns:p14="http://schemas.microsoft.com/office/powerpoint/2010/main" val="2913545369"/>
+        <p14:creationId xmlns:p14="http://schemas.microsoft.com/office/powerpoint/2010/main" val="1686943361"/>
       </p:ext>
     </p:extLst>
   </p:cSld>
@@ -981,7 +982,7 @@
     </p:spTree>
     <p:extLst>
       <p:ext uri="{BB962C8B-B14F-4D97-AF65-F5344CB8AC3E}">
-        <p14:creationId xmlns:p14="http://schemas.microsoft.com/office/powerpoint/2010/main" val="1686943361"/>
+        <p14:creationId xmlns:p14="http://schemas.microsoft.com/office/powerpoint/2010/main" val="3872078433"/>
       </p:ext>
     </p:extLst>
   </p:cSld>
@@ -996,7 +997,13 @@
   <p:cSld>
     <p:spTree>
       <p:nvGrpSpPr>
-        <p:cNvPr id="1" name=""/>
+        <p:cNvPr id="1" name="">
+          <a:extLst>
+            <a:ext uri="{FF2B5EF4-FFF2-40B4-BE49-F238E27FC236}">
+              <a16:creationId xmlns:a16="http://schemas.microsoft.com/office/drawing/2014/main" id="{D6D46D72-3BCB-321C-4DCA-F4F9360D9852}"/>
+            </a:ext>
+          </a:extLst>
+        </p:cNvPr>
         <p:cNvGrpSpPr/>
         <p:nvPr/>
       </p:nvGrpSpPr>
@@ -1010,7 +1017,13 @@
       </p:grpSpPr>
       <p:sp>
         <p:nvSpPr>
-          <p:cNvPr id="2" name="投影片圖像版面配置區 1"/>
+          <p:cNvPr id="2" name="投影片圖像版面配置區 1">
+            <a:extLst>
+              <a:ext uri="{FF2B5EF4-FFF2-40B4-BE49-F238E27FC236}">
+                <a16:creationId xmlns:a16="http://schemas.microsoft.com/office/drawing/2014/main" id="{AE912B6E-10DC-9AC8-3FAD-BE6C618BC01C}"/>
+              </a:ext>
+            </a:extLst>
+          </p:cNvPr>
           <p:cNvSpPr>
             <a:spLocks noGrp="1" noRot="1" noChangeAspect="1"/>
           </p:cNvSpPr>
@@ -1027,7 +1040,13 @@
       </p:sp>
       <p:sp>
         <p:nvSpPr>
-          <p:cNvPr id="3" name="備忘稿版面配置區 2"/>
+          <p:cNvPr id="3" name="備忘稿版面配置區 2">
+            <a:extLst>
+              <a:ext uri="{FF2B5EF4-FFF2-40B4-BE49-F238E27FC236}">
+                <a16:creationId xmlns:a16="http://schemas.microsoft.com/office/drawing/2014/main" id="{0C8AACB7-EB46-05EE-FFC8-CAB5A93F8B07}"/>
+              </a:ext>
+            </a:extLst>
+          </p:cNvPr>
           <p:cNvSpPr>
             <a:spLocks noGrp="1"/>
           </p:cNvSpPr>
@@ -1046,7 +1065,13 @@
       </p:sp>
       <p:sp>
         <p:nvSpPr>
-          <p:cNvPr id="4" name="投影片編號版面配置區 3"/>
+          <p:cNvPr id="4" name="投影片編號版面配置區 3">
+            <a:extLst>
+              <a:ext uri="{FF2B5EF4-FFF2-40B4-BE49-F238E27FC236}">
+                <a16:creationId xmlns:a16="http://schemas.microsoft.com/office/drawing/2014/main" id="{1D2F820C-C06D-0DFC-40AD-7B7BBAEF8BB6}"/>
+              </a:ext>
+            </a:extLst>
+          </p:cNvPr>
           <p:cNvSpPr>
             <a:spLocks noGrp="1"/>
           </p:cNvSpPr>
@@ -1130,7 +1155,7 @@
     </p:spTree>
     <p:extLst>
       <p:ext uri="{BB962C8B-B14F-4D97-AF65-F5344CB8AC3E}">
-        <p14:creationId xmlns:p14="http://schemas.microsoft.com/office/powerpoint/2010/main" val="3854750710"/>
+        <p14:creationId xmlns:p14="http://schemas.microsoft.com/office/powerpoint/2010/main" val="2890811513"/>
       </p:ext>
     </p:extLst>
   </p:cSld>
@@ -1257,7 +1282,7 @@
                 <a:tabLst/>
                 <a:defRPr/>
               </a:pPr>
-              <a:t>16</a:t>
+              <a:t>14</a:t>
             </a:fld>
             <a:endParaRPr kumimoji="0" lang="en-US" sz="1200" b="0" i="0" u="none" strike="noStrike" kern="1200" cap="none" spc="0" normalizeH="0" baseline="0" noProof="0" dirty="0">
               <a:ln>
@@ -1279,7 +1304,7 @@
     </p:spTree>
     <p:extLst>
       <p:ext uri="{BB962C8B-B14F-4D97-AF65-F5344CB8AC3E}">
-        <p14:creationId xmlns:p14="http://schemas.microsoft.com/office/powerpoint/2010/main" val="441264504"/>
+        <p14:creationId xmlns:p14="http://schemas.microsoft.com/office/powerpoint/2010/main" val="3854750710"/>
       </p:ext>
     </p:extLst>
   </p:cSld>
@@ -1428,7 +1453,7 @@
     </p:spTree>
     <p:extLst>
       <p:ext uri="{BB962C8B-B14F-4D97-AF65-F5344CB8AC3E}">
-        <p14:creationId xmlns:p14="http://schemas.microsoft.com/office/powerpoint/2010/main" val="1398037604"/>
+        <p14:creationId xmlns:p14="http://schemas.microsoft.com/office/powerpoint/2010/main" val="441264504"/>
       </p:ext>
     </p:extLst>
   </p:cSld>
@@ -1577,7 +1602,7 @@
     </p:spTree>
     <p:extLst>
       <p:ext uri="{BB962C8B-B14F-4D97-AF65-F5344CB8AC3E}">
-        <p14:creationId xmlns:p14="http://schemas.microsoft.com/office/powerpoint/2010/main" val="1368506897"/>
+        <p14:creationId xmlns:p14="http://schemas.microsoft.com/office/powerpoint/2010/main" val="1398037604"/>
       </p:ext>
     </p:extLst>
   </p:cSld>
@@ -1726,6 +1751,155 @@
     </p:spTree>
     <p:extLst>
       <p:ext uri="{BB962C8B-B14F-4D97-AF65-F5344CB8AC3E}">
+        <p14:creationId xmlns:p14="http://schemas.microsoft.com/office/powerpoint/2010/main" val="1368506897"/>
+      </p:ext>
+    </p:extLst>
+  </p:cSld>
+  <p:clrMapOvr>
+    <a:masterClrMapping/>
+  </p:clrMapOvr>
+</p:notes>
+</file>
+
+<file path=ppt/notesSlides/notesSlide17.xml><?xml version="1.0" encoding="utf-8"?>
+<p:notes xmlns:a="http://schemas.openxmlformats.org/drawingml/2006/main" xmlns:r="http://schemas.openxmlformats.org/officeDocument/2006/relationships" xmlns:p="http://schemas.openxmlformats.org/presentationml/2006/main">
+  <p:cSld>
+    <p:spTree>
+      <p:nvGrpSpPr>
+        <p:cNvPr id="1" name=""/>
+        <p:cNvGrpSpPr/>
+        <p:nvPr/>
+      </p:nvGrpSpPr>
+      <p:grpSpPr>
+        <a:xfrm>
+          <a:off x="0" y="0"/>
+          <a:ext cx="0" cy="0"/>
+          <a:chOff x="0" y="0"/>
+          <a:chExt cx="0" cy="0"/>
+        </a:xfrm>
+      </p:grpSpPr>
+      <p:sp>
+        <p:nvSpPr>
+          <p:cNvPr id="2" name="投影片圖像版面配置區 1"/>
+          <p:cNvSpPr>
+            <a:spLocks noGrp="1" noRot="1" noChangeAspect="1"/>
+          </p:cNvSpPr>
+          <p:nvPr>
+            <p:ph type="sldImg"/>
+          </p:nvPr>
+        </p:nvSpPr>
+        <p:spPr>
+          <a:xfrm>
+            <a:off x="1371600" y="1143000"/>
+            <a:ext cx="4114800" cy="3086100"/>
+          </a:xfrm>
+        </p:spPr>
+      </p:sp>
+      <p:sp>
+        <p:nvSpPr>
+          <p:cNvPr id="3" name="備忘稿版面配置區 2"/>
+          <p:cNvSpPr>
+            <a:spLocks noGrp="1"/>
+          </p:cNvSpPr>
+          <p:nvPr>
+            <p:ph type="body" idx="1"/>
+          </p:nvPr>
+        </p:nvSpPr>
+        <p:spPr/>
+        <p:txBody>
+          <a:bodyPr/>
+          <a:lstStyle/>
+          <a:p>
+            <a:endParaRPr lang="zh-TW" altLang="en-US" dirty="0"/>
+          </a:p>
+        </p:txBody>
+      </p:sp>
+      <p:sp>
+        <p:nvSpPr>
+          <p:cNvPr id="4" name="投影片編號版面配置區 3"/>
+          <p:cNvSpPr>
+            <a:spLocks noGrp="1"/>
+          </p:cNvSpPr>
+          <p:nvPr>
+            <p:ph type="sldNum" sz="quarter" idx="10"/>
+          </p:nvPr>
+        </p:nvSpPr>
+        <p:spPr/>
+        <p:txBody>
+          <a:bodyPr/>
+          <a:lstStyle/>
+          <a:p>
+            <a:pPr marL="0" marR="0" lvl="0" indent="0" algn="r" defTabSz="914400" rtl="0" eaLnBrk="1" fontAlgn="auto" latinLnBrk="0" hangingPunct="1">
+              <a:lnSpc>
+                <a:spcPct val="100000"/>
+              </a:lnSpc>
+              <a:spcBef>
+                <a:spcPts val="0"/>
+              </a:spcBef>
+              <a:spcAft>
+                <a:spcPts val="0"/>
+              </a:spcAft>
+              <a:buClrTx/>
+              <a:buSzTx/>
+              <a:buFontTx/>
+              <a:buNone/>
+              <a:tabLst/>
+              <a:defRPr/>
+            </a:pPr>
+            <a:fld id="{9B26CD33-4337-4529-948A-94F6960B2374}" type="slidenum">
+              <a:rPr kumimoji="0" lang="en-US" sz="1200" b="0" i="0" u="none" strike="noStrike" kern="1200" cap="none" spc="0" normalizeH="0" baseline="0" noProof="0" smtClean="0">
+                <a:ln>
+                  <a:noFill/>
+                </a:ln>
+                <a:solidFill>
+                  <a:prstClr val="black"/>
+                </a:solidFill>
+                <a:effectLst/>
+                <a:uLnTx/>
+                <a:uFillTx/>
+                <a:latin typeface="Calibri"/>
+                <a:ea typeface="+mn-ea"/>
+                <a:cs typeface="+mn-cs"/>
+              </a:rPr>
+              <a:pPr marL="0" marR="0" lvl="0" indent="0" algn="r" defTabSz="914400" rtl="0" eaLnBrk="1" fontAlgn="auto" latinLnBrk="0" hangingPunct="1">
+                <a:lnSpc>
+                  <a:spcPct val="100000"/>
+                </a:lnSpc>
+                <a:spcBef>
+                  <a:spcPts val="0"/>
+                </a:spcBef>
+                <a:spcAft>
+                  <a:spcPts val="0"/>
+                </a:spcAft>
+                <a:buClrTx/>
+                <a:buSzTx/>
+                <a:buFontTx/>
+                <a:buNone/>
+                <a:tabLst/>
+                <a:defRPr/>
+              </a:pPr>
+              <a:t>20</a:t>
+            </a:fld>
+            <a:endParaRPr kumimoji="0" lang="en-US" sz="1200" b="0" i="0" u="none" strike="noStrike" kern="1200" cap="none" spc="0" normalizeH="0" baseline="0" noProof="0" dirty="0">
+              <a:ln>
+                <a:noFill/>
+              </a:ln>
+              <a:solidFill>
+                <a:prstClr val="black"/>
+              </a:solidFill>
+              <a:effectLst/>
+              <a:uLnTx/>
+              <a:uFillTx/>
+              <a:latin typeface="Calibri"/>
+              <a:ea typeface="+mn-ea"/>
+              <a:cs typeface="+mn-cs"/>
+            </a:endParaRPr>
+          </a:p>
+        </p:txBody>
+      </p:sp>
+    </p:spTree>
+    <p:extLst>
+      <p:ext uri="{BB962C8B-B14F-4D97-AF65-F5344CB8AC3E}">
         <p14:creationId xmlns:p14="http://schemas.microsoft.com/office/powerpoint/2010/main" val="4188567479"/>
       </p:ext>
     </p:extLst>
@@ -2024,7 +2198,7 @@
     </p:spTree>
     <p:extLst>
       <p:ext uri="{BB962C8B-B14F-4D97-AF65-F5344CB8AC3E}">
-        <p14:creationId xmlns:p14="http://schemas.microsoft.com/office/powerpoint/2010/main" val="1264183473"/>
+        <p14:creationId xmlns:p14="http://schemas.microsoft.com/office/powerpoint/2010/main" val="1593467698"/>
       </p:ext>
     </p:extLst>
   </p:cSld>
@@ -2173,7 +2347,7 @@
     </p:spTree>
     <p:extLst>
       <p:ext uri="{BB962C8B-B14F-4D97-AF65-F5344CB8AC3E}">
-        <p14:creationId xmlns:p14="http://schemas.microsoft.com/office/powerpoint/2010/main" val="1593467698"/>
+        <p14:creationId xmlns:p14="http://schemas.microsoft.com/office/powerpoint/2010/main" val="1844390019"/>
       </p:ext>
     </p:extLst>
   </p:cSld>
@@ -2322,7 +2496,7 @@
     </p:spTree>
     <p:extLst>
       <p:ext uri="{BB962C8B-B14F-4D97-AF65-F5344CB8AC3E}">
-        <p14:creationId xmlns:p14="http://schemas.microsoft.com/office/powerpoint/2010/main" val="1844390019"/>
+        <p14:creationId xmlns:p14="http://schemas.microsoft.com/office/powerpoint/2010/main" val="1758350613"/>
       </p:ext>
     </p:extLst>
   </p:cSld>
@@ -2471,7 +2645,7 @@
     </p:spTree>
     <p:extLst>
       <p:ext uri="{BB962C8B-B14F-4D97-AF65-F5344CB8AC3E}">
-        <p14:creationId xmlns:p14="http://schemas.microsoft.com/office/powerpoint/2010/main" val="1758350613"/>
+        <p14:creationId xmlns:p14="http://schemas.microsoft.com/office/powerpoint/2010/main" val="1491260411"/>
       </p:ext>
     </p:extLst>
   </p:cSld>
@@ -2620,7 +2794,7 @@
     </p:spTree>
     <p:extLst>
       <p:ext uri="{BB962C8B-B14F-4D97-AF65-F5344CB8AC3E}">
-        <p14:creationId xmlns:p14="http://schemas.microsoft.com/office/powerpoint/2010/main" val="1491260411"/>
+        <p14:creationId xmlns:p14="http://schemas.microsoft.com/office/powerpoint/2010/main" val="1352304590"/>
       </p:ext>
     </p:extLst>
   </p:cSld>
@@ -2769,7 +2943,7 @@
     </p:spTree>
     <p:extLst>
       <p:ext uri="{BB962C8B-B14F-4D97-AF65-F5344CB8AC3E}">
-        <p14:creationId xmlns:p14="http://schemas.microsoft.com/office/powerpoint/2010/main" val="1352304590"/>
+        <p14:creationId xmlns:p14="http://schemas.microsoft.com/office/powerpoint/2010/main" val="4070795820"/>
       </p:ext>
     </p:extLst>
   </p:cSld>
@@ -2918,7 +3092,7 @@
     </p:spTree>
     <p:extLst>
       <p:ext uri="{BB962C8B-B14F-4D97-AF65-F5344CB8AC3E}">
-        <p14:creationId xmlns:p14="http://schemas.microsoft.com/office/powerpoint/2010/main" val="4070795820"/>
+        <p14:creationId xmlns:p14="http://schemas.microsoft.com/office/powerpoint/2010/main" val="2913545369"/>
       </p:ext>
     </p:extLst>
   </p:cSld>
@@ -3075,7 +3249,7 @@
           <a:p>
             <a:fld id="{F1B4F52B-4DFE-497B-BF2E-01F0545D6AA4}" type="datetimeFigureOut">
               <a:rPr lang="zh-TW" altLang="en-US" smtClean="0"/>
-              <a:t>2024/3/14</a:t>
+              <a:t>2024/11/27</a:t>
             </a:fld>
             <a:endParaRPr lang="zh-TW" altLang="en-US"/>
           </a:p>
@@ -3273,7 +3447,7 @@
           <a:p>
             <a:fld id="{F1B4F52B-4DFE-497B-BF2E-01F0545D6AA4}" type="datetimeFigureOut">
               <a:rPr lang="zh-TW" altLang="en-US" smtClean="0"/>
-              <a:t>2024/3/14</a:t>
+              <a:t>2024/11/27</a:t>
             </a:fld>
             <a:endParaRPr lang="zh-TW" altLang="en-US"/>
           </a:p>
@@ -3481,7 +3655,7 @@
           <a:p>
             <a:fld id="{F1B4F52B-4DFE-497B-BF2E-01F0545D6AA4}" type="datetimeFigureOut">
               <a:rPr lang="zh-TW" altLang="en-US" smtClean="0"/>
-              <a:t>2024/3/14</a:t>
+              <a:t>2024/11/27</a:t>
             </a:fld>
             <a:endParaRPr lang="zh-TW" altLang="en-US"/>
           </a:p>
@@ -3862,7 +4036,7 @@
                 </a:solidFill>
               </a:rPr>
               <a:pPr/>
-              <a:t>3/14/2024</a:t>
+              <a:t>11/27/2024</a:t>
             </a:fld>
             <a:endParaRPr kumimoji="0" lang="en-US" dirty="0"/>
           </a:p>
@@ -4093,7 +4267,7 @@
                 </a:solidFill>
               </a:rPr>
               <a:pPr/>
-              <a:t>3/14/2024</a:t>
+              <a:t>11/27/2024</a:t>
             </a:fld>
             <a:endParaRPr kumimoji="0" lang="en-US" dirty="0"/>
           </a:p>
@@ -4326,7 +4500,7 @@
                 </a:solidFill>
               </a:rPr>
               <a:pPr/>
-              <a:t>3/14/2024</a:t>
+              <a:t>11/27/2024</a:t>
             </a:fld>
             <a:endParaRPr kumimoji="0" lang="en-US" dirty="0"/>
           </a:p>
@@ -4808,7 +4982,7 @@
                 </a:solidFill>
               </a:rPr>
               <a:pPr/>
-              <a:t>3/14/2024</a:t>
+              <a:t>11/27/2024</a:t>
             </a:fld>
             <a:endParaRPr kumimoji="0" lang="en-US" dirty="0"/>
           </a:p>
@@ -5165,7 +5339,7 @@
                 </a:solidFill>
               </a:rPr>
               <a:pPr/>
-              <a:t>3/14/2024</a:t>
+              <a:t>11/27/2024</a:t>
             </a:fld>
             <a:endParaRPr kumimoji="0" lang="en-US" dirty="0"/>
           </a:p>
@@ -5528,7 +5702,7 @@
                 </a:solidFill>
               </a:rPr>
               <a:pPr/>
-              <a:t>3/14/2024</a:t>
+              <a:t>11/27/2024</a:t>
             </a:fld>
             <a:endParaRPr kumimoji="0" lang="en-US" dirty="0"/>
           </a:p>
@@ -5838,7 +6012,7 @@
                 </a:solidFill>
               </a:rPr>
               <a:pPr/>
-              <a:t>3/14/2024</a:t>
+              <a:t>11/27/2024</a:t>
             </a:fld>
             <a:endParaRPr kumimoji="0" lang="en-US" dirty="0"/>
           </a:p>
@@ -6033,7 +6207,7 @@
           <a:p>
             <a:fld id="{F1B4F52B-4DFE-497B-BF2E-01F0545D6AA4}" type="datetimeFigureOut">
               <a:rPr lang="zh-TW" altLang="en-US" smtClean="0"/>
-              <a:t>2024/3/14</a:t>
+              <a:t>2024/11/27</a:t>
             </a:fld>
             <a:endParaRPr lang="zh-TW" altLang="en-US"/>
           </a:p>
@@ -6517,7 +6691,7 @@
                 </a:solidFill>
               </a:rPr>
               <a:pPr/>
-              <a:t>3/14/2024</a:t>
+              <a:t>11/27/2024</a:t>
             </a:fld>
             <a:endParaRPr kumimoji="0" lang="en-US" dirty="0"/>
           </a:p>
@@ -6913,7 +7087,7 @@
                 </a:solidFill>
               </a:rPr>
               <a:pPr/>
-              <a:t>3/14/2024</a:t>
+              <a:t>11/27/2024</a:t>
             </a:fld>
             <a:endParaRPr kumimoji="0" lang="en-US" dirty="0"/>
           </a:p>
@@ -7253,7 +7427,7 @@
                 </a:solidFill>
               </a:rPr>
               <a:pPr/>
-              <a:t>3/14/2024</a:t>
+              <a:t>11/27/2024</a:t>
             </a:fld>
             <a:endParaRPr kumimoji="0" lang="en-US" dirty="0"/>
           </a:p>
@@ -7834,7 +8008,7 @@
                 </a:solidFill>
               </a:rPr>
               <a:pPr/>
-              <a:t>3/14/2024</a:t>
+              <a:t>11/27/2024</a:t>
             </a:fld>
             <a:endParaRPr kumimoji="0" lang="en-US" dirty="0"/>
           </a:p>
@@ -8403,7 +8577,7 @@
                 </a:solidFill>
               </a:rPr>
               <a:pPr/>
-              <a:t>3/14/2024</a:t>
+              <a:t>11/27/2024</a:t>
             </a:fld>
             <a:endParaRPr kumimoji="0" lang="en-US" dirty="0"/>
           </a:p>
@@ -8867,7 +9041,7 @@
                 </a:solidFill>
               </a:rPr>
               <a:pPr/>
-              <a:t>3/14/2024</a:t>
+              <a:t>11/27/2024</a:t>
             </a:fld>
             <a:endParaRPr kumimoji="0" lang="en-US" dirty="0"/>
           </a:p>
@@ -9296,7 +9470,7 @@
                 </a:solidFill>
               </a:rPr>
               <a:pPr/>
-              <a:t>3/14/2024</a:t>
+              <a:t>11/27/2024</a:t>
             </a:fld>
             <a:endParaRPr kumimoji="0" lang="en-US" dirty="0"/>
           </a:p>
@@ -9805,7 +9979,7 @@
                 </a:solidFill>
               </a:rPr>
               <a:pPr/>
-              <a:t>3/14/2024</a:t>
+              <a:t>11/27/2024</a:t>
             </a:fld>
             <a:endParaRPr kumimoji="0" lang="en-US" dirty="0"/>
           </a:p>
@@ -10314,7 +10488,7 @@
                 </a:solidFill>
               </a:rPr>
               <a:pPr/>
-              <a:t>3/14/2024</a:t>
+              <a:t>11/27/2024</a:t>
             </a:fld>
             <a:endParaRPr kumimoji="0" lang="en-US" dirty="0"/>
           </a:p>
@@ -10535,7 +10709,7 @@
                 </a:solidFill>
               </a:rPr>
               <a:pPr/>
-              <a:t>3/14/2024</a:t>
+              <a:t>11/27/2024</a:t>
             </a:fld>
             <a:endParaRPr kumimoji="0" lang="en-US" dirty="0"/>
           </a:p>
@@ -10807,7 +10981,7 @@
           <a:p>
             <a:fld id="{F1B4F52B-4DFE-497B-BF2E-01F0545D6AA4}" type="datetimeFigureOut">
               <a:rPr lang="zh-TW" altLang="en-US" smtClean="0"/>
-              <a:t>2024/3/14</a:t>
+              <a:t>2024/11/27</a:t>
             </a:fld>
             <a:endParaRPr lang="zh-TW" altLang="en-US"/>
           </a:p>
@@ -11143,7 +11317,7 @@
                 </a:solidFill>
               </a:rPr>
               <a:pPr/>
-              <a:t>3/14/2024</a:t>
+              <a:t>11/27/2024</a:t>
             </a:fld>
             <a:endParaRPr kumimoji="0" lang="en-US" dirty="0"/>
           </a:p>
@@ -11367,7 +11541,7 @@
                 </a:solidFill>
               </a:rPr>
               <a:pPr/>
-              <a:t>3/14/2024</a:t>
+              <a:t>11/27/2024</a:t>
             </a:fld>
             <a:endParaRPr kumimoji="0" lang="en-US" dirty="0"/>
           </a:p>
@@ -11548,7 +11722,7 @@
             <a:fld id="{ACB2EC6F-6501-4E04-BD6C-A8A6CABB2C5B}" type="datetimeFigureOut">
               <a:rPr kumimoji="0" lang="en-US" smtClean="0"/>
               <a:pPr/>
-              <a:t>3/14/2024</a:t>
+              <a:t>11/27/2024</a:t>
             </a:fld>
             <a:endParaRPr kumimoji="0" lang="en-US" dirty="0"/>
           </a:p>
@@ -11832,7 +12006,7 @@
           <a:p>
             <a:fld id="{F1B4F52B-4DFE-497B-BF2E-01F0545D6AA4}" type="datetimeFigureOut">
               <a:rPr lang="zh-TW" altLang="en-US" smtClean="0"/>
-              <a:t>2024/3/14</a:t>
+              <a:t>2024/11/27</a:t>
             </a:fld>
             <a:endParaRPr lang="zh-TW" altLang="en-US"/>
           </a:p>
@@ -12244,7 +12418,7 @@
           <a:p>
             <a:fld id="{F1B4F52B-4DFE-497B-BF2E-01F0545D6AA4}" type="datetimeFigureOut">
               <a:rPr lang="zh-TW" altLang="en-US" smtClean="0"/>
-              <a:t>2024/3/14</a:t>
+              <a:t>2024/11/27</a:t>
             </a:fld>
             <a:endParaRPr lang="zh-TW" altLang="en-US"/>
           </a:p>
@@ -12385,7 +12559,7 @@
           <a:p>
             <a:fld id="{F1B4F52B-4DFE-497B-BF2E-01F0545D6AA4}" type="datetimeFigureOut">
               <a:rPr lang="zh-TW" altLang="en-US" smtClean="0"/>
-              <a:t>2024/3/14</a:t>
+              <a:t>2024/11/27</a:t>
             </a:fld>
             <a:endParaRPr lang="zh-TW" altLang="en-US"/>
           </a:p>
@@ -12498,7 +12672,7 @@
           <a:p>
             <a:fld id="{F1B4F52B-4DFE-497B-BF2E-01F0545D6AA4}" type="datetimeFigureOut">
               <a:rPr lang="zh-TW" altLang="en-US" smtClean="0"/>
-              <a:t>2024/3/14</a:t>
+              <a:t>2024/11/27</a:t>
             </a:fld>
             <a:endParaRPr lang="zh-TW" altLang="en-US"/>
           </a:p>
@@ -12809,7 +12983,7 @@
           <a:p>
             <a:fld id="{F1B4F52B-4DFE-497B-BF2E-01F0545D6AA4}" type="datetimeFigureOut">
               <a:rPr lang="zh-TW" altLang="en-US" smtClean="0"/>
-              <a:t>2024/3/14</a:t>
+              <a:t>2024/11/27</a:t>
             </a:fld>
             <a:endParaRPr lang="zh-TW" altLang="en-US"/>
           </a:p>
@@ -13097,7 +13271,7 @@
           <a:p>
             <a:fld id="{F1B4F52B-4DFE-497B-BF2E-01F0545D6AA4}" type="datetimeFigureOut">
               <a:rPr lang="zh-TW" altLang="en-US" smtClean="0"/>
-              <a:t>2024/3/14</a:t>
+              <a:t>2024/11/27</a:t>
             </a:fld>
             <a:endParaRPr lang="zh-TW" altLang="en-US"/>
           </a:p>
@@ -13338,7 +13512,7 @@
           <a:p>
             <a:fld id="{F1B4F52B-4DFE-497B-BF2E-01F0545D6AA4}" type="datetimeFigureOut">
               <a:rPr lang="zh-TW" altLang="en-US" smtClean="0"/>
-              <a:t>2024/3/14</a:t>
+              <a:t>2024/11/27</a:t>
             </a:fld>
             <a:endParaRPr lang="zh-TW" altLang="en-US"/>
           </a:p>
@@ -13910,7 +14084,7 @@
                 </a:solidFill>
               </a:rPr>
               <a:pPr/>
-              <a:t>3/14/2024</a:t>
+              <a:t>11/27/2024</a:t>
             </a:fld>
             <a:endParaRPr kumimoji="0" lang="en-US" sz="1200" dirty="0">
               <a:solidFill>
@@ -14456,7 +14630,7 @@
                 <a:ea typeface="新細明體" panose="02020500000000000000" pitchFamily="18" charset="-120"/>
               </a:rPr>
               <a:pPr/>
-              <a:t>3/14/2024</a:t>
+              <a:t>11/27/2024</a:t>
             </a:fld>
             <a:endParaRPr lang="en-US" dirty="0">
               <a:solidFill>
@@ -14550,7 +14724,7 @@
         </p:nvSpPr>
         <p:spPr>
           <a:xfrm>
-            <a:off x="1962150" y="425393"/>
+            <a:off x="1981200" y="66428"/>
             <a:ext cx="5943600" cy="990600"/>
           </a:xfrm>
           <a:prstGeom prst="rect">
@@ -14600,12 +14774,7 @@
             <p:ph type="dt" sz="half" idx="12"/>
           </p:nvPr>
         </p:nvSpPr>
-        <p:spPr>
-          <a:xfrm>
-            <a:off x="47625" y="6918325"/>
-            <a:ext cx="2438400" cy="244475"/>
-          </a:xfrm>
-        </p:spPr>
+        <p:spPr/>
         <p:txBody>
           <a:bodyPr/>
           <a:lstStyle/>
@@ -14620,7 +14789,7 @@
                 <a:cs typeface="Arial" panose="020B0604020202020204" pitchFamily="34" charset="0"/>
               </a:rPr>
               <a:pPr/>
-              <a:t>3/14/2024</a:t>
+              <a:t>11/27/2024</a:t>
             </a:fld>
             <a:endParaRPr lang="en-US" dirty="0">
               <a:solidFill>
@@ -14648,12 +14817,7 @@
             <p:ph type="sldNum" sz="quarter" idx="13"/>
           </p:nvPr>
         </p:nvSpPr>
-        <p:spPr>
-          <a:xfrm>
-            <a:off x="8153400" y="6918325"/>
-            <a:ext cx="914400" cy="244475"/>
-          </a:xfrm>
-        </p:spPr>
+        <p:spPr/>
         <p:txBody>
           <a:bodyPr/>
           <a:lstStyle/>
@@ -14667,287 +14831,6 @@
               </a:rPr>
               <a:pPr/>
               <a:t>10</a:t>
-            </a:fld>
-            <a:endParaRPr lang="en-US" dirty="0">
-              <a:solidFill>
-                <a:srgbClr val="D4D2D0"/>
-              </a:solidFill>
-              <a:latin typeface="Century Schoolbook"/>
-            </a:endParaRPr>
-          </a:p>
-        </p:txBody>
-      </p:sp>
-      <p:sp>
-        <p:nvSpPr>
-          <p:cNvPr id="2" name="文字方塊 1">
-            <a:extLst>
-              <a:ext uri="{FF2B5EF4-FFF2-40B4-BE49-F238E27FC236}">
-                <a16:creationId xmlns:a16="http://schemas.microsoft.com/office/drawing/2014/main" id="{E17C39F0-9527-522B-E55B-DAC3D2425E05}"/>
-              </a:ext>
-            </a:extLst>
-          </p:cNvPr>
-          <p:cNvSpPr txBox="1"/>
-          <p:nvPr/>
-        </p:nvSpPr>
-        <p:spPr>
-          <a:xfrm>
-            <a:off x="590550" y="1730565"/>
-            <a:ext cx="7924800" cy="3539430"/>
-          </a:xfrm>
-          <a:prstGeom prst="rect">
-            <a:avLst/>
-          </a:prstGeom>
-          <a:noFill/>
-        </p:spPr>
-        <p:txBody>
-          <a:bodyPr wrap="square" rtlCol="0">
-            <a:spAutoFit/>
-          </a:bodyPr>
-          <a:lstStyle/>
-          <a:p>
-            <a:pPr marL="457200" indent="-457200">
-              <a:buFont typeface="Arial" panose="020B0604020202020204" pitchFamily="34" charset="0"/>
-              <a:buChar char="•"/>
-            </a:pPr>
-            <a:r>
-              <a:rPr lang="zh-TW" altLang="en-US" sz="3200" dirty="0">
-                <a:solidFill>
-                  <a:prstClr val="white"/>
-                </a:solidFill>
-                <a:latin typeface="微軟正黑體" panose="020B0604030504040204" pitchFamily="34" charset="-120"/>
-                <a:ea typeface="微軟正黑體" panose="020B0604030504040204" pitchFamily="34" charset="-120"/>
-              </a:rPr>
-              <a:t>研究不同規模大小的模型對於各種任務的表現能力</a:t>
-            </a:r>
-            <a:endParaRPr lang="en-US" altLang="zh-TW" sz="3200" dirty="0">
-              <a:solidFill>
-                <a:prstClr val="white"/>
-              </a:solidFill>
-              <a:latin typeface="微軟正黑體" panose="020B0604030504040204" pitchFamily="34" charset="-120"/>
-              <a:ea typeface="微軟正黑體" panose="020B0604030504040204" pitchFamily="34" charset="-120"/>
-            </a:endParaRPr>
-          </a:p>
-          <a:p>
-            <a:pPr marL="457200" indent="-457200">
-              <a:buFont typeface="Arial" panose="020B0604020202020204" pitchFamily="34" charset="0"/>
-              <a:buChar char="•"/>
-            </a:pPr>
-            <a:r>
-              <a:rPr lang="zh-TW" altLang="en-US" sz="3200" dirty="0">
-                <a:solidFill>
-                  <a:prstClr val="white"/>
-                </a:solidFill>
-                <a:latin typeface="微軟正黑體" panose="020B0604030504040204" pitchFamily="34" charset="-120"/>
-                <a:ea typeface="微軟正黑體" panose="020B0604030504040204" pitchFamily="34" charset="-120"/>
-              </a:rPr>
-              <a:t>當模型夠大時，竟出現小型專業微調模型的能力，各種任務表現皆大幅度提升</a:t>
-            </a:r>
-            <a:endParaRPr lang="en-US" altLang="zh-TW" sz="3200" dirty="0">
-              <a:solidFill>
-                <a:prstClr val="white"/>
-              </a:solidFill>
-              <a:latin typeface="微軟正黑體" panose="020B0604030504040204" pitchFamily="34" charset="-120"/>
-              <a:ea typeface="微軟正黑體" panose="020B0604030504040204" pitchFamily="34" charset="-120"/>
-            </a:endParaRPr>
-          </a:p>
-          <a:p>
-            <a:pPr marL="457200" indent="-457200">
-              <a:buFont typeface="Arial" panose="020B0604020202020204" pitchFamily="34" charset="0"/>
-              <a:buChar char="•"/>
-            </a:pPr>
-            <a:r>
-              <a:rPr lang="zh-TW" altLang="en-US" sz="3200" dirty="0">
-                <a:solidFill>
-                  <a:prstClr val="white"/>
-                </a:solidFill>
-                <a:latin typeface="微軟正黑體" panose="020B0604030504040204" pitchFamily="34" charset="-120"/>
-                <a:ea typeface="微軟正黑體" panose="020B0604030504040204" pitchFamily="34" charset="-120"/>
-              </a:rPr>
-              <a:t>這些能力是被自己發現的</a:t>
-            </a:r>
-            <a:endParaRPr lang="en-US" altLang="zh-TW" sz="3200" dirty="0">
-              <a:solidFill>
-                <a:prstClr val="white"/>
-              </a:solidFill>
-              <a:latin typeface="微軟正黑體" panose="020B0604030504040204" pitchFamily="34" charset="-120"/>
-              <a:ea typeface="微軟正黑體" panose="020B0604030504040204" pitchFamily="34" charset="-120"/>
-            </a:endParaRPr>
-          </a:p>
-          <a:p>
-            <a:pPr marL="457200" indent="-457200">
-              <a:buFont typeface="Arial" panose="020B0604020202020204" pitchFamily="34" charset="0"/>
-              <a:buChar char="•"/>
-            </a:pPr>
-            <a:r>
-              <a:rPr lang="zh-TW" altLang="en-US" sz="3200" dirty="0">
-                <a:solidFill>
-                  <a:prstClr val="white"/>
-                </a:solidFill>
-                <a:latin typeface="微軟正黑體" panose="020B0604030504040204" pitchFamily="34" charset="-120"/>
-                <a:ea typeface="微軟正黑體" panose="020B0604030504040204" pitchFamily="34" charset="-120"/>
-              </a:rPr>
-              <a:t>準確度並不是等距成長，而是在參數量最大的模型中準確率急劇上升</a:t>
-            </a:r>
-            <a:endParaRPr lang="en-US" altLang="zh-TW" sz="3200" dirty="0">
-              <a:solidFill>
-                <a:prstClr val="white"/>
-              </a:solidFill>
-              <a:latin typeface="微軟正黑體" panose="020B0604030504040204" pitchFamily="34" charset="-120"/>
-              <a:ea typeface="微軟正黑體" panose="020B0604030504040204" pitchFamily="34" charset="-120"/>
-            </a:endParaRPr>
-          </a:p>
-        </p:txBody>
-      </p:sp>
-    </p:spTree>
-    <p:extLst>
-      <p:ext uri="{BB962C8B-B14F-4D97-AF65-F5344CB8AC3E}">
-        <p14:creationId xmlns:p14="http://schemas.microsoft.com/office/powerpoint/2010/main" val="1983433871"/>
-      </p:ext>
-    </p:extLst>
-  </p:cSld>
-  <p:clrMapOvr>
-    <a:masterClrMapping/>
-  </p:clrMapOvr>
-  <p:transition>
-    <p:fade/>
-  </p:transition>
-</p:sld>
-</file>
-
-<file path=ppt/slides/slide11.xml><?xml version="1.0" encoding="utf-8"?>
-<p:sld xmlns:a="http://schemas.openxmlformats.org/drawingml/2006/main" xmlns:r="http://schemas.openxmlformats.org/officeDocument/2006/relationships" xmlns:p="http://schemas.openxmlformats.org/presentationml/2006/main">
-  <p:cSld>
-    <p:spTree>
-      <p:nvGrpSpPr>
-        <p:cNvPr id="1" name=""/>
-        <p:cNvGrpSpPr/>
-        <p:nvPr/>
-      </p:nvGrpSpPr>
-      <p:grpSpPr>
-        <a:xfrm>
-          <a:off x="0" y="0"/>
-          <a:ext cx="0" cy="0"/>
-          <a:chOff x="0" y="0"/>
-          <a:chExt cx="0" cy="0"/>
-        </a:xfrm>
-      </p:grpSpPr>
-      <p:sp>
-        <p:nvSpPr>
-          <p:cNvPr id="4" name="文字版面配置區 2"/>
-          <p:cNvSpPr txBox="1">
-            <a:spLocks/>
-          </p:cNvSpPr>
-          <p:nvPr/>
-        </p:nvSpPr>
-        <p:spPr>
-          <a:xfrm>
-            <a:off x="1981200" y="66428"/>
-            <a:ext cx="5943600" cy="990600"/>
-          </a:xfrm>
-          <a:prstGeom prst="rect">
-            <a:avLst/>
-          </a:prstGeom>
-        </p:spPr>
-        <p:txBody>
-          <a:bodyPr tIns="91440" bIns="91440" anchor="b" anchorCtr="0">
-            <a:noAutofit/>
-          </a:bodyPr>
-          <a:lstStyle/>
-          <a:p>
-            <a:r>
-              <a:rPr kumimoji="1" lang="en-US" altLang="zh-TW" sz="4800" b="1" dirty="0">
-                <a:solidFill>
-                  <a:srgbClr val="00B0F0"/>
-                </a:solidFill>
-                <a:effectLst>
-                  <a:outerShdw blurRad="38100" dist="38100" dir="2700000" algn="tl">
-                    <a:srgbClr val="000000">
-                      <a:alpha val="43137"/>
-                    </a:srgbClr>
-                  </a:outerShdw>
-                </a:effectLst>
-                <a:latin typeface="微軟正黑體" panose="020B0604030504040204" pitchFamily="34" charset="-120"/>
-                <a:ea typeface="微軟正黑體" panose="020B0604030504040204" pitchFamily="34" charset="-120"/>
-                <a:cs typeface="Heiti TC Light"/>
-              </a:rPr>
-              <a:t>Emergent abilities</a:t>
-            </a:r>
-          </a:p>
-        </p:txBody>
-      </p:sp>
-      <p:sp>
-        <p:nvSpPr>
-          <p:cNvPr id="3" name="日期版面配置區 2">
-            <a:extLst>
-              <a:ext uri="{FF2B5EF4-FFF2-40B4-BE49-F238E27FC236}">
-                <a16:creationId xmlns:a16="http://schemas.microsoft.com/office/drawing/2014/main" id="{1C536CB5-3C58-6CF1-767E-952B76F12DEE}"/>
-              </a:ext>
-            </a:extLst>
-          </p:cNvPr>
-          <p:cNvSpPr>
-            <a:spLocks noGrp="1"/>
-          </p:cNvSpPr>
-          <p:nvPr>
-            <p:ph type="dt" sz="half" idx="12"/>
-          </p:nvPr>
-        </p:nvSpPr>
-        <p:spPr/>
-        <p:txBody>
-          <a:bodyPr/>
-          <a:lstStyle/>
-          <a:p>
-            <a:fld id="{0B520B05-2240-4566-BE2A-9338980FE8EB}" type="datetime1">
-              <a:rPr lang="en-US" altLang="zh-TW">
-                <a:solidFill>
-                  <a:srgbClr val="D4D2D0"/>
-                </a:solidFill>
-                <a:latin typeface="Arial" panose="020B0604020202020204" pitchFamily="34" charset="0"/>
-                <a:ea typeface="新細明體" panose="02020500000000000000" pitchFamily="18" charset="-120"/>
-                <a:cs typeface="Arial" panose="020B0604020202020204" pitchFamily="34" charset="0"/>
-              </a:rPr>
-              <a:pPr/>
-              <a:t>3/14/2024</a:t>
-            </a:fld>
-            <a:endParaRPr lang="en-US" dirty="0">
-              <a:solidFill>
-                <a:srgbClr val="D4D2D0"/>
-              </a:solidFill>
-              <a:latin typeface="Arial" panose="020B0604020202020204" pitchFamily="34" charset="0"/>
-              <a:cs typeface="Arial" panose="020B0604020202020204" pitchFamily="34" charset="0"/>
-            </a:endParaRPr>
-          </a:p>
-        </p:txBody>
-      </p:sp>
-      <p:sp>
-        <p:nvSpPr>
-          <p:cNvPr id="7" name="投影片編號版面配置區 6">
-            <a:extLst>
-              <a:ext uri="{FF2B5EF4-FFF2-40B4-BE49-F238E27FC236}">
-                <a16:creationId xmlns:a16="http://schemas.microsoft.com/office/drawing/2014/main" id="{DA316F56-AF12-D872-611F-78AE7ACCBF93}"/>
-              </a:ext>
-            </a:extLst>
-          </p:cNvPr>
-          <p:cNvSpPr>
-            <a:spLocks noGrp="1"/>
-          </p:cNvSpPr>
-          <p:nvPr>
-            <p:ph type="sldNum" sz="quarter" idx="13"/>
-          </p:nvPr>
-        </p:nvSpPr>
-        <p:spPr/>
-        <p:txBody>
-          <a:bodyPr/>
-          <a:lstStyle/>
-          <a:p>
-            <a:fld id="{F99EC173-99AE-4773-AB25-02E469A13EAE}" type="slidenum">
-              <a:rPr lang="en-US">
-                <a:solidFill>
-                  <a:srgbClr val="D4D2D0"/>
-                </a:solidFill>
-                <a:latin typeface="Century Schoolbook"/>
-              </a:rPr>
-              <a:pPr/>
-              <a:t>11</a:t>
             </a:fld>
             <a:endParaRPr lang="en-US" dirty="0">
               <a:solidFill>
@@ -15004,7 +14887,7 @@
 </p:sld>
 </file>
 
-<file path=ppt/slides/slide12.xml><?xml version="1.0" encoding="utf-8"?>
+<file path=ppt/slides/slide11.xml><?xml version="1.0" encoding="utf-8"?>
 <p:sld xmlns:a="http://schemas.openxmlformats.org/drawingml/2006/main" xmlns:r="http://schemas.openxmlformats.org/officeDocument/2006/relationships" xmlns:p="http://schemas.openxmlformats.org/presentationml/2006/main">
   <p:cSld>
     <p:spTree>
@@ -15111,7 +14994,7 @@
                 <a:cs typeface="Arial" panose="020B0604020202020204" pitchFamily="34" charset="0"/>
               </a:rPr>
               <a:pPr/>
-              <a:t>3/14/2024</a:t>
+              <a:t>11/27/2024</a:t>
             </a:fld>
             <a:endParaRPr lang="en-US" dirty="0">
               <a:solidFill>
@@ -15152,7 +15035,7 @@
                 <a:latin typeface="Century Schoolbook"/>
               </a:rPr>
               <a:pPr/>
-              <a:t>12</a:t>
+              <a:t>11</a:t>
             </a:fld>
             <a:endParaRPr lang="en-US" dirty="0">
               <a:solidFill>
@@ -15209,7 +15092,7 @@
 </p:sld>
 </file>
 
-<file path=ppt/slides/slide13.xml><?xml version="1.0" encoding="utf-8"?>
+<file path=ppt/slides/slide12.xml><?xml version="1.0" encoding="utf-8"?>
 <p:sld xmlns:a="http://schemas.openxmlformats.org/drawingml/2006/main" xmlns:r="http://schemas.openxmlformats.org/officeDocument/2006/relationships" xmlns:p="http://schemas.openxmlformats.org/presentationml/2006/main">
   <p:cSld>
     <p:spTree>
@@ -15236,8 +15119,8 @@
         </p:nvSpPr>
         <p:spPr>
           <a:xfrm>
-            <a:off x="2667000" y="76200"/>
-            <a:ext cx="4191000" cy="990600"/>
+            <a:off x="1981200" y="304800"/>
+            <a:ext cx="6629400" cy="990600"/>
           </a:xfrm>
           <a:prstGeom prst="rect">
             <a:avLst/>
@@ -15265,7 +15148,7 @@
                 <a:ea typeface="微軟正黑體" panose="020B0604030504040204" pitchFamily="34" charset="-120"/>
                 <a:cs typeface="Heiti TC Light"/>
               </a:rPr>
-              <a:t>大型語言模型</a:t>
+              <a:t>著名大型語言模型</a:t>
             </a:r>
             <a:endParaRPr kumimoji="1" lang="en-US" altLang="zh-TW" sz="4800" b="1" dirty="0">
               <a:solidFill>
@@ -15301,7 +15184,12 @@
             <p:ph type="dt" sz="half" idx="12"/>
           </p:nvPr>
         </p:nvSpPr>
-        <p:spPr/>
+        <p:spPr>
+          <a:xfrm>
+            <a:off x="66675" y="6842127"/>
+            <a:ext cx="2438400" cy="244475"/>
+          </a:xfrm>
+        </p:spPr>
         <p:txBody>
           <a:bodyPr/>
           <a:lstStyle/>
@@ -15316,7 +15204,7 @@
                 <a:cs typeface="Arial" panose="020B0604020202020204" pitchFamily="34" charset="0"/>
               </a:rPr>
               <a:pPr/>
-              <a:t>3/14/2024</a:t>
+              <a:t>11/27/2024</a:t>
             </a:fld>
             <a:endParaRPr lang="en-US" dirty="0">
               <a:solidFill>
@@ -15344,7 +15232,12 @@
             <p:ph type="sldNum" sz="quarter" idx="13"/>
           </p:nvPr>
         </p:nvSpPr>
-        <p:spPr/>
+        <p:spPr>
+          <a:xfrm>
+            <a:off x="8172450" y="6842127"/>
+            <a:ext cx="914400" cy="244475"/>
+          </a:xfrm>
+        </p:spPr>
         <p:txBody>
           <a:bodyPr/>
           <a:lstStyle/>
@@ -15357,7 +15250,1063 @@
                 <a:latin typeface="Century Schoolbook"/>
               </a:rPr>
               <a:pPr/>
+              <a:t>12</a:t>
+            </a:fld>
+            <a:endParaRPr lang="en-US" dirty="0">
+              <a:solidFill>
+                <a:srgbClr val="D4D2D0"/>
+              </a:solidFill>
+              <a:latin typeface="Century Schoolbook"/>
+            </a:endParaRPr>
+          </a:p>
+        </p:txBody>
+      </p:sp>
+      <p:sp>
+        <p:nvSpPr>
+          <p:cNvPr id="2" name="文字方塊 1">
+            <a:extLst>
+              <a:ext uri="{FF2B5EF4-FFF2-40B4-BE49-F238E27FC236}">
+                <a16:creationId xmlns:a16="http://schemas.microsoft.com/office/drawing/2014/main" id="{F1216D9E-C86D-79CD-21E3-AD03964D87A6}"/>
+              </a:ext>
+            </a:extLst>
+          </p:cNvPr>
+          <p:cNvSpPr txBox="1"/>
+          <p:nvPr/>
+        </p:nvSpPr>
+        <p:spPr>
+          <a:xfrm>
+            <a:off x="533400" y="1524002"/>
+            <a:ext cx="7924800" cy="3539430"/>
+          </a:xfrm>
+          <a:prstGeom prst="rect">
+            <a:avLst/>
+          </a:prstGeom>
+          <a:noFill/>
+        </p:spPr>
+        <p:txBody>
+          <a:bodyPr wrap="square" rtlCol="0">
+            <a:spAutoFit/>
+          </a:bodyPr>
+          <a:lstStyle/>
+          <a:p>
+            <a:pPr marL="457200" indent="-457200">
+              <a:buFont typeface="Arial" panose="020B0604020202020204" pitchFamily="34" charset="0"/>
+              <a:buChar char="•"/>
+            </a:pPr>
+            <a:r>
+              <a:rPr lang="en-US" altLang="zh-TW" sz="3200" dirty="0">
+                <a:solidFill>
+                  <a:prstClr val="white"/>
+                </a:solidFill>
+                <a:latin typeface="微軟正黑體" panose="020B0604030504040204" pitchFamily="34" charset="-120"/>
+                <a:ea typeface="微軟正黑體" panose="020B0604030504040204" pitchFamily="34" charset="-120"/>
+              </a:rPr>
+              <a:t>Seq2seq</a:t>
+            </a:r>
+            <a:r>
+              <a:rPr lang="zh-TW" altLang="en-US" sz="3200" dirty="0">
+                <a:solidFill>
+                  <a:prstClr val="white"/>
+                </a:solidFill>
+                <a:latin typeface="微軟正黑體" panose="020B0604030504040204" pitchFamily="34" charset="-120"/>
+                <a:ea typeface="微軟正黑體" panose="020B0604030504040204" pitchFamily="34" charset="-120"/>
+              </a:rPr>
+              <a:t>的</a:t>
+            </a:r>
+            <a:r>
+              <a:rPr lang="en-US" altLang="zh-TW" sz="3200" dirty="0">
+                <a:solidFill>
+                  <a:prstClr val="white"/>
+                </a:solidFill>
+                <a:latin typeface="微軟正黑體" panose="020B0604030504040204" pitchFamily="34" charset="-120"/>
+                <a:ea typeface="微軟正黑體" panose="020B0604030504040204" pitchFamily="34" charset="-120"/>
+              </a:rPr>
+              <a:t>BART</a:t>
+            </a:r>
+            <a:r>
+              <a:rPr lang="zh-TW" altLang="en-US" sz="3200" dirty="0">
+                <a:solidFill>
+                  <a:prstClr val="white"/>
+                </a:solidFill>
+                <a:latin typeface="微軟正黑體" panose="020B0604030504040204" pitchFamily="34" charset="-120"/>
+                <a:ea typeface="微軟正黑體" panose="020B0604030504040204" pitchFamily="34" charset="-120"/>
+              </a:rPr>
+              <a:t>，</a:t>
+            </a:r>
+            <a:r>
+              <a:rPr lang="en-US" altLang="zh-TW" sz="3200" dirty="0">
+                <a:solidFill>
+                  <a:prstClr val="white"/>
+                </a:solidFill>
+                <a:latin typeface="微軟正黑體" panose="020B0604030504040204" pitchFamily="34" charset="-120"/>
+                <a:ea typeface="微軟正黑體" panose="020B0604030504040204" pitchFamily="34" charset="-120"/>
+              </a:rPr>
+              <a:t>T5</a:t>
+            </a:r>
+          </a:p>
+          <a:p>
+            <a:pPr marL="457200" indent="-457200">
+              <a:buFont typeface="Arial" panose="020B0604020202020204" pitchFamily="34" charset="0"/>
+              <a:buChar char="•"/>
+            </a:pPr>
+            <a:r>
+              <a:rPr lang="zh-TW" altLang="en-US" sz="3200" dirty="0">
+                <a:solidFill>
+                  <a:prstClr val="white"/>
+                </a:solidFill>
+                <a:latin typeface="微軟正黑體" panose="020B0604030504040204" pitchFamily="34" charset="-120"/>
+                <a:ea typeface="微軟正黑體" panose="020B0604030504040204" pitchFamily="34" charset="-120"/>
+              </a:rPr>
+              <a:t>單向生成模型</a:t>
+            </a:r>
+            <a:r>
+              <a:rPr lang="en-US" altLang="zh-TW" sz="3200" dirty="0">
+                <a:solidFill>
+                  <a:prstClr val="white"/>
+                </a:solidFill>
+                <a:latin typeface="微軟正黑體" panose="020B0604030504040204" pitchFamily="34" charset="-120"/>
+                <a:ea typeface="微軟正黑體" panose="020B0604030504040204" pitchFamily="34" charset="-120"/>
+              </a:rPr>
+              <a:t>GPT</a:t>
+            </a:r>
+            <a:r>
+              <a:rPr lang="zh-TW" altLang="en-US" sz="3200" dirty="0">
+                <a:solidFill>
+                  <a:prstClr val="white"/>
+                </a:solidFill>
+                <a:latin typeface="微軟正黑體" panose="020B0604030504040204" pitchFamily="34" charset="-120"/>
+                <a:ea typeface="微軟正黑體" panose="020B0604030504040204" pitchFamily="34" charset="-120"/>
+              </a:rPr>
+              <a:t>、</a:t>
+            </a:r>
+            <a:r>
+              <a:rPr lang="en-US" altLang="zh-TW" sz="3200" dirty="0">
+                <a:solidFill>
+                  <a:prstClr val="white"/>
+                </a:solidFill>
+                <a:latin typeface="微軟正黑體" panose="020B0604030504040204" pitchFamily="34" charset="-120"/>
+                <a:ea typeface="微軟正黑體" panose="020B0604030504040204" pitchFamily="34" charset="-120"/>
+              </a:rPr>
+              <a:t>GPT2</a:t>
+            </a:r>
+            <a:r>
+              <a:rPr lang="zh-TW" altLang="en-US" sz="3200" dirty="0">
+                <a:solidFill>
+                  <a:prstClr val="white"/>
+                </a:solidFill>
+                <a:latin typeface="微軟正黑體" panose="020B0604030504040204" pitchFamily="34" charset="-120"/>
+                <a:ea typeface="微軟正黑體" panose="020B0604030504040204" pitchFamily="34" charset="-120"/>
+              </a:rPr>
+              <a:t>、</a:t>
+            </a:r>
+            <a:r>
+              <a:rPr lang="en-US" altLang="zh-TW" sz="3200" dirty="0">
+                <a:solidFill>
+                  <a:prstClr val="white"/>
+                </a:solidFill>
+                <a:latin typeface="微軟正黑體" panose="020B0604030504040204" pitchFamily="34" charset="-120"/>
+                <a:ea typeface="微軟正黑體" panose="020B0604030504040204" pitchFamily="34" charset="-120"/>
+              </a:rPr>
+              <a:t>GPT3</a:t>
+            </a:r>
+          </a:p>
+          <a:p>
+            <a:pPr marL="457200" indent="-457200">
+              <a:buFont typeface="Arial" panose="020B0604020202020204" pitchFamily="34" charset="0"/>
+              <a:buChar char="•"/>
+            </a:pPr>
+            <a:r>
+              <a:rPr lang="zh-TW" altLang="en-US" sz="3200" dirty="0">
+                <a:solidFill>
+                  <a:prstClr val="white"/>
+                </a:solidFill>
+                <a:latin typeface="微軟正黑體" panose="020B0604030504040204" pitchFamily="34" charset="-120"/>
+                <a:ea typeface="微軟正黑體" panose="020B0604030504040204" pitchFamily="34" charset="-120"/>
+              </a:rPr>
+              <a:t>指令微調後的</a:t>
+            </a:r>
+            <a:r>
+              <a:rPr lang="en-US" altLang="zh-TW" sz="3200" dirty="0">
+                <a:solidFill>
+                  <a:prstClr val="white"/>
+                </a:solidFill>
+                <a:latin typeface="微軟正黑體" panose="020B0604030504040204" pitchFamily="34" charset="-120"/>
+                <a:ea typeface="微軟正黑體" panose="020B0604030504040204" pitchFamily="34" charset="-120"/>
+              </a:rPr>
+              <a:t>T0</a:t>
+            </a:r>
+            <a:r>
+              <a:rPr lang="zh-TW" altLang="en-US" sz="3200" dirty="0">
+                <a:solidFill>
+                  <a:prstClr val="white"/>
+                </a:solidFill>
+                <a:latin typeface="微軟正黑體" panose="020B0604030504040204" pitchFamily="34" charset="-120"/>
+                <a:ea typeface="微軟正黑體" panose="020B0604030504040204" pitchFamily="34" charset="-120"/>
+              </a:rPr>
+              <a:t>，</a:t>
+            </a:r>
+            <a:r>
+              <a:rPr lang="en-US" altLang="zh-TW" sz="3200" dirty="0">
+                <a:solidFill>
+                  <a:prstClr val="white"/>
+                </a:solidFill>
+                <a:latin typeface="微軟正黑體" panose="020B0604030504040204" pitchFamily="34" charset="-120"/>
+                <a:ea typeface="微軟正黑體" panose="020B0604030504040204" pitchFamily="34" charset="-120"/>
+              </a:rPr>
+              <a:t>Flan</a:t>
+            </a:r>
+          </a:p>
+          <a:p>
+            <a:pPr marL="457200" indent="-457200">
+              <a:buFont typeface="Arial" panose="020B0604020202020204" pitchFamily="34" charset="0"/>
+              <a:buChar char="•"/>
+            </a:pPr>
+            <a:r>
+              <a:rPr lang="zh-TW" altLang="en-US" sz="3200" dirty="0">
+                <a:solidFill>
+                  <a:prstClr val="white"/>
+                </a:solidFill>
+                <a:latin typeface="微軟正黑體" panose="020B0604030504040204" pitchFamily="34" charset="-120"/>
+                <a:ea typeface="微軟正黑體" panose="020B0604030504040204" pitchFamily="34" charset="-120"/>
+              </a:rPr>
+              <a:t>經過</a:t>
+            </a:r>
+            <a:r>
+              <a:rPr lang="en-US" altLang="zh-TW" sz="3200" dirty="0">
+                <a:solidFill>
+                  <a:prstClr val="white"/>
+                </a:solidFill>
+                <a:latin typeface="微軟正黑體" panose="020B0604030504040204" pitchFamily="34" charset="-120"/>
+                <a:ea typeface="微軟正黑體" panose="020B0604030504040204" pitchFamily="34" charset="-120"/>
+              </a:rPr>
+              <a:t>RLHF</a:t>
+            </a:r>
+            <a:r>
+              <a:rPr lang="zh-TW" altLang="en-US" sz="3200" dirty="0">
+                <a:solidFill>
+                  <a:prstClr val="white"/>
+                </a:solidFill>
+                <a:latin typeface="微軟正黑體" panose="020B0604030504040204" pitchFamily="34" charset="-120"/>
+                <a:ea typeface="微軟正黑體" panose="020B0604030504040204" pitchFamily="34" charset="-120"/>
+              </a:rPr>
+              <a:t>的</a:t>
+            </a:r>
+            <a:r>
+              <a:rPr lang="en-US" altLang="zh-TW" sz="3200" dirty="0" err="1">
+                <a:solidFill>
+                  <a:prstClr val="white"/>
+                </a:solidFill>
+                <a:latin typeface="微軟正黑體" panose="020B0604030504040204" pitchFamily="34" charset="-120"/>
+                <a:ea typeface="微軟正黑體" panose="020B0604030504040204" pitchFamily="34" charset="-120"/>
+              </a:rPr>
+              <a:t>InstructGPT</a:t>
+            </a:r>
+            <a:r>
+              <a:rPr lang="zh-TW" altLang="en-US" sz="3200" dirty="0">
+                <a:solidFill>
+                  <a:prstClr val="white"/>
+                </a:solidFill>
+                <a:latin typeface="微軟正黑體" panose="020B0604030504040204" pitchFamily="34" charset="-120"/>
+                <a:ea typeface="微軟正黑體" panose="020B0604030504040204" pitchFamily="34" charset="-120"/>
+              </a:rPr>
+              <a:t>、</a:t>
+            </a:r>
+            <a:r>
+              <a:rPr lang="en-US" altLang="zh-TW" sz="3200" dirty="0">
+                <a:solidFill>
+                  <a:prstClr val="white"/>
+                </a:solidFill>
+                <a:latin typeface="微軟正黑體" panose="020B0604030504040204" pitchFamily="34" charset="-120"/>
+                <a:ea typeface="微軟正黑體" panose="020B0604030504040204" pitchFamily="34" charset="-120"/>
+              </a:rPr>
+              <a:t>ChatGPT</a:t>
+            </a:r>
+          </a:p>
+          <a:p>
+            <a:pPr marL="457200" indent="-457200">
+              <a:buFont typeface="Arial" panose="020B0604020202020204" pitchFamily="34" charset="0"/>
+              <a:buChar char="•"/>
+            </a:pPr>
+            <a:r>
+              <a:rPr lang="zh-TW" altLang="en-US" sz="3200" dirty="0">
+                <a:solidFill>
+                  <a:prstClr val="white"/>
+                </a:solidFill>
+                <a:latin typeface="微軟正黑體" panose="020B0604030504040204" pitchFamily="34" charset="-120"/>
+                <a:ea typeface="微軟正黑體" panose="020B0604030504040204" pitchFamily="34" charset="-120"/>
+              </a:rPr>
+              <a:t>開源的</a:t>
+            </a:r>
+            <a:r>
+              <a:rPr lang="en-US" altLang="zh-TW" sz="3200" dirty="0">
+                <a:solidFill>
+                  <a:prstClr val="white"/>
+                </a:solidFill>
+                <a:latin typeface="微軟正黑體" panose="020B0604030504040204" pitchFamily="34" charset="-120"/>
+                <a:ea typeface="微軟正黑體" panose="020B0604030504040204" pitchFamily="34" charset="-120"/>
+              </a:rPr>
+              <a:t>LLM</a:t>
+            </a:r>
+            <a:r>
+              <a:rPr lang="zh-TW" altLang="en-US" sz="3200" dirty="0">
+                <a:solidFill>
+                  <a:prstClr val="white"/>
+                </a:solidFill>
+                <a:latin typeface="微軟正黑體" panose="020B0604030504040204" pitchFamily="34" charset="-120"/>
+                <a:ea typeface="微軟正黑體" panose="020B0604030504040204" pitchFamily="34" charset="-120"/>
+              </a:rPr>
+              <a:t> </a:t>
+            </a:r>
+            <a:r>
+              <a:rPr lang="en-US" altLang="zh-TW" sz="3200" dirty="0">
+                <a:solidFill>
+                  <a:prstClr val="white"/>
+                </a:solidFill>
+                <a:latin typeface="微軟正黑體" panose="020B0604030504040204" pitchFamily="34" charset="-120"/>
+                <a:ea typeface="微軟正黑體" panose="020B0604030504040204" pitchFamily="34" charset="-120"/>
+              </a:rPr>
+              <a:t>LLAMA</a:t>
+            </a:r>
+            <a:r>
+              <a:rPr lang="zh-TW" altLang="en-US" sz="3200" dirty="0">
+                <a:solidFill>
+                  <a:prstClr val="white"/>
+                </a:solidFill>
+                <a:latin typeface="微軟正黑體" panose="020B0604030504040204" pitchFamily="34" charset="-120"/>
+                <a:ea typeface="微軟正黑體" panose="020B0604030504040204" pitchFamily="34" charset="-120"/>
+              </a:rPr>
+              <a:t>、</a:t>
+            </a:r>
+            <a:r>
+              <a:rPr lang="en-US" altLang="zh-TW" sz="3200" dirty="0">
+                <a:solidFill>
+                  <a:prstClr val="white"/>
+                </a:solidFill>
+                <a:latin typeface="微軟正黑體" panose="020B0604030504040204" pitchFamily="34" charset="-120"/>
+                <a:ea typeface="微軟正黑體" panose="020B0604030504040204" pitchFamily="34" charset="-120"/>
+              </a:rPr>
+              <a:t>Mistral</a:t>
+            </a:r>
+          </a:p>
+          <a:p>
+            <a:pPr marL="457200" indent="-457200">
+              <a:buFont typeface="Arial" panose="020B0604020202020204" pitchFamily="34" charset="0"/>
+              <a:buChar char="•"/>
+            </a:pPr>
+            <a:r>
+              <a:rPr lang="zh-TW" altLang="en-US" sz="3200" dirty="0">
+                <a:solidFill>
+                  <a:prstClr val="white"/>
+                </a:solidFill>
+                <a:latin typeface="微軟正黑體" panose="020B0604030504040204" pitchFamily="34" charset="-120"/>
+                <a:ea typeface="微軟正黑體" panose="020B0604030504040204" pitchFamily="34" charset="-120"/>
+              </a:rPr>
+              <a:t>經過</a:t>
+            </a:r>
+            <a:r>
+              <a:rPr lang="en-US" altLang="zh-TW" sz="3200" dirty="0">
+                <a:solidFill>
+                  <a:prstClr val="white"/>
+                </a:solidFill>
+                <a:latin typeface="微軟正黑體" panose="020B0604030504040204" pitchFamily="34" charset="-120"/>
+                <a:ea typeface="微軟正黑體" panose="020B0604030504040204" pitchFamily="34" charset="-120"/>
+              </a:rPr>
+              <a:t>MOE</a:t>
+            </a:r>
+            <a:r>
+              <a:rPr lang="zh-TW" altLang="en-US" sz="3200" dirty="0">
+                <a:solidFill>
+                  <a:prstClr val="white"/>
+                </a:solidFill>
+                <a:latin typeface="微軟正黑體" panose="020B0604030504040204" pitchFamily="34" charset="-120"/>
+                <a:ea typeface="微軟正黑體" panose="020B0604030504040204" pitchFamily="34" charset="-120"/>
+              </a:rPr>
+              <a:t>優化的</a:t>
+            </a:r>
+            <a:r>
+              <a:rPr lang="en-US" altLang="zh-TW" sz="3200" dirty="0" err="1">
+                <a:solidFill>
+                  <a:prstClr val="white"/>
+                </a:solidFill>
+                <a:latin typeface="微軟正黑體" panose="020B0604030504040204" pitchFamily="34" charset="-120"/>
+                <a:ea typeface="微軟正黑體" panose="020B0604030504040204" pitchFamily="34" charset="-120"/>
+              </a:rPr>
+              <a:t>Mixtral</a:t>
+            </a:r>
+            <a:endParaRPr lang="en-US" altLang="zh-TW" sz="3200" dirty="0">
+              <a:solidFill>
+                <a:prstClr val="white"/>
+              </a:solidFill>
+              <a:latin typeface="微軟正黑體" panose="020B0604030504040204" pitchFamily="34" charset="-120"/>
+              <a:ea typeface="微軟正黑體" panose="020B0604030504040204" pitchFamily="34" charset="-120"/>
+            </a:endParaRPr>
+          </a:p>
+          <a:p>
+            <a:pPr marL="457200" indent="-457200">
+              <a:buFont typeface="Arial" panose="020B0604020202020204" pitchFamily="34" charset="0"/>
+              <a:buChar char="•"/>
+            </a:pPr>
+            <a:endParaRPr lang="en-US" altLang="zh-TW" sz="3200" dirty="0">
+              <a:solidFill>
+                <a:prstClr val="white"/>
+              </a:solidFill>
+              <a:latin typeface="微軟正黑體" panose="020B0604030504040204" pitchFamily="34" charset="-120"/>
+              <a:ea typeface="微軟正黑體" panose="020B0604030504040204" pitchFamily="34" charset="-120"/>
+            </a:endParaRPr>
+          </a:p>
+        </p:txBody>
+      </p:sp>
+    </p:spTree>
+    <p:extLst>
+      <p:ext uri="{BB962C8B-B14F-4D97-AF65-F5344CB8AC3E}">
+        <p14:creationId xmlns:p14="http://schemas.microsoft.com/office/powerpoint/2010/main" val="3268113184"/>
+      </p:ext>
+    </p:extLst>
+  </p:cSld>
+  <p:clrMapOvr>
+    <a:masterClrMapping/>
+  </p:clrMapOvr>
+  <p:transition>
+    <p:fade/>
+  </p:transition>
+</p:sld>
+</file>
+
+<file path=ppt/slides/slide13.xml><?xml version="1.0" encoding="utf-8"?>
+<p:sld xmlns:a="http://schemas.openxmlformats.org/drawingml/2006/main" xmlns:r="http://schemas.openxmlformats.org/officeDocument/2006/relationships" xmlns:p="http://schemas.openxmlformats.org/presentationml/2006/main">
+  <p:cSld>
+    <p:spTree>
+      <p:nvGrpSpPr>
+        <p:cNvPr id="1" name="">
+          <a:extLst>
+            <a:ext uri="{FF2B5EF4-FFF2-40B4-BE49-F238E27FC236}">
+              <a16:creationId xmlns:a16="http://schemas.microsoft.com/office/drawing/2014/main" id="{24502A18-CE0F-F304-0DFA-2D19FC1DF686}"/>
+            </a:ext>
+          </a:extLst>
+        </p:cNvPr>
+        <p:cNvGrpSpPr/>
+        <p:nvPr/>
+      </p:nvGrpSpPr>
+      <p:grpSpPr>
+        <a:xfrm>
+          <a:off x="0" y="0"/>
+          <a:ext cx="0" cy="0"/>
+          <a:chOff x="0" y="0"/>
+          <a:chExt cx="0" cy="0"/>
+        </a:xfrm>
+      </p:grpSpPr>
+      <p:sp>
+        <p:nvSpPr>
+          <p:cNvPr id="4" name="文字版面配置區 2">
+            <a:extLst>
+              <a:ext uri="{FF2B5EF4-FFF2-40B4-BE49-F238E27FC236}">
+                <a16:creationId xmlns:a16="http://schemas.microsoft.com/office/drawing/2014/main" id="{C11C97A7-82AD-65C5-D0B8-F8860051DFF4}"/>
+              </a:ext>
+            </a:extLst>
+          </p:cNvPr>
+          <p:cNvSpPr txBox="1">
+            <a:spLocks/>
+          </p:cNvSpPr>
+          <p:nvPr/>
+        </p:nvSpPr>
+        <p:spPr>
+          <a:xfrm>
+            <a:off x="1981200" y="304800"/>
+            <a:ext cx="6629400" cy="990600"/>
+          </a:xfrm>
+          <a:prstGeom prst="rect">
+            <a:avLst/>
+          </a:prstGeom>
+        </p:spPr>
+        <p:txBody>
+          <a:bodyPr tIns="91440" bIns="91440" anchor="b" anchorCtr="0">
+            <a:noAutofit/>
+          </a:bodyPr>
+          <a:lstStyle/>
+          <a:p>
+            <a:r>
+              <a:rPr kumimoji="1" lang="zh-TW" altLang="en-US" sz="4800" b="1" dirty="0">
+                <a:solidFill>
+                  <a:srgbClr val="00B0F0"/>
+                </a:solidFill>
+                <a:effectLst>
+                  <a:outerShdw blurRad="38100" dist="38100" dir="2700000" algn="tl">
+                    <a:srgbClr val="000000">
+                      <a:alpha val="43137"/>
+                    </a:srgbClr>
+                  </a:outerShdw>
+                </a:effectLst>
+                <a:latin typeface="微軟正黑體" panose="020B0604030504040204" pitchFamily="34" charset="-120"/>
+                <a:ea typeface="微軟正黑體" panose="020B0604030504040204" pitchFamily="34" charset="-120"/>
+                <a:cs typeface="Heiti TC Light"/>
+              </a:rPr>
+              <a:t>台灣的大型語言模型</a:t>
+            </a:r>
+            <a:endParaRPr kumimoji="1" lang="en-US" altLang="zh-TW" sz="4800" b="1" dirty="0">
+              <a:solidFill>
+                <a:srgbClr val="00B0F0"/>
+              </a:solidFill>
+              <a:effectLst>
+                <a:outerShdw blurRad="38100" dist="38100" dir="2700000" algn="tl">
+                  <a:srgbClr val="000000">
+                    <a:alpha val="43137"/>
+                  </a:srgbClr>
+                </a:outerShdw>
+              </a:effectLst>
+              <a:latin typeface="微軟正黑體" panose="020B0604030504040204" pitchFamily="34" charset="-120"/>
+              <a:ea typeface="微軟正黑體" panose="020B0604030504040204" pitchFamily="34" charset="-120"/>
+              <a:cs typeface="Heiti TC Light"/>
+            </a:endParaRPr>
+          </a:p>
+        </p:txBody>
+      </p:sp>
+      <p:sp>
+        <p:nvSpPr>
+          <p:cNvPr id="3" name="日期版面配置區 2">
+            <a:extLst>
+              <a:ext uri="{FF2B5EF4-FFF2-40B4-BE49-F238E27FC236}">
+                <a16:creationId xmlns:a16="http://schemas.microsoft.com/office/drawing/2014/main" id="{C56751F9-8630-54DB-D58E-20F741FF6766}"/>
+              </a:ext>
+            </a:extLst>
+          </p:cNvPr>
+          <p:cNvSpPr>
+            <a:spLocks noGrp="1"/>
+          </p:cNvSpPr>
+          <p:nvPr>
+            <p:ph type="dt" sz="half" idx="12"/>
+          </p:nvPr>
+        </p:nvSpPr>
+        <p:spPr>
+          <a:xfrm>
+            <a:off x="66675" y="6842127"/>
+            <a:ext cx="2438400" cy="244475"/>
+          </a:xfrm>
+        </p:spPr>
+        <p:txBody>
+          <a:bodyPr/>
+          <a:lstStyle/>
+          <a:p>
+            <a:fld id="{0B520B05-2240-4566-BE2A-9338980FE8EB}" type="datetime1">
+              <a:rPr lang="en-US" altLang="zh-TW">
+                <a:solidFill>
+                  <a:srgbClr val="D4D2D0"/>
+                </a:solidFill>
+                <a:latin typeface="Arial" panose="020B0604020202020204" pitchFamily="34" charset="0"/>
+                <a:ea typeface="新細明體" panose="02020500000000000000" pitchFamily="18" charset="-120"/>
+                <a:cs typeface="Arial" panose="020B0604020202020204" pitchFamily="34" charset="0"/>
+              </a:rPr>
+              <a:pPr/>
+              <a:t>11/27/2024</a:t>
+            </a:fld>
+            <a:endParaRPr lang="en-US" dirty="0">
+              <a:solidFill>
+                <a:srgbClr val="D4D2D0"/>
+              </a:solidFill>
+              <a:latin typeface="Arial" panose="020B0604020202020204" pitchFamily="34" charset="0"/>
+              <a:cs typeface="Arial" panose="020B0604020202020204" pitchFamily="34" charset="0"/>
+            </a:endParaRPr>
+          </a:p>
+        </p:txBody>
+      </p:sp>
+      <p:sp>
+        <p:nvSpPr>
+          <p:cNvPr id="7" name="投影片編號版面配置區 6">
+            <a:extLst>
+              <a:ext uri="{FF2B5EF4-FFF2-40B4-BE49-F238E27FC236}">
+                <a16:creationId xmlns:a16="http://schemas.microsoft.com/office/drawing/2014/main" id="{7F905FE5-B431-780A-9899-6884603BC50C}"/>
+              </a:ext>
+            </a:extLst>
+          </p:cNvPr>
+          <p:cNvSpPr>
+            <a:spLocks noGrp="1"/>
+          </p:cNvSpPr>
+          <p:nvPr>
+            <p:ph type="sldNum" sz="quarter" idx="13"/>
+          </p:nvPr>
+        </p:nvSpPr>
+        <p:spPr>
+          <a:xfrm>
+            <a:off x="8172450" y="6842127"/>
+            <a:ext cx="914400" cy="244475"/>
+          </a:xfrm>
+        </p:spPr>
+        <p:txBody>
+          <a:bodyPr/>
+          <a:lstStyle/>
+          <a:p>
+            <a:fld id="{F99EC173-99AE-4773-AB25-02E469A13EAE}" type="slidenum">
+              <a:rPr lang="en-US">
+                <a:solidFill>
+                  <a:srgbClr val="D4D2D0"/>
+                </a:solidFill>
+                <a:latin typeface="Century Schoolbook"/>
+              </a:rPr>
+              <a:pPr/>
               <a:t>13</a:t>
+            </a:fld>
+            <a:endParaRPr lang="en-US" dirty="0">
+              <a:solidFill>
+                <a:srgbClr val="D4D2D0"/>
+              </a:solidFill>
+              <a:latin typeface="Century Schoolbook"/>
+            </a:endParaRPr>
+          </a:p>
+        </p:txBody>
+      </p:sp>
+      <p:sp>
+        <p:nvSpPr>
+          <p:cNvPr id="2" name="文字方塊 1">
+            <a:extLst>
+              <a:ext uri="{FF2B5EF4-FFF2-40B4-BE49-F238E27FC236}">
+                <a16:creationId xmlns:a16="http://schemas.microsoft.com/office/drawing/2014/main" id="{109636D7-A844-26D1-0595-95660CD9B2C8}"/>
+              </a:ext>
+            </a:extLst>
+          </p:cNvPr>
+          <p:cNvSpPr txBox="1"/>
+          <p:nvPr/>
+        </p:nvSpPr>
+        <p:spPr>
+          <a:xfrm>
+            <a:off x="533400" y="1524002"/>
+            <a:ext cx="7924800" cy="2554545"/>
+          </a:xfrm>
+          <a:prstGeom prst="rect">
+            <a:avLst/>
+          </a:prstGeom>
+          <a:noFill/>
+        </p:spPr>
+        <p:txBody>
+          <a:bodyPr wrap="square" rtlCol="0">
+            <a:spAutoFit/>
+          </a:bodyPr>
+          <a:lstStyle/>
+          <a:p>
+            <a:pPr marL="457200" indent="-457200">
+              <a:buFont typeface="Arial" panose="020B0604020202020204" pitchFamily="34" charset="0"/>
+              <a:buChar char="•"/>
+            </a:pPr>
+            <a:r>
+              <a:rPr lang="zh-TW" altLang="en-US" sz="3200" dirty="0">
+                <a:solidFill>
+                  <a:prstClr val="white"/>
+                </a:solidFill>
+                <a:latin typeface="微軟正黑體" panose="020B0604030504040204" pitchFamily="34" charset="-120"/>
+                <a:ea typeface="微軟正黑體" panose="020B0604030504040204" pitchFamily="34" charset="-120"/>
+              </a:rPr>
+              <a:t>國科會</a:t>
+            </a:r>
+            <a:r>
+              <a:rPr lang="en-US" altLang="zh-TW" sz="3200" dirty="0">
+                <a:solidFill>
+                  <a:prstClr val="white"/>
+                </a:solidFill>
+                <a:latin typeface="微軟正黑體" panose="020B0604030504040204" pitchFamily="34" charset="-120"/>
+                <a:ea typeface="微軟正黑體" panose="020B0604030504040204" pitchFamily="34" charset="-120"/>
+              </a:rPr>
+              <a:t>TAIDE(</a:t>
+            </a:r>
+            <a:r>
+              <a:rPr lang="zh-TW" altLang="en-US" sz="3200" dirty="0">
+                <a:solidFill>
+                  <a:prstClr val="white"/>
+                </a:solidFill>
+                <a:latin typeface="微軟正黑體" panose="020B0604030504040204" pitchFamily="34" charset="-120"/>
+                <a:ea typeface="微軟正黑體" panose="020B0604030504040204" pitchFamily="34" charset="-120"/>
+              </a:rPr>
+              <a:t>官</a:t>
+            </a:r>
+            <a:r>
+              <a:rPr lang="en-US" altLang="zh-TW" sz="3200" dirty="0">
+                <a:solidFill>
+                  <a:prstClr val="white"/>
+                </a:solidFill>
+                <a:latin typeface="微軟正黑體" panose="020B0604030504040204" pitchFamily="34" charset="-120"/>
+                <a:ea typeface="微軟正黑體" panose="020B0604030504040204" pitchFamily="34" charset="-120"/>
+              </a:rPr>
+              <a:t>)</a:t>
+            </a:r>
+          </a:p>
+          <a:p>
+            <a:pPr marL="457200" indent="-457200">
+              <a:buFont typeface="Arial" panose="020B0604020202020204" pitchFamily="34" charset="0"/>
+              <a:buChar char="•"/>
+            </a:pPr>
+            <a:r>
+              <a:rPr lang="zh-TW" altLang="en-US" sz="3200" dirty="0">
+                <a:solidFill>
+                  <a:prstClr val="white"/>
+                </a:solidFill>
+                <a:latin typeface="微軟正黑體" panose="020B0604030504040204" pitchFamily="34" charset="-120"/>
+                <a:ea typeface="微軟正黑體" panose="020B0604030504040204" pitchFamily="34" charset="-120"/>
+              </a:rPr>
+              <a:t>連發科</a:t>
+            </a:r>
+            <a:r>
+              <a:rPr lang="en-US" altLang="zh-TW" sz="3200" dirty="0">
+                <a:solidFill>
+                  <a:prstClr val="white"/>
+                </a:solidFill>
+                <a:latin typeface="微軟正黑體" panose="020B0604030504040204" pitchFamily="34" charset="-120"/>
+                <a:ea typeface="微軟正黑體" panose="020B0604030504040204" pitchFamily="34" charset="-120"/>
+              </a:rPr>
+              <a:t>Breeze(</a:t>
+            </a:r>
+            <a:r>
+              <a:rPr lang="zh-TW" altLang="en-US" sz="3200" dirty="0">
+                <a:solidFill>
+                  <a:prstClr val="white"/>
+                </a:solidFill>
+                <a:latin typeface="微軟正黑體" panose="020B0604030504040204" pitchFamily="34" charset="-120"/>
+                <a:ea typeface="微軟正黑體" panose="020B0604030504040204" pitchFamily="34" charset="-120"/>
+              </a:rPr>
+              <a:t>產</a:t>
+            </a:r>
+            <a:r>
+              <a:rPr lang="en-US" altLang="zh-TW" sz="3200" dirty="0">
+                <a:solidFill>
+                  <a:prstClr val="white"/>
+                </a:solidFill>
+                <a:latin typeface="微軟正黑體" panose="020B0604030504040204" pitchFamily="34" charset="-120"/>
+                <a:ea typeface="微軟正黑體" panose="020B0604030504040204" pitchFamily="34" charset="-120"/>
+              </a:rPr>
+              <a:t>)</a:t>
+            </a:r>
+          </a:p>
+          <a:p>
+            <a:pPr marL="457200" indent="-457200">
+              <a:buFont typeface="Arial" panose="020B0604020202020204" pitchFamily="34" charset="0"/>
+              <a:buChar char="•"/>
+            </a:pPr>
+            <a:r>
+              <a:rPr lang="zh-TW" altLang="en-US" sz="3200" dirty="0">
+                <a:solidFill>
+                  <a:prstClr val="white"/>
+                </a:solidFill>
+                <a:latin typeface="微軟正黑體" panose="020B0604030504040204" pitchFamily="34" charset="-120"/>
+                <a:ea typeface="微軟正黑體" panose="020B0604030504040204" pitchFamily="34" charset="-120"/>
+              </a:rPr>
+              <a:t>台智雲的類</a:t>
+            </a:r>
+            <a:r>
+              <a:rPr lang="en-US" altLang="zh-TW" sz="3200" dirty="0">
+                <a:solidFill>
+                  <a:prstClr val="white"/>
+                </a:solidFill>
+                <a:latin typeface="微軟正黑體" panose="020B0604030504040204" pitchFamily="34" charset="-120"/>
+                <a:ea typeface="微軟正黑體" panose="020B0604030504040204" pitchFamily="34" charset="-120"/>
+              </a:rPr>
+              <a:t>Bloom(</a:t>
+            </a:r>
+            <a:r>
+              <a:rPr lang="zh-TW" altLang="en-US" sz="3200" dirty="0">
+                <a:solidFill>
+                  <a:prstClr val="white"/>
+                </a:solidFill>
+                <a:latin typeface="微軟正黑體" panose="020B0604030504040204" pitchFamily="34" charset="-120"/>
+                <a:ea typeface="微軟正黑體" panose="020B0604030504040204" pitchFamily="34" charset="-120"/>
+              </a:rPr>
+              <a:t>雲</a:t>
+            </a:r>
+            <a:r>
+              <a:rPr lang="en-US" altLang="zh-TW" sz="3200" dirty="0">
+                <a:solidFill>
+                  <a:prstClr val="white"/>
+                </a:solidFill>
+                <a:latin typeface="微軟正黑體" panose="020B0604030504040204" pitchFamily="34" charset="-120"/>
+                <a:ea typeface="微軟正黑體" panose="020B0604030504040204" pitchFamily="34" charset="-120"/>
+              </a:rPr>
+              <a:t>)</a:t>
+            </a:r>
+          </a:p>
+          <a:p>
+            <a:pPr marL="457200" indent="-457200">
+              <a:buFont typeface="Arial" panose="020B0604020202020204" pitchFamily="34" charset="0"/>
+              <a:buChar char="•"/>
+            </a:pPr>
+            <a:r>
+              <a:rPr lang="en-US" altLang="zh-TW" sz="3200" dirty="0">
+                <a:solidFill>
+                  <a:prstClr val="white"/>
+                </a:solidFill>
+                <a:latin typeface="微軟正黑體" panose="020B0604030504040204" pitchFamily="34" charset="-120"/>
+                <a:ea typeface="微軟正黑體" panose="020B0604030504040204" pitchFamily="34" charset="-120"/>
+              </a:rPr>
+              <a:t>TAME</a:t>
+            </a:r>
+            <a:r>
+              <a:rPr lang="zh-TW" altLang="en-US" sz="3200" dirty="0">
+                <a:solidFill>
+                  <a:prstClr val="white"/>
+                </a:solidFill>
+                <a:latin typeface="微軟正黑體" panose="020B0604030504040204" pitchFamily="34" charset="-120"/>
+                <a:ea typeface="微軟正黑體" panose="020B0604030504040204" pitchFamily="34" charset="-120"/>
+              </a:rPr>
+              <a:t> </a:t>
+            </a:r>
+            <a:r>
+              <a:rPr lang="en-US" altLang="zh-TW" sz="3200" dirty="0">
+                <a:solidFill>
+                  <a:prstClr val="white"/>
+                </a:solidFill>
+                <a:latin typeface="微軟正黑體" panose="020B0604030504040204" pitchFamily="34" charset="-120"/>
+                <a:ea typeface="微軟正黑體" panose="020B0604030504040204" pitchFamily="34" charset="-120"/>
+              </a:rPr>
+              <a:t>Project(</a:t>
+            </a:r>
+            <a:r>
+              <a:rPr lang="zh-TW" altLang="en-US" sz="3200" dirty="0">
+                <a:solidFill>
+                  <a:prstClr val="white"/>
+                </a:solidFill>
+                <a:latin typeface="微軟正黑體" panose="020B0604030504040204" pitchFamily="34" charset="-120"/>
+                <a:ea typeface="微軟正黑體" panose="020B0604030504040204" pitchFamily="34" charset="-120"/>
+              </a:rPr>
+              <a:t>學</a:t>
+            </a:r>
+            <a:r>
+              <a:rPr lang="en-US" altLang="zh-TW" sz="3200" dirty="0">
+                <a:solidFill>
+                  <a:prstClr val="white"/>
+                </a:solidFill>
+                <a:latin typeface="微軟正黑體" panose="020B0604030504040204" pitchFamily="34" charset="-120"/>
+                <a:ea typeface="微軟正黑體" panose="020B0604030504040204" pitchFamily="34" charset="-120"/>
+              </a:rPr>
+              <a:t>)</a:t>
+            </a:r>
+          </a:p>
+          <a:p>
+            <a:pPr marL="457200" indent="-457200">
+              <a:buFont typeface="Arial" panose="020B0604020202020204" pitchFamily="34" charset="0"/>
+              <a:buChar char="•"/>
+            </a:pPr>
+            <a:r>
+              <a:rPr lang="zh-TW" altLang="en-US" sz="3200" dirty="0">
+                <a:solidFill>
+                  <a:prstClr val="white"/>
+                </a:solidFill>
+                <a:latin typeface="微軟正黑體" panose="020B0604030504040204" pitchFamily="34" charset="-120"/>
+                <a:ea typeface="微軟正黑體" panose="020B0604030504040204" pitchFamily="34" charset="-120"/>
+              </a:rPr>
+              <a:t>微軟合作的中文模型</a:t>
+            </a:r>
+            <a:r>
+              <a:rPr lang="en-US" altLang="zh-TW" sz="3200" dirty="0">
+                <a:solidFill>
+                  <a:prstClr val="white"/>
+                </a:solidFill>
+                <a:latin typeface="微軟正黑體" panose="020B0604030504040204" pitchFamily="34" charset="-120"/>
+                <a:ea typeface="微軟正黑體" panose="020B0604030504040204" pitchFamily="34" charset="-120"/>
+              </a:rPr>
+              <a:t>(11</a:t>
+            </a:r>
+            <a:r>
+              <a:rPr lang="zh-TW" altLang="en-US" sz="3200" dirty="0">
+                <a:solidFill>
+                  <a:prstClr val="white"/>
+                </a:solidFill>
+                <a:latin typeface="微軟正黑體" panose="020B0604030504040204" pitchFamily="34" charset="-120"/>
+                <a:ea typeface="微軟正黑體" panose="020B0604030504040204" pitchFamily="34" charset="-120"/>
+              </a:rPr>
+              <a:t>月</a:t>
+            </a:r>
+            <a:r>
+              <a:rPr lang="en-US" altLang="zh-TW" sz="3200" dirty="0">
+                <a:solidFill>
+                  <a:prstClr val="white"/>
+                </a:solidFill>
+                <a:latin typeface="微軟正黑體" panose="020B0604030504040204" pitchFamily="34" charset="-120"/>
+                <a:ea typeface="微軟正黑體" panose="020B0604030504040204" pitchFamily="34" charset="-120"/>
+              </a:rPr>
+              <a:t>20</a:t>
+            </a:r>
+            <a:r>
+              <a:rPr lang="zh-TW" altLang="en-US" sz="3200" dirty="0">
+                <a:solidFill>
+                  <a:prstClr val="white"/>
+                </a:solidFill>
+                <a:latin typeface="微軟正黑體" panose="020B0604030504040204" pitchFamily="34" charset="-120"/>
+                <a:ea typeface="微軟正黑體" panose="020B0604030504040204" pitchFamily="34" charset="-120"/>
+              </a:rPr>
+              <a:t>日推出</a:t>
+            </a:r>
+            <a:r>
+              <a:rPr lang="en-US" altLang="zh-TW" sz="3200" dirty="0">
+                <a:solidFill>
+                  <a:prstClr val="white"/>
+                </a:solidFill>
+                <a:latin typeface="微軟正黑體" panose="020B0604030504040204" pitchFamily="34" charset="-120"/>
+                <a:ea typeface="微軟正黑體" panose="020B0604030504040204" pitchFamily="34" charset="-120"/>
+              </a:rPr>
+              <a:t>)</a:t>
+            </a:r>
+          </a:p>
+        </p:txBody>
+      </p:sp>
+    </p:spTree>
+    <p:extLst>
+      <p:ext uri="{BB962C8B-B14F-4D97-AF65-F5344CB8AC3E}">
+        <p14:creationId xmlns:p14="http://schemas.microsoft.com/office/powerpoint/2010/main" val="2456878485"/>
+      </p:ext>
+    </p:extLst>
+  </p:cSld>
+  <p:clrMapOvr>
+    <a:masterClrMapping/>
+  </p:clrMapOvr>
+  <p:transition>
+    <p:fade/>
+  </p:transition>
+</p:sld>
+</file>
+
+<file path=ppt/slides/slide14.xml><?xml version="1.0" encoding="utf-8"?>
+<p:sld xmlns:a="http://schemas.openxmlformats.org/drawingml/2006/main" xmlns:r="http://schemas.openxmlformats.org/officeDocument/2006/relationships" xmlns:p="http://schemas.openxmlformats.org/presentationml/2006/main">
+  <p:cSld>
+    <p:spTree>
+      <p:nvGrpSpPr>
+        <p:cNvPr id="1" name=""/>
+        <p:cNvGrpSpPr/>
+        <p:nvPr/>
+      </p:nvGrpSpPr>
+      <p:grpSpPr>
+        <a:xfrm>
+          <a:off x="0" y="0"/>
+          <a:ext cx="0" cy="0"/>
+          <a:chOff x="0" y="0"/>
+          <a:chExt cx="0" cy="0"/>
+        </a:xfrm>
+      </p:grpSpPr>
+      <p:sp>
+        <p:nvSpPr>
+          <p:cNvPr id="4" name="文字版面配置區 2"/>
+          <p:cNvSpPr txBox="1">
+            <a:spLocks/>
+          </p:cNvSpPr>
+          <p:nvPr/>
+        </p:nvSpPr>
+        <p:spPr>
+          <a:xfrm>
+            <a:off x="2667000" y="76200"/>
+            <a:ext cx="4191000" cy="990600"/>
+          </a:xfrm>
+          <a:prstGeom prst="rect">
+            <a:avLst/>
+          </a:prstGeom>
+        </p:spPr>
+        <p:txBody>
+          <a:bodyPr tIns="91440" bIns="91440" anchor="b" anchorCtr="0">
+            <a:noAutofit/>
+          </a:bodyPr>
+          <a:lstStyle/>
+          <a:p>
+            <a:r>
+              <a:rPr kumimoji="1" lang="zh-TW" altLang="en-US" sz="4800" b="1" dirty="0">
+                <a:solidFill>
+                  <a:srgbClr val="00B0F0"/>
+                </a:solidFill>
+                <a:effectLst>
+                  <a:outerShdw blurRad="38100" dist="38100" dir="2700000" algn="tl">
+                    <a:srgbClr val="000000">
+                      <a:alpha val="43137"/>
+                    </a:srgbClr>
+                  </a:outerShdw>
+                </a:effectLst>
+                <a:latin typeface="微軟正黑體" panose="020B0604030504040204" pitchFamily="34" charset="-120"/>
+                <a:ea typeface="微軟正黑體" panose="020B0604030504040204" pitchFamily="34" charset="-120"/>
+                <a:cs typeface="Heiti TC Light"/>
+              </a:rPr>
+              <a:t>大型語言模型</a:t>
+            </a:r>
+            <a:endParaRPr kumimoji="1" lang="en-US" altLang="zh-TW" sz="4800" b="1" dirty="0">
+              <a:solidFill>
+                <a:srgbClr val="00B0F0"/>
+              </a:solidFill>
+              <a:effectLst>
+                <a:outerShdw blurRad="38100" dist="38100" dir="2700000" algn="tl">
+                  <a:srgbClr val="000000">
+                    <a:alpha val="43137"/>
+                  </a:srgbClr>
+                </a:outerShdw>
+              </a:effectLst>
+              <a:latin typeface="微軟正黑體" panose="020B0604030504040204" pitchFamily="34" charset="-120"/>
+              <a:ea typeface="微軟正黑體" panose="020B0604030504040204" pitchFamily="34" charset="-120"/>
+              <a:cs typeface="Heiti TC Light"/>
+            </a:endParaRPr>
+          </a:p>
+        </p:txBody>
+      </p:sp>
+      <p:sp>
+        <p:nvSpPr>
+          <p:cNvPr id="3" name="日期版面配置區 2">
+            <a:extLst>
+              <a:ext uri="{FF2B5EF4-FFF2-40B4-BE49-F238E27FC236}">
+                <a16:creationId xmlns:a16="http://schemas.microsoft.com/office/drawing/2014/main" id="{1C536CB5-3C58-6CF1-767E-952B76F12DEE}"/>
+              </a:ext>
+            </a:extLst>
+          </p:cNvPr>
+          <p:cNvSpPr>
+            <a:spLocks noGrp="1"/>
+          </p:cNvSpPr>
+          <p:nvPr>
+            <p:ph type="dt" sz="half" idx="12"/>
+          </p:nvPr>
+        </p:nvSpPr>
+        <p:spPr/>
+        <p:txBody>
+          <a:bodyPr/>
+          <a:lstStyle/>
+          <a:p>
+            <a:fld id="{0B520B05-2240-4566-BE2A-9338980FE8EB}" type="datetime1">
+              <a:rPr lang="en-US" altLang="zh-TW">
+                <a:solidFill>
+                  <a:srgbClr val="D4D2D0"/>
+                </a:solidFill>
+                <a:latin typeface="Arial" panose="020B0604020202020204" pitchFamily="34" charset="0"/>
+                <a:ea typeface="新細明體" panose="02020500000000000000" pitchFamily="18" charset="-120"/>
+                <a:cs typeface="Arial" panose="020B0604020202020204" pitchFamily="34" charset="0"/>
+              </a:rPr>
+              <a:pPr/>
+              <a:t>11/27/2024</a:t>
+            </a:fld>
+            <a:endParaRPr lang="en-US" dirty="0">
+              <a:solidFill>
+                <a:srgbClr val="D4D2D0"/>
+              </a:solidFill>
+              <a:latin typeface="Arial" panose="020B0604020202020204" pitchFamily="34" charset="0"/>
+              <a:cs typeface="Arial" panose="020B0604020202020204" pitchFamily="34" charset="0"/>
+            </a:endParaRPr>
+          </a:p>
+        </p:txBody>
+      </p:sp>
+      <p:sp>
+        <p:nvSpPr>
+          <p:cNvPr id="7" name="投影片編號版面配置區 6">
+            <a:extLst>
+              <a:ext uri="{FF2B5EF4-FFF2-40B4-BE49-F238E27FC236}">
+                <a16:creationId xmlns:a16="http://schemas.microsoft.com/office/drawing/2014/main" id="{DA316F56-AF12-D872-611F-78AE7ACCBF93}"/>
+              </a:ext>
+            </a:extLst>
+          </p:cNvPr>
+          <p:cNvSpPr>
+            <a:spLocks noGrp="1"/>
+          </p:cNvSpPr>
+          <p:nvPr>
+            <p:ph type="sldNum" sz="quarter" idx="13"/>
+          </p:nvPr>
+        </p:nvSpPr>
+        <p:spPr/>
+        <p:txBody>
+          <a:bodyPr/>
+          <a:lstStyle/>
+          <a:p>
+            <a:fld id="{F99EC173-99AE-4773-AB25-02E469A13EAE}" type="slidenum">
+              <a:rPr lang="en-US">
+                <a:solidFill>
+                  <a:srgbClr val="D4D2D0"/>
+                </a:solidFill>
+                <a:latin typeface="Century Schoolbook"/>
+              </a:rPr>
+              <a:pPr/>
+              <a:t>14</a:t>
             </a:fld>
             <a:endParaRPr lang="en-US" dirty="0">
               <a:solidFill>
@@ -15414,7 +16363,7 @@
 </p:sld>
 </file>
 
-<file path=ppt/slides/slide14.xml><?xml version="1.0" encoding="utf-8"?>
+<file path=ppt/slides/slide15.xml><?xml version="1.0" encoding="utf-8"?>
 <p:sld xmlns:a="http://schemas.openxmlformats.org/drawingml/2006/main" xmlns:r="http://schemas.openxmlformats.org/officeDocument/2006/relationships" xmlns:p="http://schemas.openxmlformats.org/presentationml/2006/main">
   <p:cSld>
     <p:spTree>
@@ -15538,7 +16487,7 @@
 </p:sld>
 </file>
 
-<file path=ppt/slides/slide15.xml><?xml version="1.0" encoding="utf-8"?>
+<file path=ppt/slides/slide16.xml><?xml version="1.0" encoding="utf-8"?>
 <p:sld xmlns:a="http://schemas.openxmlformats.org/drawingml/2006/main" xmlns:r="http://schemas.openxmlformats.org/officeDocument/2006/relationships" xmlns:p="http://schemas.openxmlformats.org/presentationml/2006/main">
   <p:cSld>
     <p:spTree>
@@ -15662,7 +16611,7 @@
 </p:sld>
 </file>
 
-<file path=ppt/slides/slide16.xml><?xml version="1.0" encoding="utf-8"?>
+<file path=ppt/slides/slide17.xml><?xml version="1.0" encoding="utf-8"?>
 <p:sld xmlns:a="http://schemas.openxmlformats.org/drawingml/2006/main" xmlns:r="http://schemas.openxmlformats.org/officeDocument/2006/relationships" xmlns:p="http://schemas.openxmlformats.org/presentationml/2006/main">
   <p:cSld>
     <p:spTree>
@@ -15774,7 +16723,7 @@
                 <a:cs typeface="Arial" panose="020B0604020202020204" pitchFamily="34" charset="0"/>
               </a:rPr>
               <a:pPr/>
-              <a:t>3/14/2024</a:t>
+              <a:t>11/27/2024</a:t>
             </a:fld>
             <a:endParaRPr lang="en-US" dirty="0">
               <a:solidFill>
@@ -15820,7 +16769,7 @@
                 <a:latin typeface="Century Schoolbook"/>
               </a:rPr>
               <a:pPr/>
-              <a:t>16</a:t>
+              <a:t>17</a:t>
             </a:fld>
             <a:endParaRPr lang="en-US" dirty="0">
               <a:solidFill>
@@ -16094,7 +17043,7 @@
 </p:sld>
 </file>
 
-<file path=ppt/slides/slide17.xml><?xml version="1.0" encoding="utf-8"?>
+<file path=ppt/slides/slide18.xml><?xml version="1.0" encoding="utf-8"?>
 <p:sld xmlns:a="http://schemas.openxmlformats.org/drawingml/2006/main" xmlns:r="http://schemas.openxmlformats.org/officeDocument/2006/relationships" xmlns:p="http://schemas.openxmlformats.org/presentationml/2006/main">
   <p:cSld>
     <p:spTree>
@@ -16188,7 +17137,7 @@
                 <a:cs typeface="Arial" panose="020B0604020202020204" pitchFamily="34" charset="0"/>
               </a:rPr>
               <a:pPr/>
-              <a:t>3/14/2024</a:t>
+              <a:t>11/27/2024</a:t>
             </a:fld>
             <a:endParaRPr lang="en-US" dirty="0">
               <a:solidFill>
@@ -16229,7 +17178,7 @@
                 <a:latin typeface="Century Schoolbook"/>
               </a:rPr>
               <a:pPr/>
-              <a:t>17</a:t>
+              <a:t>18</a:t>
             </a:fld>
             <a:endParaRPr lang="en-US" dirty="0">
               <a:solidFill>
@@ -16358,7 +17307,7 @@
 </p:sld>
 </file>
 
-<file path=ppt/slides/slide18.xml><?xml version="1.0" encoding="utf-8"?>
+<file path=ppt/slides/slide19.xml><?xml version="1.0" encoding="utf-8"?>
 <p:sld xmlns:a="http://schemas.openxmlformats.org/drawingml/2006/main" xmlns:r="http://schemas.openxmlformats.org/officeDocument/2006/relationships" xmlns:p="http://schemas.openxmlformats.org/presentationml/2006/main">
   <p:cSld>
     <p:spTree>
@@ -16452,7 +17401,7 @@
                 <a:cs typeface="Arial" panose="020B0604020202020204" pitchFamily="34" charset="0"/>
               </a:rPr>
               <a:pPr/>
-              <a:t>3/14/2024</a:t>
+              <a:t>11/27/2024</a:t>
             </a:fld>
             <a:endParaRPr lang="en-US" dirty="0">
               <a:solidFill>
@@ -16493,7 +17442,7 @@
                 <a:latin typeface="Century Schoolbook"/>
               </a:rPr>
               <a:pPr/>
-              <a:t>18</a:t>
+              <a:t>19</a:t>
             </a:fld>
             <a:endParaRPr lang="en-US" dirty="0">
               <a:solidFill>
@@ -16690,7 +17639,524 @@
 </p:sld>
 </file>
 
-<file path=ppt/slides/slide19.xml><?xml version="1.0" encoding="utf-8"?>
+<file path=ppt/slides/slide2.xml><?xml version="1.0" encoding="utf-8"?>
+<p:sld xmlns:a="http://schemas.openxmlformats.org/drawingml/2006/main" xmlns:r="http://schemas.openxmlformats.org/officeDocument/2006/relationships" xmlns:p="http://schemas.openxmlformats.org/presentationml/2006/main">
+  <p:cSld>
+    <p:spTree>
+      <p:nvGrpSpPr>
+        <p:cNvPr id="1" name=""/>
+        <p:cNvGrpSpPr/>
+        <p:nvPr/>
+      </p:nvGrpSpPr>
+      <p:grpSpPr>
+        <a:xfrm>
+          <a:off x="0" y="0"/>
+          <a:ext cx="0" cy="0"/>
+          <a:chOff x="0" y="0"/>
+          <a:chExt cx="0" cy="0"/>
+        </a:xfrm>
+      </p:grpSpPr>
+      <p:sp>
+        <p:nvSpPr>
+          <p:cNvPr id="4" name="文字版面配置區 2"/>
+          <p:cNvSpPr txBox="1">
+            <a:spLocks/>
+          </p:cNvSpPr>
+          <p:nvPr/>
+        </p:nvSpPr>
+        <p:spPr>
+          <a:xfrm>
+            <a:off x="1828800" y="152400"/>
+            <a:ext cx="5943600" cy="990600"/>
+          </a:xfrm>
+          <a:prstGeom prst="rect">
+            <a:avLst/>
+          </a:prstGeom>
+        </p:spPr>
+        <p:txBody>
+          <a:bodyPr tIns="91440" bIns="91440" anchor="b" anchorCtr="0">
+            <a:noAutofit/>
+          </a:bodyPr>
+          <a:lstStyle/>
+          <a:p>
+            <a:r>
+              <a:rPr kumimoji="1" lang="zh-TW" altLang="en-US" sz="4800" b="1" dirty="0">
+                <a:solidFill>
+                  <a:srgbClr val="00B0F0"/>
+                </a:solidFill>
+                <a:effectLst>
+                  <a:outerShdw blurRad="38100" dist="38100" dir="2700000" algn="tl">
+                    <a:srgbClr val="000000">
+                      <a:alpha val="43137"/>
+                    </a:srgbClr>
+                  </a:outerShdw>
+                </a:effectLst>
+                <a:latin typeface="微軟正黑體" panose="020B0604030504040204" pitchFamily="34" charset="-120"/>
+                <a:ea typeface="微軟正黑體" panose="020B0604030504040204" pitchFamily="34" charset="-120"/>
+                <a:cs typeface="Heiti TC Light"/>
+              </a:rPr>
+              <a:t>「大型」的語言模型</a:t>
+            </a:r>
+            <a:endParaRPr kumimoji="1" lang="en-US" altLang="zh-TW" sz="4800" b="1" dirty="0">
+              <a:solidFill>
+                <a:srgbClr val="00B0F0"/>
+              </a:solidFill>
+              <a:effectLst>
+                <a:outerShdw blurRad="38100" dist="38100" dir="2700000" algn="tl">
+                  <a:srgbClr val="000000">
+                    <a:alpha val="43137"/>
+                  </a:srgbClr>
+                </a:outerShdw>
+              </a:effectLst>
+              <a:latin typeface="微軟正黑體" panose="020B0604030504040204" pitchFamily="34" charset="-120"/>
+              <a:ea typeface="微軟正黑體" panose="020B0604030504040204" pitchFamily="34" charset="-120"/>
+              <a:cs typeface="Heiti TC Light"/>
+            </a:endParaRPr>
+          </a:p>
+        </p:txBody>
+      </p:sp>
+      <p:sp>
+        <p:nvSpPr>
+          <p:cNvPr id="3" name="日期版面配置區 2">
+            <a:extLst>
+              <a:ext uri="{FF2B5EF4-FFF2-40B4-BE49-F238E27FC236}">
+                <a16:creationId xmlns:a16="http://schemas.microsoft.com/office/drawing/2014/main" id="{1C536CB5-3C58-6CF1-767E-952B76F12DEE}"/>
+              </a:ext>
+            </a:extLst>
+          </p:cNvPr>
+          <p:cNvSpPr>
+            <a:spLocks noGrp="1"/>
+          </p:cNvSpPr>
+          <p:nvPr>
+            <p:ph type="dt" sz="half" idx="12"/>
+          </p:nvPr>
+        </p:nvSpPr>
+        <p:spPr/>
+        <p:txBody>
+          <a:bodyPr/>
+          <a:lstStyle/>
+          <a:p>
+            <a:fld id="{0B520B05-2240-4566-BE2A-9338980FE8EB}" type="datetime1">
+              <a:rPr lang="en-US" altLang="zh-TW">
+                <a:solidFill>
+                  <a:srgbClr val="D4D2D0"/>
+                </a:solidFill>
+                <a:latin typeface="Arial" panose="020B0604020202020204" pitchFamily="34" charset="0"/>
+                <a:ea typeface="新細明體" panose="02020500000000000000" pitchFamily="18" charset="-120"/>
+                <a:cs typeface="Arial" panose="020B0604020202020204" pitchFamily="34" charset="0"/>
+              </a:rPr>
+              <a:pPr/>
+              <a:t>11/27/2024</a:t>
+            </a:fld>
+            <a:endParaRPr lang="en-US" dirty="0">
+              <a:solidFill>
+                <a:srgbClr val="D4D2D0"/>
+              </a:solidFill>
+              <a:latin typeface="Arial" panose="020B0604020202020204" pitchFamily="34" charset="0"/>
+              <a:cs typeface="Arial" panose="020B0604020202020204" pitchFamily="34" charset="0"/>
+            </a:endParaRPr>
+          </a:p>
+        </p:txBody>
+      </p:sp>
+      <p:sp>
+        <p:nvSpPr>
+          <p:cNvPr id="7" name="投影片編號版面配置區 6">
+            <a:extLst>
+              <a:ext uri="{FF2B5EF4-FFF2-40B4-BE49-F238E27FC236}">
+                <a16:creationId xmlns:a16="http://schemas.microsoft.com/office/drawing/2014/main" id="{DA316F56-AF12-D872-611F-78AE7ACCBF93}"/>
+              </a:ext>
+            </a:extLst>
+          </p:cNvPr>
+          <p:cNvSpPr>
+            <a:spLocks noGrp="1"/>
+          </p:cNvSpPr>
+          <p:nvPr>
+            <p:ph type="sldNum" sz="quarter" idx="13"/>
+          </p:nvPr>
+        </p:nvSpPr>
+        <p:spPr/>
+        <p:txBody>
+          <a:bodyPr/>
+          <a:lstStyle/>
+          <a:p>
+            <a:fld id="{F99EC173-99AE-4773-AB25-02E469A13EAE}" type="slidenum">
+              <a:rPr lang="en-US">
+                <a:solidFill>
+                  <a:srgbClr val="D4D2D0"/>
+                </a:solidFill>
+                <a:latin typeface="Century Schoolbook"/>
+              </a:rPr>
+              <a:pPr/>
+              <a:t>2</a:t>
+            </a:fld>
+            <a:endParaRPr lang="en-US" dirty="0">
+              <a:solidFill>
+                <a:srgbClr val="D4D2D0"/>
+              </a:solidFill>
+              <a:latin typeface="Century Schoolbook"/>
+            </a:endParaRPr>
+          </a:p>
+        </p:txBody>
+      </p:sp>
+      <p:sp>
+        <p:nvSpPr>
+          <p:cNvPr id="2" name="文字方塊 1">
+            <a:extLst>
+              <a:ext uri="{FF2B5EF4-FFF2-40B4-BE49-F238E27FC236}">
+                <a16:creationId xmlns:a16="http://schemas.microsoft.com/office/drawing/2014/main" id="{E17C39F0-9527-522B-E55B-DAC3D2425E05}"/>
+              </a:ext>
+            </a:extLst>
+          </p:cNvPr>
+          <p:cNvSpPr txBox="1"/>
+          <p:nvPr/>
+        </p:nvSpPr>
+        <p:spPr>
+          <a:xfrm>
+            <a:off x="678346" y="1371600"/>
+            <a:ext cx="7924800" cy="5016758"/>
+          </a:xfrm>
+          <a:prstGeom prst="rect">
+            <a:avLst/>
+          </a:prstGeom>
+          <a:noFill/>
+        </p:spPr>
+        <p:txBody>
+          <a:bodyPr wrap="square" rtlCol="0">
+            <a:spAutoFit/>
+          </a:bodyPr>
+          <a:lstStyle/>
+          <a:p>
+            <a:pPr marL="457200" indent="-457200">
+              <a:buFont typeface="Arial" panose="020B0604020202020204" pitchFamily="34" charset="0"/>
+              <a:buChar char="•"/>
+            </a:pPr>
+            <a:r>
+              <a:rPr lang="zh-TW" altLang="en-US" sz="3200" dirty="0">
+                <a:solidFill>
+                  <a:prstClr val="white"/>
+                </a:solidFill>
+                <a:latin typeface="微軟正黑體" panose="020B0604030504040204" pitchFamily="34" charset="-120"/>
+                <a:ea typeface="微軟正黑體" panose="020B0604030504040204" pitchFamily="34" charset="-120"/>
+              </a:rPr>
+              <a:t>本來也就是一個</a:t>
+            </a:r>
+            <a:r>
+              <a:rPr lang="en-US" altLang="zh-TW" sz="3200" dirty="0">
+                <a:solidFill>
+                  <a:prstClr val="white"/>
+                </a:solidFill>
+                <a:latin typeface="微軟正黑體" panose="020B0604030504040204" pitchFamily="34" charset="-120"/>
+                <a:ea typeface="微軟正黑體" panose="020B0604030504040204" pitchFamily="34" charset="-120"/>
+              </a:rPr>
+              <a:t>PLM</a:t>
+            </a:r>
+            <a:r>
+              <a:rPr lang="zh-TW" altLang="en-US" sz="3200" dirty="0">
+                <a:solidFill>
+                  <a:prstClr val="white"/>
+                </a:solidFill>
+                <a:latin typeface="微軟正黑體" panose="020B0604030504040204" pitchFamily="34" charset="-120"/>
+                <a:ea typeface="微軟正黑體" panose="020B0604030504040204" pitchFamily="34" charset="-120"/>
+              </a:rPr>
+              <a:t>，有不同種類</a:t>
+            </a:r>
+            <a:endParaRPr lang="en-US" altLang="zh-TW" sz="3200" dirty="0">
+              <a:solidFill>
+                <a:prstClr val="white"/>
+              </a:solidFill>
+              <a:latin typeface="微軟正黑體" panose="020B0604030504040204" pitchFamily="34" charset="-120"/>
+              <a:ea typeface="微軟正黑體" panose="020B0604030504040204" pitchFamily="34" charset="-120"/>
+            </a:endParaRPr>
+          </a:p>
+          <a:p>
+            <a:pPr marL="457200" indent="-457200">
+              <a:buFont typeface="Arial" panose="020B0604020202020204" pitchFamily="34" charset="0"/>
+              <a:buChar char="•"/>
+            </a:pPr>
+            <a:r>
+              <a:rPr lang="zh-TW" altLang="en-US" sz="3200" dirty="0">
+                <a:solidFill>
+                  <a:prstClr val="white"/>
+                </a:solidFill>
+                <a:latin typeface="微軟正黑體" panose="020B0604030504040204" pitchFamily="34" charset="-120"/>
+                <a:ea typeface="微軟正黑體" panose="020B0604030504040204" pitchFamily="34" charset="-120"/>
+              </a:rPr>
+              <a:t>一般預訓練語言模型，參數多在</a:t>
+            </a:r>
+            <a:r>
+              <a:rPr lang="en-US" altLang="zh-TW" sz="3200" dirty="0">
+                <a:solidFill>
+                  <a:prstClr val="white"/>
+                </a:solidFill>
+                <a:latin typeface="微軟正黑體" panose="020B0604030504040204" pitchFamily="34" charset="-120"/>
+                <a:ea typeface="微軟正黑體" panose="020B0604030504040204" pitchFamily="34" charset="-120"/>
+              </a:rPr>
+              <a:t>1</a:t>
+            </a:r>
+            <a:r>
+              <a:rPr lang="zh-TW" altLang="en-US" sz="3200" dirty="0">
+                <a:solidFill>
+                  <a:prstClr val="white"/>
+                </a:solidFill>
+                <a:latin typeface="微軟正黑體" panose="020B0604030504040204" pitchFamily="34" charset="-120"/>
+                <a:ea typeface="微軟正黑體" panose="020B0604030504040204" pitchFamily="34" charset="-120"/>
+              </a:rPr>
+              <a:t>億上下</a:t>
+            </a:r>
+            <a:endParaRPr lang="en-US" altLang="zh-TW" sz="3200" dirty="0">
+              <a:solidFill>
+                <a:prstClr val="white"/>
+              </a:solidFill>
+              <a:latin typeface="微軟正黑體" panose="020B0604030504040204" pitchFamily="34" charset="-120"/>
+              <a:ea typeface="微軟正黑體" panose="020B0604030504040204" pitchFamily="34" charset="-120"/>
+            </a:endParaRPr>
+          </a:p>
+          <a:p>
+            <a:pPr marL="457200" indent="-457200">
+              <a:buFont typeface="Arial" panose="020B0604020202020204" pitchFamily="34" charset="0"/>
+              <a:buChar char="•"/>
+            </a:pPr>
+            <a:r>
+              <a:rPr lang="zh-TW" altLang="en-US" sz="3200" dirty="0">
+                <a:solidFill>
+                  <a:prstClr val="white"/>
+                </a:solidFill>
+                <a:latin typeface="微軟正黑體" panose="020B0604030504040204" pitchFamily="34" charset="-120"/>
+                <a:ea typeface="微軟正黑體" panose="020B0604030504040204" pitchFamily="34" charset="-120"/>
+              </a:rPr>
+              <a:t>參數大量增加，模型能力變好</a:t>
+            </a:r>
+            <a:endParaRPr lang="en-US" altLang="zh-TW" sz="3200" dirty="0">
+              <a:solidFill>
+                <a:prstClr val="white"/>
+              </a:solidFill>
+              <a:latin typeface="微軟正黑體" panose="020B0604030504040204" pitchFamily="34" charset="-120"/>
+              <a:ea typeface="微軟正黑體" panose="020B0604030504040204" pitchFamily="34" charset="-120"/>
+            </a:endParaRPr>
+          </a:p>
+          <a:p>
+            <a:pPr marL="457200" indent="-457200">
+              <a:buFont typeface="Arial" panose="020B0604020202020204" pitchFamily="34" charset="0"/>
+              <a:buChar char="•"/>
+            </a:pPr>
+            <a:r>
+              <a:rPr lang="zh-TW" altLang="en-US" sz="3200" dirty="0">
+                <a:solidFill>
+                  <a:prstClr val="white"/>
+                </a:solidFill>
+                <a:latin typeface="微軟正黑體" panose="020B0604030504040204" pitchFamily="34" charset="-120"/>
+                <a:ea typeface="微軟正黑體" panose="020B0604030504040204" pitchFamily="34" charset="-120"/>
+              </a:rPr>
+              <a:t>訓練語料庫大量增加，模型能力變好</a:t>
+            </a:r>
+            <a:endParaRPr lang="en-US" altLang="zh-TW" sz="3200" dirty="0">
+              <a:solidFill>
+                <a:prstClr val="white"/>
+              </a:solidFill>
+              <a:latin typeface="微軟正黑體" panose="020B0604030504040204" pitchFamily="34" charset="-120"/>
+              <a:ea typeface="微軟正黑體" panose="020B0604030504040204" pitchFamily="34" charset="-120"/>
+            </a:endParaRPr>
+          </a:p>
+          <a:p>
+            <a:pPr marL="457200" indent="-457200">
+              <a:buFont typeface="Arial" panose="020B0604020202020204" pitchFamily="34" charset="0"/>
+              <a:buChar char="•"/>
+            </a:pPr>
+            <a:r>
+              <a:rPr lang="zh-TW" altLang="en-US" sz="3200" dirty="0">
+                <a:solidFill>
+                  <a:prstClr val="white"/>
+                </a:solidFill>
+                <a:latin typeface="微軟正黑體" panose="020B0604030504040204" pitchFamily="34" charset="-120"/>
+                <a:ea typeface="微軟正黑體" panose="020B0604030504040204" pitchFamily="34" charset="-120"/>
+              </a:rPr>
+              <a:t>大家開始堆參數</a:t>
+            </a:r>
+            <a:r>
+              <a:rPr lang="en-US" altLang="zh-TW" sz="3200" dirty="0">
+                <a:solidFill>
+                  <a:prstClr val="white"/>
+                </a:solidFill>
+                <a:latin typeface="微軟正黑體" panose="020B0604030504040204" pitchFamily="34" charset="-120"/>
+                <a:ea typeface="微軟正黑體" panose="020B0604030504040204" pitchFamily="34" charset="-120"/>
+              </a:rPr>
+              <a:t>(</a:t>
+            </a:r>
+            <a:r>
+              <a:rPr lang="zh-TW" altLang="en-US" sz="3200" dirty="0">
+                <a:solidFill>
+                  <a:prstClr val="white"/>
+                </a:solidFill>
+                <a:latin typeface="微軟正黑體" panose="020B0604030504040204" pitchFamily="34" charset="-120"/>
+                <a:ea typeface="微軟正黑體" panose="020B0604030504040204" pitchFamily="34" charset="-120"/>
+              </a:rPr>
+              <a:t>層數</a:t>
+            </a:r>
+            <a:r>
+              <a:rPr lang="en-US" altLang="zh-TW" sz="3200" dirty="0">
+                <a:solidFill>
+                  <a:prstClr val="white"/>
+                </a:solidFill>
+                <a:latin typeface="微軟正黑體" panose="020B0604030504040204" pitchFamily="34" charset="-120"/>
+                <a:ea typeface="微軟正黑體" panose="020B0604030504040204" pitchFamily="34" charset="-120"/>
+              </a:rPr>
+              <a:t>)</a:t>
+            </a:r>
+            <a:r>
+              <a:rPr lang="zh-TW" altLang="en-US" sz="3200" dirty="0">
+                <a:solidFill>
+                  <a:prstClr val="white"/>
+                </a:solidFill>
+                <a:latin typeface="微軟正黑體" panose="020B0604030504040204" pitchFamily="34" charset="-120"/>
+                <a:ea typeface="微軟正黑體" panose="020B0604030504040204" pitchFamily="34" charset="-120"/>
+              </a:rPr>
+              <a:t>及使用大量語料庫</a:t>
+            </a:r>
+            <a:endParaRPr lang="en-US" altLang="zh-TW" sz="3200" dirty="0">
+              <a:solidFill>
+                <a:prstClr val="white"/>
+              </a:solidFill>
+              <a:latin typeface="微軟正黑體" panose="020B0604030504040204" pitchFamily="34" charset="-120"/>
+              <a:ea typeface="微軟正黑體" panose="020B0604030504040204" pitchFamily="34" charset="-120"/>
+            </a:endParaRPr>
+          </a:p>
+          <a:p>
+            <a:pPr marL="457200" indent="-457200">
+              <a:buFont typeface="Arial" panose="020B0604020202020204" pitchFamily="34" charset="0"/>
+              <a:buChar char="•"/>
+            </a:pPr>
+            <a:r>
+              <a:rPr lang="en-US" altLang="zh-TW" sz="3200" dirty="0">
+                <a:solidFill>
+                  <a:prstClr val="white"/>
+                </a:solidFill>
+                <a:latin typeface="微軟正黑體" panose="020B0604030504040204" pitchFamily="34" charset="-120"/>
+                <a:ea typeface="微軟正黑體" panose="020B0604030504040204" pitchFamily="34" charset="-120"/>
+              </a:rPr>
+              <a:t>2020</a:t>
+            </a:r>
+            <a:r>
+              <a:rPr lang="zh-TW" altLang="en-US" sz="3200" dirty="0">
+                <a:solidFill>
+                  <a:prstClr val="white"/>
+                </a:solidFill>
+                <a:latin typeface="微軟正黑體" panose="020B0604030504040204" pitchFamily="34" charset="-120"/>
+                <a:ea typeface="微軟正黑體" panose="020B0604030504040204" pitchFamily="34" charset="-120"/>
+              </a:rPr>
+              <a:t>年的</a:t>
+            </a:r>
+            <a:r>
+              <a:rPr lang="en-US" altLang="zh-TW" sz="3200" dirty="0">
+                <a:solidFill>
+                  <a:prstClr val="white"/>
+                </a:solidFill>
+                <a:latin typeface="微軟正黑體" panose="020B0604030504040204" pitchFamily="34" charset="-120"/>
+                <a:ea typeface="微軟正黑體" panose="020B0604030504040204" pitchFamily="34" charset="-120"/>
+              </a:rPr>
+              <a:t>Scaling Law</a:t>
+            </a:r>
+          </a:p>
+          <a:p>
+            <a:pPr marL="457200" indent="-457200">
+              <a:buFont typeface="Arial" panose="020B0604020202020204" pitchFamily="34" charset="0"/>
+              <a:buChar char="•"/>
+            </a:pPr>
+            <a:r>
+              <a:rPr lang="en-US" altLang="zh-TW" sz="3200" dirty="0">
+                <a:solidFill>
+                  <a:prstClr val="white"/>
+                </a:solidFill>
+                <a:latin typeface="微軟正黑體" panose="020B0604030504040204" pitchFamily="34" charset="-120"/>
+                <a:ea typeface="微軟正黑體" panose="020B0604030504040204" pitchFamily="34" charset="-120"/>
+              </a:rPr>
+              <a:t>2022</a:t>
+            </a:r>
+            <a:r>
+              <a:rPr lang="zh-TW" altLang="en-US" sz="3200" dirty="0">
+                <a:solidFill>
+                  <a:prstClr val="white"/>
+                </a:solidFill>
+                <a:latin typeface="微軟正黑體" panose="020B0604030504040204" pitchFamily="34" charset="-120"/>
+                <a:ea typeface="微軟正黑體" panose="020B0604030504040204" pitchFamily="34" charset="-120"/>
+              </a:rPr>
+              <a:t>年發現的</a:t>
+            </a:r>
+            <a:r>
+              <a:rPr lang="en-US" altLang="zh-TW" sz="3200" dirty="0">
+                <a:solidFill>
+                  <a:prstClr val="white"/>
+                </a:solidFill>
+                <a:latin typeface="微軟正黑體" panose="020B0604030504040204" pitchFamily="34" charset="-120"/>
+                <a:ea typeface="微軟正黑體" panose="020B0604030504040204" pitchFamily="34" charset="-120"/>
+              </a:rPr>
+              <a:t>Emergent Abilities</a:t>
+            </a:r>
+          </a:p>
+          <a:p>
+            <a:pPr marL="457200" indent="-457200">
+              <a:buFont typeface="Arial" panose="020B0604020202020204" pitchFamily="34" charset="0"/>
+              <a:buChar char="•"/>
+            </a:pPr>
+            <a:r>
+              <a:rPr lang="zh-TW" altLang="en-US" sz="3200" dirty="0">
+                <a:solidFill>
+                  <a:prstClr val="white"/>
+                </a:solidFill>
+                <a:latin typeface="微軟正黑體" panose="020B0604030504040204" pitchFamily="34" charset="-120"/>
+                <a:ea typeface="微軟正黑體" panose="020B0604030504040204" pitchFamily="34" charset="-120"/>
+              </a:rPr>
+              <a:t>從此就走向越來越大的趨勢</a:t>
+            </a:r>
+            <a:endParaRPr lang="en-US" altLang="zh-TW" sz="3200" dirty="0">
+              <a:solidFill>
+                <a:prstClr val="white"/>
+              </a:solidFill>
+              <a:latin typeface="微軟正黑體" panose="020B0604030504040204" pitchFamily="34" charset="-120"/>
+              <a:ea typeface="微軟正黑體" panose="020B0604030504040204" pitchFamily="34" charset="-120"/>
+            </a:endParaRPr>
+          </a:p>
+          <a:p>
+            <a:pPr marL="457200" indent="-457200">
+              <a:buFont typeface="Arial" panose="020B0604020202020204" pitchFamily="34" charset="0"/>
+              <a:buChar char="•"/>
+            </a:pPr>
+            <a:r>
+              <a:rPr lang="zh-TW" altLang="en-US" sz="3200" dirty="0">
+                <a:solidFill>
+                  <a:prstClr val="white"/>
+                </a:solidFill>
+                <a:latin typeface="微軟正黑體" panose="020B0604030504040204" pitchFamily="34" charset="-120"/>
+                <a:ea typeface="微軟正黑體" panose="020B0604030504040204" pitchFamily="34" charset="-120"/>
+              </a:rPr>
+              <a:t>模型非常大，語料庫非常多，需要巨大計算資源的預訓練語言模型</a:t>
+            </a:r>
+            <a:endParaRPr lang="en-US" altLang="zh-TW" sz="3200" dirty="0">
+              <a:solidFill>
+                <a:prstClr val="white"/>
+              </a:solidFill>
+              <a:latin typeface="微軟正黑體" panose="020B0604030504040204" pitchFamily="34" charset="-120"/>
+              <a:ea typeface="微軟正黑體" panose="020B0604030504040204" pitchFamily="34" charset="-120"/>
+            </a:endParaRPr>
+          </a:p>
+        </p:txBody>
+      </p:sp>
+    </p:spTree>
+    <p:extLst>
+      <p:ext uri="{BB962C8B-B14F-4D97-AF65-F5344CB8AC3E}">
+        <p14:creationId xmlns:p14="http://schemas.microsoft.com/office/powerpoint/2010/main" val="1789973883"/>
+      </p:ext>
+    </p:extLst>
+  </p:cSld>
+  <p:clrMapOvr>
+    <a:masterClrMapping/>
+  </p:clrMapOvr>
+  <p:transition>
+    <p:fade/>
+  </p:transition>
+</p:sld>
+</file>
+
+<file path=ppt/slides/slide20.xml><?xml version="1.0" encoding="utf-8"?>
 <p:sld xmlns:a="http://schemas.openxmlformats.org/drawingml/2006/main" xmlns:r="http://schemas.openxmlformats.org/officeDocument/2006/relationships" xmlns:p="http://schemas.openxmlformats.org/presentationml/2006/main">
   <p:cSld>
     <p:spTree>
@@ -16784,7 +18250,7 @@
                 <a:cs typeface="Arial" panose="020B0604020202020204" pitchFamily="34" charset="0"/>
               </a:rPr>
               <a:pPr/>
-              <a:t>3/14/2024</a:t>
+              <a:t>11/27/2024</a:t>
             </a:fld>
             <a:endParaRPr lang="en-US" dirty="0">
               <a:solidFill>
@@ -16825,7 +18291,7 @@
                 <a:latin typeface="Century Schoolbook"/>
               </a:rPr>
               <a:pPr/>
-              <a:t>19</a:t>
+              <a:t>20</a:t>
             </a:fld>
             <a:endParaRPr lang="en-US" dirty="0">
               <a:solidFill>
@@ -16954,524 +18420,7 @@
 </p:sld>
 </file>
 
-<file path=ppt/slides/slide2.xml><?xml version="1.0" encoding="utf-8"?>
-<p:sld xmlns:a="http://schemas.openxmlformats.org/drawingml/2006/main" xmlns:r="http://schemas.openxmlformats.org/officeDocument/2006/relationships" xmlns:p="http://schemas.openxmlformats.org/presentationml/2006/main">
-  <p:cSld>
-    <p:spTree>
-      <p:nvGrpSpPr>
-        <p:cNvPr id="1" name=""/>
-        <p:cNvGrpSpPr/>
-        <p:nvPr/>
-      </p:nvGrpSpPr>
-      <p:grpSpPr>
-        <a:xfrm>
-          <a:off x="0" y="0"/>
-          <a:ext cx="0" cy="0"/>
-          <a:chOff x="0" y="0"/>
-          <a:chExt cx="0" cy="0"/>
-        </a:xfrm>
-      </p:grpSpPr>
-      <p:sp>
-        <p:nvSpPr>
-          <p:cNvPr id="4" name="文字版面配置區 2"/>
-          <p:cNvSpPr txBox="1">
-            <a:spLocks/>
-          </p:cNvSpPr>
-          <p:nvPr/>
-        </p:nvSpPr>
-        <p:spPr>
-          <a:xfrm>
-            <a:off x="1828800" y="152400"/>
-            <a:ext cx="5943600" cy="990600"/>
-          </a:xfrm>
-          <a:prstGeom prst="rect">
-            <a:avLst/>
-          </a:prstGeom>
-        </p:spPr>
-        <p:txBody>
-          <a:bodyPr tIns="91440" bIns="91440" anchor="b" anchorCtr="0">
-            <a:noAutofit/>
-          </a:bodyPr>
-          <a:lstStyle/>
-          <a:p>
-            <a:r>
-              <a:rPr kumimoji="1" lang="zh-TW" altLang="en-US" sz="4800" b="1" dirty="0">
-                <a:solidFill>
-                  <a:srgbClr val="00B0F0"/>
-                </a:solidFill>
-                <a:effectLst>
-                  <a:outerShdw blurRad="38100" dist="38100" dir="2700000" algn="tl">
-                    <a:srgbClr val="000000">
-                      <a:alpha val="43137"/>
-                    </a:srgbClr>
-                  </a:outerShdw>
-                </a:effectLst>
-                <a:latin typeface="微軟正黑體" panose="020B0604030504040204" pitchFamily="34" charset="-120"/>
-                <a:ea typeface="微軟正黑體" panose="020B0604030504040204" pitchFamily="34" charset="-120"/>
-                <a:cs typeface="Heiti TC Light"/>
-              </a:rPr>
-              <a:t>「大型」的語言模型</a:t>
-            </a:r>
-            <a:endParaRPr kumimoji="1" lang="en-US" altLang="zh-TW" sz="4800" b="1" dirty="0">
-              <a:solidFill>
-                <a:srgbClr val="00B0F0"/>
-              </a:solidFill>
-              <a:effectLst>
-                <a:outerShdw blurRad="38100" dist="38100" dir="2700000" algn="tl">
-                  <a:srgbClr val="000000">
-                    <a:alpha val="43137"/>
-                  </a:srgbClr>
-                </a:outerShdw>
-              </a:effectLst>
-              <a:latin typeface="微軟正黑體" panose="020B0604030504040204" pitchFamily="34" charset="-120"/>
-              <a:ea typeface="微軟正黑體" panose="020B0604030504040204" pitchFamily="34" charset="-120"/>
-              <a:cs typeface="Heiti TC Light"/>
-            </a:endParaRPr>
-          </a:p>
-        </p:txBody>
-      </p:sp>
-      <p:sp>
-        <p:nvSpPr>
-          <p:cNvPr id="3" name="日期版面配置區 2">
-            <a:extLst>
-              <a:ext uri="{FF2B5EF4-FFF2-40B4-BE49-F238E27FC236}">
-                <a16:creationId xmlns:a16="http://schemas.microsoft.com/office/drawing/2014/main" id="{1C536CB5-3C58-6CF1-767E-952B76F12DEE}"/>
-              </a:ext>
-            </a:extLst>
-          </p:cNvPr>
-          <p:cNvSpPr>
-            <a:spLocks noGrp="1"/>
-          </p:cNvSpPr>
-          <p:nvPr>
-            <p:ph type="dt" sz="half" idx="12"/>
-          </p:nvPr>
-        </p:nvSpPr>
-        <p:spPr/>
-        <p:txBody>
-          <a:bodyPr/>
-          <a:lstStyle/>
-          <a:p>
-            <a:fld id="{0B520B05-2240-4566-BE2A-9338980FE8EB}" type="datetime1">
-              <a:rPr lang="en-US" altLang="zh-TW">
-                <a:solidFill>
-                  <a:srgbClr val="D4D2D0"/>
-                </a:solidFill>
-                <a:latin typeface="Arial" panose="020B0604020202020204" pitchFamily="34" charset="0"/>
-                <a:ea typeface="新細明體" panose="02020500000000000000" pitchFamily="18" charset="-120"/>
-                <a:cs typeface="Arial" panose="020B0604020202020204" pitchFamily="34" charset="0"/>
-              </a:rPr>
-              <a:pPr/>
-              <a:t>3/14/2024</a:t>
-            </a:fld>
-            <a:endParaRPr lang="en-US" dirty="0">
-              <a:solidFill>
-                <a:srgbClr val="D4D2D0"/>
-              </a:solidFill>
-              <a:latin typeface="Arial" panose="020B0604020202020204" pitchFamily="34" charset="0"/>
-              <a:cs typeface="Arial" panose="020B0604020202020204" pitchFamily="34" charset="0"/>
-            </a:endParaRPr>
-          </a:p>
-        </p:txBody>
-      </p:sp>
-      <p:sp>
-        <p:nvSpPr>
-          <p:cNvPr id="7" name="投影片編號版面配置區 6">
-            <a:extLst>
-              <a:ext uri="{FF2B5EF4-FFF2-40B4-BE49-F238E27FC236}">
-                <a16:creationId xmlns:a16="http://schemas.microsoft.com/office/drawing/2014/main" id="{DA316F56-AF12-D872-611F-78AE7ACCBF93}"/>
-              </a:ext>
-            </a:extLst>
-          </p:cNvPr>
-          <p:cNvSpPr>
-            <a:spLocks noGrp="1"/>
-          </p:cNvSpPr>
-          <p:nvPr>
-            <p:ph type="sldNum" sz="quarter" idx="13"/>
-          </p:nvPr>
-        </p:nvSpPr>
-        <p:spPr/>
-        <p:txBody>
-          <a:bodyPr/>
-          <a:lstStyle/>
-          <a:p>
-            <a:fld id="{F99EC173-99AE-4773-AB25-02E469A13EAE}" type="slidenum">
-              <a:rPr lang="en-US">
-                <a:solidFill>
-                  <a:srgbClr val="D4D2D0"/>
-                </a:solidFill>
-                <a:latin typeface="Century Schoolbook"/>
-              </a:rPr>
-              <a:pPr/>
-              <a:t>2</a:t>
-            </a:fld>
-            <a:endParaRPr lang="en-US" dirty="0">
-              <a:solidFill>
-                <a:srgbClr val="D4D2D0"/>
-              </a:solidFill>
-              <a:latin typeface="Century Schoolbook"/>
-            </a:endParaRPr>
-          </a:p>
-        </p:txBody>
-      </p:sp>
-      <p:sp>
-        <p:nvSpPr>
-          <p:cNvPr id="2" name="文字方塊 1">
-            <a:extLst>
-              <a:ext uri="{FF2B5EF4-FFF2-40B4-BE49-F238E27FC236}">
-                <a16:creationId xmlns:a16="http://schemas.microsoft.com/office/drawing/2014/main" id="{E17C39F0-9527-522B-E55B-DAC3D2425E05}"/>
-              </a:ext>
-            </a:extLst>
-          </p:cNvPr>
-          <p:cNvSpPr txBox="1"/>
-          <p:nvPr/>
-        </p:nvSpPr>
-        <p:spPr>
-          <a:xfrm>
-            <a:off x="678346" y="1371600"/>
-            <a:ext cx="7924800" cy="5016758"/>
-          </a:xfrm>
-          <a:prstGeom prst="rect">
-            <a:avLst/>
-          </a:prstGeom>
-          <a:noFill/>
-        </p:spPr>
-        <p:txBody>
-          <a:bodyPr wrap="square" rtlCol="0">
-            <a:spAutoFit/>
-          </a:bodyPr>
-          <a:lstStyle/>
-          <a:p>
-            <a:pPr marL="457200" indent="-457200">
-              <a:buFont typeface="Arial" panose="020B0604020202020204" pitchFamily="34" charset="0"/>
-              <a:buChar char="•"/>
-            </a:pPr>
-            <a:r>
-              <a:rPr lang="zh-TW" altLang="en-US" sz="3200" dirty="0">
-                <a:solidFill>
-                  <a:prstClr val="white"/>
-                </a:solidFill>
-                <a:latin typeface="微軟正黑體" panose="020B0604030504040204" pitchFamily="34" charset="-120"/>
-                <a:ea typeface="微軟正黑體" panose="020B0604030504040204" pitchFamily="34" charset="-120"/>
-              </a:rPr>
-              <a:t>本來也就是一個</a:t>
-            </a:r>
-            <a:r>
-              <a:rPr lang="en-US" altLang="zh-TW" sz="3200" dirty="0">
-                <a:solidFill>
-                  <a:prstClr val="white"/>
-                </a:solidFill>
-                <a:latin typeface="微軟正黑體" panose="020B0604030504040204" pitchFamily="34" charset="-120"/>
-                <a:ea typeface="微軟正黑體" panose="020B0604030504040204" pitchFamily="34" charset="-120"/>
-              </a:rPr>
-              <a:t>PLM</a:t>
-            </a:r>
-            <a:r>
-              <a:rPr lang="zh-TW" altLang="en-US" sz="3200" dirty="0">
-                <a:solidFill>
-                  <a:prstClr val="white"/>
-                </a:solidFill>
-                <a:latin typeface="微軟正黑體" panose="020B0604030504040204" pitchFamily="34" charset="-120"/>
-                <a:ea typeface="微軟正黑體" panose="020B0604030504040204" pitchFamily="34" charset="-120"/>
-              </a:rPr>
-              <a:t>，有不同種類</a:t>
-            </a:r>
-            <a:endParaRPr lang="en-US" altLang="zh-TW" sz="3200" dirty="0">
-              <a:solidFill>
-                <a:prstClr val="white"/>
-              </a:solidFill>
-              <a:latin typeface="微軟正黑體" panose="020B0604030504040204" pitchFamily="34" charset="-120"/>
-              <a:ea typeface="微軟正黑體" panose="020B0604030504040204" pitchFamily="34" charset="-120"/>
-            </a:endParaRPr>
-          </a:p>
-          <a:p>
-            <a:pPr marL="457200" indent="-457200">
-              <a:buFont typeface="Arial" panose="020B0604020202020204" pitchFamily="34" charset="0"/>
-              <a:buChar char="•"/>
-            </a:pPr>
-            <a:r>
-              <a:rPr lang="zh-TW" altLang="en-US" sz="3200" dirty="0">
-                <a:solidFill>
-                  <a:prstClr val="white"/>
-                </a:solidFill>
-                <a:latin typeface="微軟正黑體" panose="020B0604030504040204" pitchFamily="34" charset="-120"/>
-                <a:ea typeface="微軟正黑體" panose="020B0604030504040204" pitchFamily="34" charset="-120"/>
-              </a:rPr>
-              <a:t>一般預訓練語言模型，參數多在</a:t>
-            </a:r>
-            <a:r>
-              <a:rPr lang="en-US" altLang="zh-TW" sz="3200" dirty="0">
-                <a:solidFill>
-                  <a:prstClr val="white"/>
-                </a:solidFill>
-                <a:latin typeface="微軟正黑體" panose="020B0604030504040204" pitchFamily="34" charset="-120"/>
-                <a:ea typeface="微軟正黑體" panose="020B0604030504040204" pitchFamily="34" charset="-120"/>
-              </a:rPr>
-              <a:t>1</a:t>
-            </a:r>
-            <a:r>
-              <a:rPr lang="zh-TW" altLang="en-US" sz="3200" dirty="0">
-                <a:solidFill>
-                  <a:prstClr val="white"/>
-                </a:solidFill>
-                <a:latin typeface="微軟正黑體" panose="020B0604030504040204" pitchFamily="34" charset="-120"/>
-                <a:ea typeface="微軟正黑體" panose="020B0604030504040204" pitchFamily="34" charset="-120"/>
-              </a:rPr>
-              <a:t>億上下</a:t>
-            </a:r>
-            <a:endParaRPr lang="en-US" altLang="zh-TW" sz="3200" dirty="0">
-              <a:solidFill>
-                <a:prstClr val="white"/>
-              </a:solidFill>
-              <a:latin typeface="微軟正黑體" panose="020B0604030504040204" pitchFamily="34" charset="-120"/>
-              <a:ea typeface="微軟正黑體" panose="020B0604030504040204" pitchFamily="34" charset="-120"/>
-            </a:endParaRPr>
-          </a:p>
-          <a:p>
-            <a:pPr marL="457200" indent="-457200">
-              <a:buFont typeface="Arial" panose="020B0604020202020204" pitchFamily="34" charset="0"/>
-              <a:buChar char="•"/>
-            </a:pPr>
-            <a:r>
-              <a:rPr lang="zh-TW" altLang="en-US" sz="3200" dirty="0">
-                <a:solidFill>
-                  <a:prstClr val="white"/>
-                </a:solidFill>
-                <a:latin typeface="微軟正黑體" panose="020B0604030504040204" pitchFamily="34" charset="-120"/>
-                <a:ea typeface="微軟正黑體" panose="020B0604030504040204" pitchFamily="34" charset="-120"/>
-              </a:rPr>
-              <a:t>參數大量增加，模型能力變好</a:t>
-            </a:r>
-            <a:endParaRPr lang="en-US" altLang="zh-TW" sz="3200" dirty="0">
-              <a:solidFill>
-                <a:prstClr val="white"/>
-              </a:solidFill>
-              <a:latin typeface="微軟正黑體" panose="020B0604030504040204" pitchFamily="34" charset="-120"/>
-              <a:ea typeface="微軟正黑體" panose="020B0604030504040204" pitchFamily="34" charset="-120"/>
-            </a:endParaRPr>
-          </a:p>
-          <a:p>
-            <a:pPr marL="457200" indent="-457200">
-              <a:buFont typeface="Arial" panose="020B0604020202020204" pitchFamily="34" charset="0"/>
-              <a:buChar char="•"/>
-            </a:pPr>
-            <a:r>
-              <a:rPr lang="zh-TW" altLang="en-US" sz="3200" dirty="0">
-                <a:solidFill>
-                  <a:prstClr val="white"/>
-                </a:solidFill>
-                <a:latin typeface="微軟正黑體" panose="020B0604030504040204" pitchFamily="34" charset="-120"/>
-                <a:ea typeface="微軟正黑體" panose="020B0604030504040204" pitchFamily="34" charset="-120"/>
-              </a:rPr>
-              <a:t>訓練語料庫大量增加，模型能力變好</a:t>
-            </a:r>
-            <a:endParaRPr lang="en-US" altLang="zh-TW" sz="3200" dirty="0">
-              <a:solidFill>
-                <a:prstClr val="white"/>
-              </a:solidFill>
-              <a:latin typeface="微軟正黑體" panose="020B0604030504040204" pitchFamily="34" charset="-120"/>
-              <a:ea typeface="微軟正黑體" panose="020B0604030504040204" pitchFamily="34" charset="-120"/>
-            </a:endParaRPr>
-          </a:p>
-          <a:p>
-            <a:pPr marL="457200" indent="-457200">
-              <a:buFont typeface="Arial" panose="020B0604020202020204" pitchFamily="34" charset="0"/>
-              <a:buChar char="•"/>
-            </a:pPr>
-            <a:r>
-              <a:rPr lang="zh-TW" altLang="en-US" sz="3200" dirty="0">
-                <a:solidFill>
-                  <a:prstClr val="white"/>
-                </a:solidFill>
-                <a:latin typeface="微軟正黑體" panose="020B0604030504040204" pitchFamily="34" charset="-120"/>
-                <a:ea typeface="微軟正黑體" panose="020B0604030504040204" pitchFamily="34" charset="-120"/>
-              </a:rPr>
-              <a:t>大家開始堆參數</a:t>
-            </a:r>
-            <a:r>
-              <a:rPr lang="en-US" altLang="zh-TW" sz="3200" dirty="0">
-                <a:solidFill>
-                  <a:prstClr val="white"/>
-                </a:solidFill>
-                <a:latin typeface="微軟正黑體" panose="020B0604030504040204" pitchFamily="34" charset="-120"/>
-                <a:ea typeface="微軟正黑體" panose="020B0604030504040204" pitchFamily="34" charset="-120"/>
-              </a:rPr>
-              <a:t>(</a:t>
-            </a:r>
-            <a:r>
-              <a:rPr lang="zh-TW" altLang="en-US" sz="3200" dirty="0">
-                <a:solidFill>
-                  <a:prstClr val="white"/>
-                </a:solidFill>
-                <a:latin typeface="微軟正黑體" panose="020B0604030504040204" pitchFamily="34" charset="-120"/>
-                <a:ea typeface="微軟正黑體" panose="020B0604030504040204" pitchFamily="34" charset="-120"/>
-              </a:rPr>
-              <a:t>層數</a:t>
-            </a:r>
-            <a:r>
-              <a:rPr lang="en-US" altLang="zh-TW" sz="3200" dirty="0">
-                <a:solidFill>
-                  <a:prstClr val="white"/>
-                </a:solidFill>
-                <a:latin typeface="微軟正黑體" panose="020B0604030504040204" pitchFamily="34" charset="-120"/>
-                <a:ea typeface="微軟正黑體" panose="020B0604030504040204" pitchFamily="34" charset="-120"/>
-              </a:rPr>
-              <a:t>)</a:t>
-            </a:r>
-            <a:r>
-              <a:rPr lang="zh-TW" altLang="en-US" sz="3200" dirty="0">
-                <a:solidFill>
-                  <a:prstClr val="white"/>
-                </a:solidFill>
-                <a:latin typeface="微軟正黑體" panose="020B0604030504040204" pitchFamily="34" charset="-120"/>
-                <a:ea typeface="微軟正黑體" panose="020B0604030504040204" pitchFamily="34" charset="-120"/>
-              </a:rPr>
-              <a:t>及使用大量語料庫</a:t>
-            </a:r>
-            <a:endParaRPr lang="en-US" altLang="zh-TW" sz="3200" dirty="0">
-              <a:solidFill>
-                <a:prstClr val="white"/>
-              </a:solidFill>
-              <a:latin typeface="微軟正黑體" panose="020B0604030504040204" pitchFamily="34" charset="-120"/>
-              <a:ea typeface="微軟正黑體" panose="020B0604030504040204" pitchFamily="34" charset="-120"/>
-            </a:endParaRPr>
-          </a:p>
-          <a:p>
-            <a:pPr marL="457200" indent="-457200">
-              <a:buFont typeface="Arial" panose="020B0604020202020204" pitchFamily="34" charset="0"/>
-              <a:buChar char="•"/>
-            </a:pPr>
-            <a:r>
-              <a:rPr lang="en-US" altLang="zh-TW" sz="3200" dirty="0">
-                <a:solidFill>
-                  <a:prstClr val="white"/>
-                </a:solidFill>
-                <a:latin typeface="微軟正黑體" panose="020B0604030504040204" pitchFamily="34" charset="-120"/>
-                <a:ea typeface="微軟正黑體" panose="020B0604030504040204" pitchFamily="34" charset="-120"/>
-              </a:rPr>
-              <a:t>2020</a:t>
-            </a:r>
-            <a:r>
-              <a:rPr lang="zh-TW" altLang="en-US" sz="3200" dirty="0">
-                <a:solidFill>
-                  <a:prstClr val="white"/>
-                </a:solidFill>
-                <a:latin typeface="微軟正黑體" panose="020B0604030504040204" pitchFamily="34" charset="-120"/>
-                <a:ea typeface="微軟正黑體" panose="020B0604030504040204" pitchFamily="34" charset="-120"/>
-              </a:rPr>
-              <a:t>年的</a:t>
-            </a:r>
-            <a:r>
-              <a:rPr lang="en-US" altLang="zh-TW" sz="3200" dirty="0">
-                <a:solidFill>
-                  <a:prstClr val="white"/>
-                </a:solidFill>
-                <a:latin typeface="微軟正黑體" panose="020B0604030504040204" pitchFamily="34" charset="-120"/>
-                <a:ea typeface="微軟正黑體" panose="020B0604030504040204" pitchFamily="34" charset="-120"/>
-              </a:rPr>
-              <a:t>Scaling Law</a:t>
-            </a:r>
-          </a:p>
-          <a:p>
-            <a:pPr marL="457200" indent="-457200">
-              <a:buFont typeface="Arial" panose="020B0604020202020204" pitchFamily="34" charset="0"/>
-              <a:buChar char="•"/>
-            </a:pPr>
-            <a:r>
-              <a:rPr lang="en-US" altLang="zh-TW" sz="3200" dirty="0">
-                <a:solidFill>
-                  <a:prstClr val="white"/>
-                </a:solidFill>
-                <a:latin typeface="微軟正黑體" panose="020B0604030504040204" pitchFamily="34" charset="-120"/>
-                <a:ea typeface="微軟正黑體" panose="020B0604030504040204" pitchFamily="34" charset="-120"/>
-              </a:rPr>
-              <a:t>2022</a:t>
-            </a:r>
-            <a:r>
-              <a:rPr lang="zh-TW" altLang="en-US" sz="3200" dirty="0">
-                <a:solidFill>
-                  <a:prstClr val="white"/>
-                </a:solidFill>
-                <a:latin typeface="微軟正黑體" panose="020B0604030504040204" pitchFamily="34" charset="-120"/>
-                <a:ea typeface="微軟正黑體" panose="020B0604030504040204" pitchFamily="34" charset="-120"/>
-              </a:rPr>
-              <a:t>年發現的</a:t>
-            </a:r>
-            <a:r>
-              <a:rPr lang="en-US" altLang="zh-TW" sz="3200" dirty="0">
-                <a:solidFill>
-                  <a:prstClr val="white"/>
-                </a:solidFill>
-                <a:latin typeface="微軟正黑體" panose="020B0604030504040204" pitchFamily="34" charset="-120"/>
-                <a:ea typeface="微軟正黑體" panose="020B0604030504040204" pitchFamily="34" charset="-120"/>
-              </a:rPr>
-              <a:t>Emergent Abilities</a:t>
-            </a:r>
-          </a:p>
-          <a:p>
-            <a:pPr marL="457200" indent="-457200">
-              <a:buFont typeface="Arial" panose="020B0604020202020204" pitchFamily="34" charset="0"/>
-              <a:buChar char="•"/>
-            </a:pPr>
-            <a:r>
-              <a:rPr lang="zh-TW" altLang="en-US" sz="3200" dirty="0">
-                <a:solidFill>
-                  <a:prstClr val="white"/>
-                </a:solidFill>
-                <a:latin typeface="微軟正黑體" panose="020B0604030504040204" pitchFamily="34" charset="-120"/>
-                <a:ea typeface="微軟正黑體" panose="020B0604030504040204" pitchFamily="34" charset="-120"/>
-              </a:rPr>
-              <a:t>從此就走向越來越大的趨勢</a:t>
-            </a:r>
-            <a:endParaRPr lang="en-US" altLang="zh-TW" sz="3200" dirty="0">
-              <a:solidFill>
-                <a:prstClr val="white"/>
-              </a:solidFill>
-              <a:latin typeface="微軟正黑體" panose="020B0604030504040204" pitchFamily="34" charset="-120"/>
-              <a:ea typeface="微軟正黑體" panose="020B0604030504040204" pitchFamily="34" charset="-120"/>
-            </a:endParaRPr>
-          </a:p>
-          <a:p>
-            <a:pPr marL="457200" indent="-457200">
-              <a:buFont typeface="Arial" panose="020B0604020202020204" pitchFamily="34" charset="0"/>
-              <a:buChar char="•"/>
-            </a:pPr>
-            <a:r>
-              <a:rPr lang="zh-TW" altLang="en-US" sz="3200" dirty="0">
-                <a:solidFill>
-                  <a:prstClr val="white"/>
-                </a:solidFill>
-                <a:latin typeface="微軟正黑體" panose="020B0604030504040204" pitchFamily="34" charset="-120"/>
-                <a:ea typeface="微軟正黑體" panose="020B0604030504040204" pitchFamily="34" charset="-120"/>
-              </a:rPr>
-              <a:t>模型非常大，語料庫非常多，需要巨大計算資源的預訓練語言模型</a:t>
-            </a:r>
-            <a:endParaRPr lang="en-US" altLang="zh-TW" sz="3200" dirty="0">
-              <a:solidFill>
-                <a:prstClr val="white"/>
-              </a:solidFill>
-              <a:latin typeface="微軟正黑體" panose="020B0604030504040204" pitchFamily="34" charset="-120"/>
-              <a:ea typeface="微軟正黑體" panose="020B0604030504040204" pitchFamily="34" charset="-120"/>
-            </a:endParaRPr>
-          </a:p>
-        </p:txBody>
-      </p:sp>
-    </p:spTree>
-    <p:extLst>
-      <p:ext uri="{BB962C8B-B14F-4D97-AF65-F5344CB8AC3E}">
-        <p14:creationId xmlns:p14="http://schemas.microsoft.com/office/powerpoint/2010/main" val="1789973883"/>
-      </p:ext>
-    </p:extLst>
-  </p:cSld>
-  <p:clrMapOvr>
-    <a:masterClrMapping/>
-  </p:clrMapOvr>
-  <p:transition>
-    <p:fade/>
-  </p:transition>
-</p:sld>
-</file>
-
-<file path=ppt/slides/slide20.xml><?xml version="1.0" encoding="utf-8"?>
+<file path=ppt/slides/slide21.xml><?xml version="1.0" encoding="utf-8"?>
 <p:sld xmlns:a="http://schemas.openxmlformats.org/drawingml/2006/main" xmlns:r="http://schemas.openxmlformats.org/officeDocument/2006/relationships" xmlns:p="http://schemas.openxmlformats.org/presentationml/2006/main">
   <p:cSld>
     <p:spTree>
@@ -17532,7 +18481,7 @@
         </p:nvGrpSpPr>
         <p:grpSpPr>
           <a:xfrm>
-            <a:off x="7047572" y="3910238"/>
+            <a:off x="6241513" y="3723891"/>
             <a:ext cx="1234800" cy="708840"/>
             <a:chOff x="7047572" y="3910238"/>
             <a:chExt cx="1234800" cy="708840"/>
@@ -18170,8 +19119,8 @@
         </p:nvSpPr>
         <p:spPr>
           <a:xfrm>
-            <a:off x="1981200" y="304800"/>
-            <a:ext cx="6629400" cy="990600"/>
+            <a:off x="2590800" y="76200"/>
+            <a:ext cx="4191000" cy="990600"/>
           </a:xfrm>
           <a:prstGeom prst="rect">
             <a:avLst/>
@@ -18184,7 +19133,7 @@
           <a:lstStyle/>
           <a:p>
             <a:r>
-              <a:rPr kumimoji="1" lang="zh-TW" altLang="en-US" sz="4800" b="1" dirty="0">
+              <a:rPr kumimoji="1" lang="en-US" altLang="zh-TW" sz="4800" b="1" dirty="0">
                 <a:solidFill>
                   <a:srgbClr val="00B0F0"/>
                 </a:solidFill>
@@ -18199,23 +19148,8 @@
                 <a:ea typeface="微軟正黑體" panose="020B0604030504040204" pitchFamily="34" charset="-120"/>
                 <a:cs typeface="Heiti TC Light"/>
               </a:rPr>
-              <a:t>著名大型語言模型</a:t>
-            </a:r>
-            <a:endParaRPr kumimoji="1" lang="en-US" altLang="zh-TW" sz="4800" b="1" dirty="0">
-              <a:solidFill>
-                <a:srgbClr val="00B0F0"/>
-              </a:solidFill>
-              <a:effectLst>
-                <a:outerShdw blurRad="38100" dist="38100" dir="2700000" algn="tl">
-                  <a:srgbClr val="000000">
-                    <a:alpha val="43137"/>
-                  </a:srgbClr>
-                </a:outerShdw>
-              </a:effectLst>
-              <a:latin typeface="微軟正黑體" panose="020B0604030504040204" pitchFamily="34" charset="-120"/>
-              <a:ea typeface="微軟正黑體" panose="020B0604030504040204" pitchFamily="34" charset="-120"/>
-              <a:cs typeface="Heiti TC Light"/>
-            </a:endParaRPr>
+              <a:t>Scaling Law</a:t>
+            </a:r>
           </a:p>
         </p:txBody>
       </p:sp>
@@ -18235,12 +19169,7 @@
             <p:ph type="dt" sz="half" idx="12"/>
           </p:nvPr>
         </p:nvSpPr>
-        <p:spPr>
-          <a:xfrm>
-            <a:off x="66675" y="6842127"/>
-            <a:ext cx="2438400" cy="244475"/>
-          </a:xfrm>
-        </p:spPr>
+        <p:spPr/>
         <p:txBody>
           <a:bodyPr/>
           <a:lstStyle/>
@@ -18255,7 +19184,7 @@
                 <a:cs typeface="Arial" panose="020B0604020202020204" pitchFamily="34" charset="0"/>
               </a:rPr>
               <a:pPr/>
-              <a:t>3/14/2024</a:t>
+              <a:t>11/27/2024</a:t>
             </a:fld>
             <a:endParaRPr lang="en-US" dirty="0">
               <a:solidFill>
@@ -18283,12 +19212,7 @@
             <p:ph type="sldNum" sz="quarter" idx="13"/>
           </p:nvPr>
         </p:nvSpPr>
-        <p:spPr>
-          <a:xfrm>
-            <a:off x="8172450" y="6842127"/>
-            <a:ext cx="914400" cy="244475"/>
-          </a:xfrm>
-        </p:spPr>
+        <p:spPr/>
         <p:txBody>
           <a:bodyPr/>
           <a:lstStyle/>
@@ -18302,607 +19226,6 @@
               </a:rPr>
               <a:pPr/>
               <a:t>4</a:t>
-            </a:fld>
-            <a:endParaRPr lang="en-US" dirty="0">
-              <a:solidFill>
-                <a:srgbClr val="D4D2D0"/>
-              </a:solidFill>
-              <a:latin typeface="Century Schoolbook"/>
-            </a:endParaRPr>
-          </a:p>
-        </p:txBody>
-      </p:sp>
-      <p:sp>
-        <p:nvSpPr>
-          <p:cNvPr id="2" name="文字方塊 1">
-            <a:extLst>
-              <a:ext uri="{FF2B5EF4-FFF2-40B4-BE49-F238E27FC236}">
-                <a16:creationId xmlns:a16="http://schemas.microsoft.com/office/drawing/2014/main" id="{F1216D9E-C86D-79CD-21E3-AD03964D87A6}"/>
-              </a:ext>
-            </a:extLst>
-          </p:cNvPr>
-          <p:cNvSpPr txBox="1"/>
-          <p:nvPr/>
-        </p:nvSpPr>
-        <p:spPr>
-          <a:xfrm>
-            <a:off x="533400" y="1524002"/>
-            <a:ext cx="7924800" cy="4031873"/>
-          </a:xfrm>
-          <a:prstGeom prst="rect">
-            <a:avLst/>
-          </a:prstGeom>
-          <a:noFill/>
-        </p:spPr>
-        <p:txBody>
-          <a:bodyPr wrap="square" rtlCol="0">
-            <a:spAutoFit/>
-          </a:bodyPr>
-          <a:lstStyle/>
-          <a:p>
-            <a:pPr marL="457200" indent="-457200">
-              <a:buFont typeface="Arial" panose="020B0604020202020204" pitchFamily="34" charset="0"/>
-              <a:buChar char="•"/>
-            </a:pPr>
-            <a:r>
-              <a:rPr lang="en-US" altLang="zh-TW" sz="3200" dirty="0">
-                <a:solidFill>
-                  <a:prstClr val="white"/>
-                </a:solidFill>
-                <a:latin typeface="微軟正黑體" panose="020B0604030504040204" pitchFamily="34" charset="-120"/>
-                <a:ea typeface="微軟正黑體" panose="020B0604030504040204" pitchFamily="34" charset="-120"/>
-              </a:rPr>
-              <a:t>Seq2seq</a:t>
-            </a:r>
-            <a:r>
-              <a:rPr lang="zh-TW" altLang="en-US" sz="3200" dirty="0">
-                <a:solidFill>
-                  <a:prstClr val="white"/>
-                </a:solidFill>
-                <a:latin typeface="微軟正黑體" panose="020B0604030504040204" pitchFamily="34" charset="-120"/>
-                <a:ea typeface="微軟正黑體" panose="020B0604030504040204" pitchFamily="34" charset="-120"/>
-              </a:rPr>
-              <a:t>的</a:t>
-            </a:r>
-            <a:r>
-              <a:rPr lang="en-US" altLang="zh-TW" sz="3200" dirty="0">
-                <a:solidFill>
-                  <a:prstClr val="white"/>
-                </a:solidFill>
-                <a:latin typeface="微軟正黑體" panose="020B0604030504040204" pitchFamily="34" charset="-120"/>
-                <a:ea typeface="微軟正黑體" panose="020B0604030504040204" pitchFamily="34" charset="-120"/>
-              </a:rPr>
-              <a:t>BART</a:t>
-            </a:r>
-            <a:r>
-              <a:rPr lang="zh-TW" altLang="en-US" sz="3200" dirty="0">
-                <a:solidFill>
-                  <a:prstClr val="white"/>
-                </a:solidFill>
-                <a:latin typeface="微軟正黑體" panose="020B0604030504040204" pitchFamily="34" charset="-120"/>
-                <a:ea typeface="微軟正黑體" panose="020B0604030504040204" pitchFamily="34" charset="-120"/>
-              </a:rPr>
-              <a:t>，</a:t>
-            </a:r>
-            <a:r>
-              <a:rPr lang="en-US" altLang="zh-TW" sz="3200" dirty="0">
-                <a:solidFill>
-                  <a:prstClr val="white"/>
-                </a:solidFill>
-                <a:latin typeface="微軟正黑體" panose="020B0604030504040204" pitchFamily="34" charset="-120"/>
-                <a:ea typeface="微軟正黑體" panose="020B0604030504040204" pitchFamily="34" charset="-120"/>
-              </a:rPr>
-              <a:t>T5</a:t>
-            </a:r>
-          </a:p>
-          <a:p>
-            <a:pPr marL="457200" indent="-457200">
-              <a:buFont typeface="Arial" panose="020B0604020202020204" pitchFamily="34" charset="0"/>
-              <a:buChar char="•"/>
-            </a:pPr>
-            <a:r>
-              <a:rPr lang="zh-TW" altLang="en-US" sz="3200" dirty="0">
-                <a:solidFill>
-                  <a:prstClr val="white"/>
-                </a:solidFill>
-                <a:latin typeface="微軟正黑體" panose="020B0604030504040204" pitchFamily="34" charset="-120"/>
-                <a:ea typeface="微軟正黑體" panose="020B0604030504040204" pitchFamily="34" charset="-120"/>
-              </a:rPr>
-              <a:t>單向生成模型</a:t>
-            </a:r>
-            <a:r>
-              <a:rPr lang="en-US" altLang="zh-TW" sz="3200" dirty="0">
-                <a:solidFill>
-                  <a:prstClr val="white"/>
-                </a:solidFill>
-                <a:latin typeface="微軟正黑體" panose="020B0604030504040204" pitchFamily="34" charset="-120"/>
-                <a:ea typeface="微軟正黑體" panose="020B0604030504040204" pitchFamily="34" charset="-120"/>
-              </a:rPr>
-              <a:t>GPT</a:t>
-            </a:r>
-            <a:r>
-              <a:rPr lang="zh-TW" altLang="en-US" sz="3200" dirty="0">
-                <a:solidFill>
-                  <a:prstClr val="white"/>
-                </a:solidFill>
-                <a:latin typeface="微軟正黑體" panose="020B0604030504040204" pitchFamily="34" charset="-120"/>
-                <a:ea typeface="微軟正黑體" panose="020B0604030504040204" pitchFamily="34" charset="-120"/>
-              </a:rPr>
-              <a:t>、</a:t>
-            </a:r>
-            <a:r>
-              <a:rPr lang="en-US" altLang="zh-TW" sz="3200" dirty="0">
-                <a:solidFill>
-                  <a:prstClr val="white"/>
-                </a:solidFill>
-                <a:latin typeface="微軟正黑體" panose="020B0604030504040204" pitchFamily="34" charset="-120"/>
-                <a:ea typeface="微軟正黑體" panose="020B0604030504040204" pitchFamily="34" charset="-120"/>
-              </a:rPr>
-              <a:t>GPT2</a:t>
-            </a:r>
-            <a:r>
-              <a:rPr lang="zh-TW" altLang="en-US" sz="3200" dirty="0">
-                <a:solidFill>
-                  <a:prstClr val="white"/>
-                </a:solidFill>
-                <a:latin typeface="微軟正黑體" panose="020B0604030504040204" pitchFamily="34" charset="-120"/>
-                <a:ea typeface="微軟正黑體" panose="020B0604030504040204" pitchFamily="34" charset="-120"/>
-              </a:rPr>
-              <a:t>、</a:t>
-            </a:r>
-            <a:r>
-              <a:rPr lang="en-US" altLang="zh-TW" sz="3200" dirty="0">
-                <a:solidFill>
-                  <a:prstClr val="white"/>
-                </a:solidFill>
-                <a:latin typeface="微軟正黑體" panose="020B0604030504040204" pitchFamily="34" charset="-120"/>
-                <a:ea typeface="微軟正黑體" panose="020B0604030504040204" pitchFamily="34" charset="-120"/>
-              </a:rPr>
-              <a:t>GPT3</a:t>
-            </a:r>
-          </a:p>
-          <a:p>
-            <a:pPr marL="457200" indent="-457200">
-              <a:buFont typeface="Arial" panose="020B0604020202020204" pitchFamily="34" charset="0"/>
-              <a:buChar char="•"/>
-            </a:pPr>
-            <a:r>
-              <a:rPr lang="zh-TW" altLang="en-US" sz="3200" dirty="0">
-                <a:solidFill>
-                  <a:prstClr val="white"/>
-                </a:solidFill>
-                <a:latin typeface="微軟正黑體" panose="020B0604030504040204" pitchFamily="34" charset="-120"/>
-                <a:ea typeface="微軟正黑體" panose="020B0604030504040204" pitchFamily="34" charset="-120"/>
-              </a:rPr>
-              <a:t>指令微調後的</a:t>
-            </a:r>
-            <a:r>
-              <a:rPr lang="en-US" altLang="zh-TW" sz="3200" dirty="0">
-                <a:solidFill>
-                  <a:prstClr val="white"/>
-                </a:solidFill>
-                <a:latin typeface="微軟正黑體" panose="020B0604030504040204" pitchFamily="34" charset="-120"/>
-                <a:ea typeface="微軟正黑體" panose="020B0604030504040204" pitchFamily="34" charset="-120"/>
-              </a:rPr>
-              <a:t>T0</a:t>
-            </a:r>
-            <a:r>
-              <a:rPr lang="zh-TW" altLang="en-US" sz="3200" dirty="0">
-                <a:solidFill>
-                  <a:prstClr val="white"/>
-                </a:solidFill>
-                <a:latin typeface="微軟正黑體" panose="020B0604030504040204" pitchFamily="34" charset="-120"/>
-                <a:ea typeface="微軟正黑體" panose="020B0604030504040204" pitchFamily="34" charset="-120"/>
-              </a:rPr>
-              <a:t>，</a:t>
-            </a:r>
-            <a:r>
-              <a:rPr lang="en-US" altLang="zh-TW" sz="3200" dirty="0">
-                <a:solidFill>
-                  <a:prstClr val="white"/>
-                </a:solidFill>
-                <a:latin typeface="微軟正黑體" panose="020B0604030504040204" pitchFamily="34" charset="-120"/>
-                <a:ea typeface="微軟正黑體" panose="020B0604030504040204" pitchFamily="34" charset="-120"/>
-              </a:rPr>
-              <a:t>Flan</a:t>
-            </a:r>
-          </a:p>
-          <a:p>
-            <a:pPr marL="457200" indent="-457200">
-              <a:buFont typeface="Arial" panose="020B0604020202020204" pitchFamily="34" charset="0"/>
-              <a:buChar char="•"/>
-            </a:pPr>
-            <a:r>
-              <a:rPr lang="zh-TW" altLang="en-US" sz="3200" dirty="0">
-                <a:solidFill>
-                  <a:prstClr val="white"/>
-                </a:solidFill>
-                <a:latin typeface="微軟正黑體" panose="020B0604030504040204" pitchFamily="34" charset="-120"/>
-                <a:ea typeface="微軟正黑體" panose="020B0604030504040204" pitchFamily="34" charset="-120"/>
-              </a:rPr>
-              <a:t>經過</a:t>
-            </a:r>
-            <a:r>
-              <a:rPr lang="en-US" altLang="zh-TW" sz="3200" dirty="0">
-                <a:solidFill>
-                  <a:prstClr val="white"/>
-                </a:solidFill>
-                <a:latin typeface="微軟正黑體" panose="020B0604030504040204" pitchFamily="34" charset="-120"/>
-                <a:ea typeface="微軟正黑體" panose="020B0604030504040204" pitchFamily="34" charset="-120"/>
-              </a:rPr>
-              <a:t>RLHF</a:t>
-            </a:r>
-            <a:r>
-              <a:rPr lang="zh-TW" altLang="en-US" sz="3200" dirty="0">
-                <a:solidFill>
-                  <a:prstClr val="white"/>
-                </a:solidFill>
-                <a:latin typeface="微軟正黑體" panose="020B0604030504040204" pitchFamily="34" charset="-120"/>
-                <a:ea typeface="微軟正黑體" panose="020B0604030504040204" pitchFamily="34" charset="-120"/>
-              </a:rPr>
-              <a:t>的</a:t>
-            </a:r>
-            <a:r>
-              <a:rPr lang="en-US" altLang="zh-TW" sz="3200" dirty="0" err="1">
-                <a:solidFill>
-                  <a:prstClr val="white"/>
-                </a:solidFill>
-                <a:latin typeface="微軟正黑體" panose="020B0604030504040204" pitchFamily="34" charset="-120"/>
-                <a:ea typeface="微軟正黑體" panose="020B0604030504040204" pitchFamily="34" charset="-120"/>
-              </a:rPr>
-              <a:t>InstructGPT</a:t>
-            </a:r>
-            <a:r>
-              <a:rPr lang="zh-TW" altLang="en-US" sz="3200" dirty="0">
-                <a:solidFill>
-                  <a:prstClr val="white"/>
-                </a:solidFill>
-                <a:latin typeface="微軟正黑體" panose="020B0604030504040204" pitchFamily="34" charset="-120"/>
-                <a:ea typeface="微軟正黑體" panose="020B0604030504040204" pitchFamily="34" charset="-120"/>
-              </a:rPr>
-              <a:t>、</a:t>
-            </a:r>
-            <a:r>
-              <a:rPr lang="en-US" altLang="zh-TW" sz="3200" dirty="0">
-                <a:solidFill>
-                  <a:prstClr val="white"/>
-                </a:solidFill>
-                <a:latin typeface="微軟正黑體" panose="020B0604030504040204" pitchFamily="34" charset="-120"/>
-                <a:ea typeface="微軟正黑體" panose="020B0604030504040204" pitchFamily="34" charset="-120"/>
-              </a:rPr>
-              <a:t>ChatGPT</a:t>
-            </a:r>
-          </a:p>
-          <a:p>
-            <a:pPr marL="457200" indent="-457200">
-              <a:buFont typeface="Arial" panose="020B0604020202020204" pitchFamily="34" charset="0"/>
-              <a:buChar char="•"/>
-            </a:pPr>
-            <a:r>
-              <a:rPr lang="zh-TW" altLang="en-US" sz="3200" dirty="0">
-                <a:solidFill>
-                  <a:prstClr val="white"/>
-                </a:solidFill>
-                <a:latin typeface="微軟正黑體" panose="020B0604030504040204" pitchFamily="34" charset="-120"/>
-                <a:ea typeface="微軟正黑體" panose="020B0604030504040204" pitchFamily="34" charset="-120"/>
-              </a:rPr>
-              <a:t>開源的</a:t>
-            </a:r>
-            <a:r>
-              <a:rPr lang="en-US" altLang="zh-TW" sz="3200" dirty="0">
-                <a:solidFill>
-                  <a:prstClr val="white"/>
-                </a:solidFill>
-                <a:latin typeface="微軟正黑體" panose="020B0604030504040204" pitchFamily="34" charset="-120"/>
-                <a:ea typeface="微軟正黑體" panose="020B0604030504040204" pitchFamily="34" charset="-120"/>
-              </a:rPr>
-              <a:t>LLM</a:t>
-            </a:r>
-            <a:r>
-              <a:rPr lang="zh-TW" altLang="en-US" sz="3200" dirty="0">
-                <a:solidFill>
-                  <a:prstClr val="white"/>
-                </a:solidFill>
-                <a:latin typeface="微軟正黑體" panose="020B0604030504040204" pitchFamily="34" charset="-120"/>
-                <a:ea typeface="微軟正黑體" panose="020B0604030504040204" pitchFamily="34" charset="-120"/>
-              </a:rPr>
-              <a:t> </a:t>
-            </a:r>
-            <a:r>
-              <a:rPr lang="en-US" altLang="zh-TW" sz="3200" dirty="0">
-                <a:solidFill>
-                  <a:prstClr val="white"/>
-                </a:solidFill>
-                <a:latin typeface="微軟正黑體" panose="020B0604030504040204" pitchFamily="34" charset="-120"/>
-                <a:ea typeface="微軟正黑體" panose="020B0604030504040204" pitchFamily="34" charset="-120"/>
-              </a:rPr>
-              <a:t>LLAMA</a:t>
-            </a:r>
-            <a:r>
-              <a:rPr lang="zh-TW" altLang="en-US" sz="3200" dirty="0">
-                <a:solidFill>
-                  <a:prstClr val="white"/>
-                </a:solidFill>
-                <a:latin typeface="微軟正黑體" panose="020B0604030504040204" pitchFamily="34" charset="-120"/>
-                <a:ea typeface="微軟正黑體" panose="020B0604030504040204" pitchFamily="34" charset="-120"/>
-              </a:rPr>
-              <a:t>、</a:t>
-            </a:r>
-            <a:r>
-              <a:rPr lang="en-US" altLang="zh-TW" sz="3200" dirty="0">
-                <a:solidFill>
-                  <a:prstClr val="white"/>
-                </a:solidFill>
-                <a:latin typeface="微軟正黑體" panose="020B0604030504040204" pitchFamily="34" charset="-120"/>
-                <a:ea typeface="微軟正黑體" panose="020B0604030504040204" pitchFamily="34" charset="-120"/>
-              </a:rPr>
-              <a:t>Mistral</a:t>
-            </a:r>
-          </a:p>
-          <a:p>
-            <a:pPr marL="457200" indent="-457200">
-              <a:buFont typeface="Arial" panose="020B0604020202020204" pitchFamily="34" charset="0"/>
-              <a:buChar char="•"/>
-            </a:pPr>
-            <a:r>
-              <a:rPr lang="zh-TW" altLang="en-US" sz="3200" dirty="0">
-                <a:solidFill>
-                  <a:prstClr val="white"/>
-                </a:solidFill>
-                <a:latin typeface="微軟正黑體" panose="020B0604030504040204" pitchFamily="34" charset="-120"/>
-                <a:ea typeface="微軟正黑體" panose="020B0604030504040204" pitchFamily="34" charset="-120"/>
-              </a:rPr>
-              <a:t>經過</a:t>
-            </a:r>
-            <a:r>
-              <a:rPr lang="en-US" altLang="zh-TW" sz="3200" dirty="0">
-                <a:solidFill>
-                  <a:prstClr val="white"/>
-                </a:solidFill>
-                <a:latin typeface="微軟正黑體" panose="020B0604030504040204" pitchFamily="34" charset="-120"/>
-                <a:ea typeface="微軟正黑體" panose="020B0604030504040204" pitchFamily="34" charset="-120"/>
-              </a:rPr>
-              <a:t>MOE</a:t>
-            </a:r>
-            <a:r>
-              <a:rPr lang="zh-TW" altLang="en-US" sz="3200" dirty="0">
-                <a:solidFill>
-                  <a:prstClr val="white"/>
-                </a:solidFill>
-                <a:latin typeface="微軟正黑體" panose="020B0604030504040204" pitchFamily="34" charset="-120"/>
-                <a:ea typeface="微軟正黑體" panose="020B0604030504040204" pitchFamily="34" charset="-120"/>
-              </a:rPr>
-              <a:t>優化的</a:t>
-            </a:r>
-            <a:r>
-              <a:rPr lang="en-US" altLang="zh-TW" sz="3200" dirty="0" err="1">
-                <a:solidFill>
-                  <a:prstClr val="white"/>
-                </a:solidFill>
-                <a:latin typeface="微軟正黑體" panose="020B0604030504040204" pitchFamily="34" charset="-120"/>
-                <a:ea typeface="微軟正黑體" panose="020B0604030504040204" pitchFamily="34" charset="-120"/>
-              </a:rPr>
-              <a:t>Mixtral</a:t>
-            </a:r>
-            <a:endParaRPr lang="en-US" altLang="zh-TW" sz="3200" dirty="0">
-              <a:solidFill>
-                <a:prstClr val="white"/>
-              </a:solidFill>
-              <a:latin typeface="微軟正黑體" panose="020B0604030504040204" pitchFamily="34" charset="-120"/>
-              <a:ea typeface="微軟正黑體" panose="020B0604030504040204" pitchFamily="34" charset="-120"/>
-            </a:endParaRPr>
-          </a:p>
-          <a:p>
-            <a:pPr marL="457200" indent="-457200">
-              <a:buFont typeface="Arial" panose="020B0604020202020204" pitchFamily="34" charset="0"/>
-              <a:buChar char="•"/>
-            </a:pPr>
-            <a:r>
-              <a:rPr lang="zh-TW" altLang="en-US" sz="3200" dirty="0">
-                <a:solidFill>
-                  <a:prstClr val="white"/>
-                </a:solidFill>
-                <a:latin typeface="微軟正黑體" panose="020B0604030504040204" pitchFamily="34" charset="-120"/>
-                <a:ea typeface="微軟正黑體" panose="020B0604030504040204" pitchFamily="34" charset="-120"/>
-              </a:rPr>
-              <a:t>國產的</a:t>
-            </a:r>
-            <a:r>
-              <a:rPr lang="en-US" altLang="zh-TW" sz="3200" dirty="0">
-                <a:solidFill>
-                  <a:prstClr val="white"/>
-                </a:solidFill>
-                <a:latin typeface="微軟正黑體" panose="020B0604030504040204" pitchFamily="34" charset="-120"/>
-                <a:ea typeface="微軟正黑體" panose="020B0604030504040204" pitchFamily="34" charset="-120"/>
-              </a:rPr>
-              <a:t>Taiwan LLAMA2 (</a:t>
-            </a:r>
-            <a:r>
-              <a:rPr lang="zh-TW" altLang="en-US" sz="3200" dirty="0">
-                <a:solidFill>
-                  <a:prstClr val="white"/>
-                </a:solidFill>
-                <a:latin typeface="微軟正黑體" panose="020B0604030504040204" pitchFamily="34" charset="-120"/>
-                <a:ea typeface="微軟正黑體" panose="020B0604030504040204" pitchFamily="34" charset="-120"/>
-              </a:rPr>
-              <a:t>林彥廷</a:t>
-            </a:r>
-            <a:r>
-              <a:rPr lang="en-US" altLang="zh-TW" sz="3200" dirty="0">
-                <a:solidFill>
-                  <a:prstClr val="white"/>
-                </a:solidFill>
-                <a:latin typeface="微軟正黑體" panose="020B0604030504040204" pitchFamily="34" charset="-120"/>
-                <a:ea typeface="微軟正黑體" panose="020B0604030504040204" pitchFamily="34" charset="-120"/>
-              </a:rPr>
-              <a:t>)</a:t>
-            </a:r>
-          </a:p>
-          <a:p>
-            <a:pPr marL="457200" indent="-457200">
-              <a:buFont typeface="Arial" panose="020B0604020202020204" pitchFamily="34" charset="0"/>
-              <a:buChar char="•"/>
-            </a:pPr>
-            <a:endParaRPr lang="en-US" altLang="zh-TW" sz="3200" dirty="0">
-              <a:solidFill>
-                <a:prstClr val="white"/>
-              </a:solidFill>
-              <a:latin typeface="微軟正黑體" panose="020B0604030504040204" pitchFamily="34" charset="-120"/>
-              <a:ea typeface="微軟正黑體" panose="020B0604030504040204" pitchFamily="34" charset="-120"/>
-            </a:endParaRPr>
-          </a:p>
-        </p:txBody>
-      </p:sp>
-    </p:spTree>
-    <p:extLst>
-      <p:ext uri="{BB962C8B-B14F-4D97-AF65-F5344CB8AC3E}">
-        <p14:creationId xmlns:p14="http://schemas.microsoft.com/office/powerpoint/2010/main" val="1619937366"/>
-      </p:ext>
-    </p:extLst>
-  </p:cSld>
-  <p:clrMapOvr>
-    <a:masterClrMapping/>
-  </p:clrMapOvr>
-  <p:transition>
-    <p:fade/>
-  </p:transition>
-</p:sld>
-</file>
-
-<file path=ppt/slides/slide5.xml><?xml version="1.0" encoding="utf-8"?>
-<p:sld xmlns:a="http://schemas.openxmlformats.org/drawingml/2006/main" xmlns:r="http://schemas.openxmlformats.org/officeDocument/2006/relationships" xmlns:p="http://schemas.openxmlformats.org/presentationml/2006/main">
-  <p:cSld>
-    <p:spTree>
-      <p:nvGrpSpPr>
-        <p:cNvPr id="1" name=""/>
-        <p:cNvGrpSpPr/>
-        <p:nvPr/>
-      </p:nvGrpSpPr>
-      <p:grpSpPr>
-        <a:xfrm>
-          <a:off x="0" y="0"/>
-          <a:ext cx="0" cy="0"/>
-          <a:chOff x="0" y="0"/>
-          <a:chExt cx="0" cy="0"/>
-        </a:xfrm>
-      </p:grpSpPr>
-      <p:sp>
-        <p:nvSpPr>
-          <p:cNvPr id="4" name="文字版面配置區 2"/>
-          <p:cNvSpPr txBox="1">
-            <a:spLocks/>
-          </p:cNvSpPr>
-          <p:nvPr/>
-        </p:nvSpPr>
-        <p:spPr>
-          <a:xfrm>
-            <a:off x="2590800" y="76200"/>
-            <a:ext cx="4191000" cy="990600"/>
-          </a:xfrm>
-          <a:prstGeom prst="rect">
-            <a:avLst/>
-          </a:prstGeom>
-        </p:spPr>
-        <p:txBody>
-          <a:bodyPr tIns="91440" bIns="91440" anchor="b" anchorCtr="0">
-            <a:noAutofit/>
-          </a:bodyPr>
-          <a:lstStyle/>
-          <a:p>
-            <a:r>
-              <a:rPr kumimoji="1" lang="en-US" altLang="zh-TW" sz="4800" b="1" dirty="0">
-                <a:solidFill>
-                  <a:srgbClr val="00B0F0"/>
-                </a:solidFill>
-                <a:effectLst>
-                  <a:outerShdw blurRad="38100" dist="38100" dir="2700000" algn="tl">
-                    <a:srgbClr val="000000">
-                      <a:alpha val="43137"/>
-                    </a:srgbClr>
-                  </a:outerShdw>
-                </a:effectLst>
-                <a:latin typeface="微軟正黑體" panose="020B0604030504040204" pitchFamily="34" charset="-120"/>
-                <a:ea typeface="微軟正黑體" panose="020B0604030504040204" pitchFamily="34" charset="-120"/>
-                <a:cs typeface="Heiti TC Light"/>
-              </a:rPr>
-              <a:t>Scaling Law</a:t>
-            </a:r>
-          </a:p>
-        </p:txBody>
-      </p:sp>
-      <p:sp>
-        <p:nvSpPr>
-          <p:cNvPr id="3" name="日期版面配置區 2">
-            <a:extLst>
-              <a:ext uri="{FF2B5EF4-FFF2-40B4-BE49-F238E27FC236}">
-                <a16:creationId xmlns:a16="http://schemas.microsoft.com/office/drawing/2014/main" id="{1C536CB5-3C58-6CF1-767E-952B76F12DEE}"/>
-              </a:ext>
-            </a:extLst>
-          </p:cNvPr>
-          <p:cNvSpPr>
-            <a:spLocks noGrp="1"/>
-          </p:cNvSpPr>
-          <p:nvPr>
-            <p:ph type="dt" sz="half" idx="12"/>
-          </p:nvPr>
-        </p:nvSpPr>
-        <p:spPr/>
-        <p:txBody>
-          <a:bodyPr/>
-          <a:lstStyle/>
-          <a:p>
-            <a:fld id="{0B520B05-2240-4566-BE2A-9338980FE8EB}" type="datetime1">
-              <a:rPr lang="en-US" altLang="zh-TW">
-                <a:solidFill>
-                  <a:srgbClr val="D4D2D0"/>
-                </a:solidFill>
-                <a:latin typeface="Arial" panose="020B0604020202020204" pitchFamily="34" charset="0"/>
-                <a:ea typeface="新細明體" panose="02020500000000000000" pitchFamily="18" charset="-120"/>
-                <a:cs typeface="Arial" panose="020B0604020202020204" pitchFamily="34" charset="0"/>
-              </a:rPr>
-              <a:pPr/>
-              <a:t>3/14/2024</a:t>
-            </a:fld>
-            <a:endParaRPr lang="en-US" dirty="0">
-              <a:solidFill>
-                <a:srgbClr val="D4D2D0"/>
-              </a:solidFill>
-              <a:latin typeface="Arial" panose="020B0604020202020204" pitchFamily="34" charset="0"/>
-              <a:cs typeface="Arial" panose="020B0604020202020204" pitchFamily="34" charset="0"/>
-            </a:endParaRPr>
-          </a:p>
-        </p:txBody>
-      </p:sp>
-      <p:sp>
-        <p:nvSpPr>
-          <p:cNvPr id="7" name="投影片編號版面配置區 6">
-            <a:extLst>
-              <a:ext uri="{FF2B5EF4-FFF2-40B4-BE49-F238E27FC236}">
-                <a16:creationId xmlns:a16="http://schemas.microsoft.com/office/drawing/2014/main" id="{DA316F56-AF12-D872-611F-78AE7ACCBF93}"/>
-              </a:ext>
-            </a:extLst>
-          </p:cNvPr>
-          <p:cNvSpPr>
-            <a:spLocks noGrp="1"/>
-          </p:cNvSpPr>
-          <p:nvPr>
-            <p:ph type="sldNum" sz="quarter" idx="13"/>
-          </p:nvPr>
-        </p:nvSpPr>
-        <p:spPr/>
-        <p:txBody>
-          <a:bodyPr/>
-          <a:lstStyle/>
-          <a:p>
-            <a:fld id="{F99EC173-99AE-4773-AB25-02E469A13EAE}" type="slidenum">
-              <a:rPr lang="en-US">
-                <a:solidFill>
-                  <a:srgbClr val="D4D2D0"/>
-                </a:solidFill>
-                <a:latin typeface="Century Schoolbook"/>
-              </a:rPr>
-              <a:pPr/>
-              <a:t>5</a:t>
             </a:fld>
             <a:endParaRPr lang="en-US" dirty="0">
               <a:solidFill>
@@ -19140,7 +19463,7 @@
 </p:sld>
 </file>
 
-<file path=ppt/slides/slide6.xml><?xml version="1.0" encoding="utf-8"?>
+<file path=ppt/slides/slide5.xml><?xml version="1.0" encoding="utf-8"?>
 <p:sld xmlns:a="http://schemas.openxmlformats.org/drawingml/2006/main" xmlns:r="http://schemas.openxmlformats.org/officeDocument/2006/relationships" xmlns:p="http://schemas.openxmlformats.org/presentationml/2006/main">
   <p:cSld>
     <p:spTree>
@@ -19237,7 +19560,7 @@
                 <a:cs typeface="Arial" panose="020B0604020202020204" pitchFamily="34" charset="0"/>
               </a:rPr>
               <a:pPr/>
-              <a:t>3/14/2024</a:t>
+              <a:t>11/27/2024</a:t>
             </a:fld>
             <a:endParaRPr lang="en-US" dirty="0">
               <a:solidFill>
@@ -19283,7 +19606,7 @@
                 <a:latin typeface="Century Schoolbook"/>
               </a:rPr>
               <a:pPr/>
-              <a:t>6</a:t>
+              <a:t>5</a:t>
             </a:fld>
             <a:endParaRPr lang="en-US" dirty="0">
               <a:solidFill>
@@ -19340,6 +19663,299 @@
 </p:sld>
 </file>
 
+<file path=ppt/slides/slide6.xml><?xml version="1.0" encoding="utf-8"?>
+<p:sld xmlns:a="http://schemas.openxmlformats.org/drawingml/2006/main" xmlns:r="http://schemas.openxmlformats.org/officeDocument/2006/relationships" xmlns:p="http://schemas.openxmlformats.org/presentationml/2006/main">
+  <p:cSld>
+    <p:spTree>
+      <p:nvGrpSpPr>
+        <p:cNvPr id="1" name=""/>
+        <p:cNvGrpSpPr/>
+        <p:nvPr/>
+      </p:nvGrpSpPr>
+      <p:grpSpPr>
+        <a:xfrm>
+          <a:off x="0" y="0"/>
+          <a:ext cx="0" cy="0"/>
+          <a:chOff x="0" y="0"/>
+          <a:chExt cx="0" cy="0"/>
+        </a:xfrm>
+      </p:grpSpPr>
+      <p:sp>
+        <p:nvSpPr>
+          <p:cNvPr id="4" name="文字版面配置區 2"/>
+          <p:cNvSpPr txBox="1">
+            <a:spLocks/>
+          </p:cNvSpPr>
+          <p:nvPr/>
+        </p:nvSpPr>
+        <p:spPr>
+          <a:xfrm>
+            <a:off x="1828800" y="381000"/>
+            <a:ext cx="5943600" cy="990600"/>
+          </a:xfrm>
+          <a:prstGeom prst="rect">
+            <a:avLst/>
+          </a:prstGeom>
+        </p:spPr>
+        <p:txBody>
+          <a:bodyPr tIns="91440" bIns="91440" anchor="b" anchorCtr="0">
+            <a:noAutofit/>
+          </a:bodyPr>
+          <a:lstStyle/>
+          <a:p>
+            <a:r>
+              <a:rPr kumimoji="1" lang="zh-TW" altLang="en-US" sz="4800" b="1" dirty="0">
+                <a:solidFill>
+                  <a:srgbClr val="00B0F0"/>
+                </a:solidFill>
+                <a:effectLst>
+                  <a:outerShdw blurRad="38100" dist="38100" dir="2700000" algn="tl">
+                    <a:srgbClr val="000000">
+                      <a:alpha val="43137"/>
+                    </a:srgbClr>
+                  </a:outerShdw>
+                </a:effectLst>
+                <a:latin typeface="微軟正黑體" panose="020B0604030504040204" pitchFamily="34" charset="-120"/>
+                <a:ea typeface="微軟正黑體" panose="020B0604030504040204" pitchFamily="34" charset="-120"/>
+                <a:cs typeface="Heiti TC Light"/>
+              </a:rPr>
+              <a:t>語言模型越大越好？</a:t>
+            </a:r>
+            <a:endParaRPr kumimoji="1" lang="en-US" altLang="zh-TW" sz="4800" b="1" dirty="0">
+              <a:solidFill>
+                <a:srgbClr val="00B0F0"/>
+              </a:solidFill>
+              <a:effectLst>
+                <a:outerShdw blurRad="38100" dist="38100" dir="2700000" algn="tl">
+                  <a:srgbClr val="000000">
+                    <a:alpha val="43137"/>
+                  </a:srgbClr>
+                </a:outerShdw>
+              </a:effectLst>
+              <a:latin typeface="微軟正黑體" panose="020B0604030504040204" pitchFamily="34" charset="-120"/>
+              <a:ea typeface="微軟正黑體" panose="020B0604030504040204" pitchFamily="34" charset="-120"/>
+              <a:cs typeface="Heiti TC Light"/>
+            </a:endParaRPr>
+          </a:p>
+        </p:txBody>
+      </p:sp>
+      <p:sp>
+        <p:nvSpPr>
+          <p:cNvPr id="3" name="日期版面配置區 2">
+            <a:extLst>
+              <a:ext uri="{FF2B5EF4-FFF2-40B4-BE49-F238E27FC236}">
+                <a16:creationId xmlns:a16="http://schemas.microsoft.com/office/drawing/2014/main" id="{1C536CB5-3C58-6CF1-767E-952B76F12DEE}"/>
+              </a:ext>
+            </a:extLst>
+          </p:cNvPr>
+          <p:cNvSpPr>
+            <a:spLocks noGrp="1"/>
+          </p:cNvSpPr>
+          <p:nvPr>
+            <p:ph type="dt" sz="half" idx="12"/>
+          </p:nvPr>
+        </p:nvSpPr>
+        <p:spPr>
+          <a:xfrm>
+            <a:off x="66675" y="6886195"/>
+            <a:ext cx="2438400" cy="244475"/>
+          </a:xfrm>
+        </p:spPr>
+        <p:txBody>
+          <a:bodyPr/>
+          <a:lstStyle/>
+          <a:p>
+            <a:fld id="{0B520B05-2240-4566-BE2A-9338980FE8EB}" type="datetime1">
+              <a:rPr lang="en-US" altLang="zh-TW">
+                <a:solidFill>
+                  <a:srgbClr val="D4D2D0"/>
+                </a:solidFill>
+                <a:latin typeface="Arial" panose="020B0604020202020204" pitchFamily="34" charset="0"/>
+                <a:ea typeface="新細明體" panose="02020500000000000000" pitchFamily="18" charset="-120"/>
+                <a:cs typeface="Arial" panose="020B0604020202020204" pitchFamily="34" charset="0"/>
+              </a:rPr>
+              <a:pPr/>
+              <a:t>11/27/2024</a:t>
+            </a:fld>
+            <a:endParaRPr lang="en-US" dirty="0">
+              <a:solidFill>
+                <a:srgbClr val="D4D2D0"/>
+              </a:solidFill>
+              <a:latin typeface="Arial" panose="020B0604020202020204" pitchFamily="34" charset="0"/>
+              <a:cs typeface="Arial" panose="020B0604020202020204" pitchFamily="34" charset="0"/>
+            </a:endParaRPr>
+          </a:p>
+        </p:txBody>
+      </p:sp>
+      <p:sp>
+        <p:nvSpPr>
+          <p:cNvPr id="7" name="投影片編號版面配置區 6">
+            <a:extLst>
+              <a:ext uri="{FF2B5EF4-FFF2-40B4-BE49-F238E27FC236}">
+                <a16:creationId xmlns:a16="http://schemas.microsoft.com/office/drawing/2014/main" id="{DA316F56-AF12-D872-611F-78AE7ACCBF93}"/>
+              </a:ext>
+            </a:extLst>
+          </p:cNvPr>
+          <p:cNvSpPr>
+            <a:spLocks noGrp="1"/>
+          </p:cNvSpPr>
+          <p:nvPr>
+            <p:ph type="sldNum" sz="quarter" idx="13"/>
+          </p:nvPr>
+        </p:nvSpPr>
+        <p:spPr>
+          <a:xfrm>
+            <a:off x="8172450" y="6886195"/>
+            <a:ext cx="914400" cy="244475"/>
+          </a:xfrm>
+        </p:spPr>
+        <p:txBody>
+          <a:bodyPr/>
+          <a:lstStyle/>
+          <a:p>
+            <a:fld id="{F99EC173-99AE-4773-AB25-02E469A13EAE}" type="slidenum">
+              <a:rPr lang="en-US">
+                <a:solidFill>
+                  <a:srgbClr val="D4D2D0"/>
+                </a:solidFill>
+                <a:latin typeface="Century Schoolbook"/>
+              </a:rPr>
+              <a:pPr/>
+              <a:t>6</a:t>
+            </a:fld>
+            <a:endParaRPr lang="en-US" dirty="0">
+              <a:solidFill>
+                <a:srgbClr val="D4D2D0"/>
+              </a:solidFill>
+              <a:latin typeface="Century Schoolbook"/>
+            </a:endParaRPr>
+          </a:p>
+        </p:txBody>
+      </p:sp>
+      <p:sp>
+        <p:nvSpPr>
+          <p:cNvPr id="2" name="文字方塊 1">
+            <a:extLst>
+              <a:ext uri="{FF2B5EF4-FFF2-40B4-BE49-F238E27FC236}">
+                <a16:creationId xmlns:a16="http://schemas.microsoft.com/office/drawing/2014/main" id="{E17C39F0-9527-522B-E55B-DAC3D2425E05}"/>
+              </a:ext>
+            </a:extLst>
+          </p:cNvPr>
+          <p:cNvSpPr txBox="1"/>
+          <p:nvPr/>
+        </p:nvSpPr>
+        <p:spPr>
+          <a:xfrm>
+            <a:off x="533400" y="1469837"/>
+            <a:ext cx="7924800" cy="4031873"/>
+          </a:xfrm>
+          <a:prstGeom prst="rect">
+            <a:avLst/>
+          </a:prstGeom>
+          <a:noFill/>
+        </p:spPr>
+        <p:txBody>
+          <a:bodyPr wrap="square" rtlCol="0">
+            <a:spAutoFit/>
+          </a:bodyPr>
+          <a:lstStyle/>
+          <a:p>
+            <a:pPr marL="457200" indent="-457200">
+              <a:buFont typeface="Arial" panose="020B0604020202020204" pitchFamily="34" charset="0"/>
+              <a:buChar char="•"/>
+            </a:pPr>
+            <a:r>
+              <a:rPr lang="en-US" altLang="zh-TW" sz="3200" dirty="0">
+                <a:solidFill>
+                  <a:prstClr val="white"/>
+                </a:solidFill>
+                <a:latin typeface="微軟正黑體" panose="020B0604030504040204" pitchFamily="34" charset="-120"/>
+                <a:ea typeface="微軟正黑體" panose="020B0604030504040204" pitchFamily="34" charset="-120"/>
+              </a:rPr>
+              <a:t>2020 </a:t>
+            </a:r>
+            <a:r>
+              <a:rPr lang="zh-TW" altLang="en-US" sz="3200" dirty="0">
+                <a:solidFill>
+                  <a:prstClr val="white"/>
+                </a:solidFill>
+                <a:latin typeface="微軟正黑體" panose="020B0604030504040204" pitchFamily="34" charset="-120"/>
+                <a:ea typeface="微軟正黑體" panose="020B0604030504040204" pitchFamily="34" charset="-120"/>
+              </a:rPr>
+              <a:t>年的一項分析發現，神經語言模型的能力（透過訓練損失衡量）在與參數數量、訓練資料量和用於訓練的計算的冪律關係中平穩增長</a:t>
+            </a:r>
+            <a:endParaRPr lang="en-US" altLang="zh-TW" sz="3200" dirty="0">
+              <a:solidFill>
+                <a:prstClr val="white"/>
+              </a:solidFill>
+              <a:latin typeface="微軟正黑體" panose="020B0604030504040204" pitchFamily="34" charset="-120"/>
+              <a:ea typeface="微軟正黑體" panose="020B0604030504040204" pitchFamily="34" charset="-120"/>
+            </a:endParaRPr>
+          </a:p>
+          <a:p>
+            <a:pPr marL="457200" indent="-457200">
+              <a:buFont typeface="Arial" panose="020B0604020202020204" pitchFamily="34" charset="0"/>
+              <a:buChar char="•"/>
+            </a:pPr>
+            <a:r>
+              <a:rPr lang="zh-TW" altLang="en-US" sz="3200" dirty="0">
+                <a:solidFill>
+                  <a:prstClr val="white"/>
+                </a:solidFill>
+                <a:latin typeface="微軟正黑體" panose="020B0604030504040204" pitchFamily="34" charset="-120"/>
+                <a:ea typeface="微軟正黑體" panose="020B0604030504040204" pitchFamily="34" charset="-120"/>
+              </a:rPr>
+              <a:t>這些關係在很寬的值範圍內（最多七個數量級）進行了測試</a:t>
+            </a:r>
+            <a:endParaRPr lang="en-US" altLang="zh-TW" sz="3200" dirty="0">
+              <a:solidFill>
+                <a:prstClr val="white"/>
+              </a:solidFill>
+              <a:latin typeface="微軟正黑體" panose="020B0604030504040204" pitchFamily="34" charset="-120"/>
+              <a:ea typeface="微軟正黑體" panose="020B0604030504040204" pitchFamily="34" charset="-120"/>
+            </a:endParaRPr>
+          </a:p>
+          <a:p>
+            <a:pPr marL="457200" indent="-457200">
+              <a:buFont typeface="Arial" panose="020B0604020202020204" pitchFamily="34" charset="0"/>
+              <a:buChar char="•"/>
+            </a:pPr>
+            <a:r>
+              <a:rPr lang="zh-TW" altLang="en-US" sz="3200" dirty="0">
+                <a:solidFill>
+                  <a:prstClr val="white"/>
+                </a:solidFill>
+                <a:latin typeface="微軟正黑體" panose="020B0604030504040204" pitchFamily="34" charset="-120"/>
+                <a:ea typeface="微軟正黑體" panose="020B0604030504040204" pitchFamily="34" charset="-120"/>
+              </a:rPr>
+              <a:t>在範圍的最高端（包括高達數萬億個參數的網路規模）沒有觀察到關係的衰減</a:t>
+            </a:r>
+            <a:endParaRPr lang="en-US" altLang="zh-TW" sz="3200" dirty="0">
+              <a:solidFill>
+                <a:prstClr val="white"/>
+              </a:solidFill>
+              <a:latin typeface="微軟正黑體" panose="020B0604030504040204" pitchFamily="34" charset="-120"/>
+              <a:ea typeface="微軟正黑體" panose="020B0604030504040204" pitchFamily="34" charset="-120"/>
+            </a:endParaRPr>
+          </a:p>
+        </p:txBody>
+      </p:sp>
+    </p:spTree>
+    <p:extLst>
+      <p:ext uri="{BB962C8B-B14F-4D97-AF65-F5344CB8AC3E}">
+        <p14:creationId xmlns:p14="http://schemas.microsoft.com/office/powerpoint/2010/main" val="3616203541"/>
+      </p:ext>
+    </p:extLst>
+  </p:cSld>
+  <p:clrMapOvr>
+    <a:masterClrMapping/>
+  </p:clrMapOvr>
+  <p:transition>
+    <p:fade/>
+  </p:transition>
+</p:sld>
+</file>
+
 <file path=ppt/slides/slide7.xml><?xml version="1.0" encoding="utf-8"?>
 <p:sld xmlns:a="http://schemas.openxmlformats.org/drawingml/2006/main" xmlns:r="http://schemas.openxmlformats.org/officeDocument/2006/relationships" xmlns:p="http://schemas.openxmlformats.org/presentationml/2006/main">
   <p:cSld>
@@ -19367,7 +19983,7 @@
         </p:nvSpPr>
         <p:spPr>
           <a:xfrm>
-            <a:off x="1828800" y="381000"/>
+            <a:off x="2743200" y="54165"/>
             <a:ext cx="5943600" cy="990600"/>
           </a:xfrm>
           <a:prstGeom prst="rect">
@@ -19396,7 +20012,7 @@
                 <a:ea typeface="微軟正黑體" panose="020B0604030504040204" pitchFamily="34" charset="-120"/>
                 <a:cs typeface="Heiti TC Light"/>
               </a:rPr>
-              <a:t>語言模型越大越好？</a:t>
+              <a:t>大型語言模型</a:t>
             </a:r>
             <a:endParaRPr kumimoji="1" lang="en-US" altLang="zh-TW" sz="4800" b="1" dirty="0">
               <a:solidFill>
@@ -19432,12 +20048,7 @@
             <p:ph type="dt" sz="half" idx="12"/>
           </p:nvPr>
         </p:nvSpPr>
-        <p:spPr>
-          <a:xfrm>
-            <a:off x="66675" y="6886195"/>
-            <a:ext cx="2438400" cy="244475"/>
-          </a:xfrm>
-        </p:spPr>
+        <p:spPr/>
         <p:txBody>
           <a:bodyPr/>
           <a:lstStyle/>
@@ -19452,7 +20063,7 @@
                 <a:cs typeface="Arial" panose="020B0604020202020204" pitchFamily="34" charset="0"/>
               </a:rPr>
               <a:pPr/>
-              <a:t>3/14/2024</a:t>
+              <a:t>11/27/2024</a:t>
             </a:fld>
             <a:endParaRPr lang="en-US" dirty="0">
               <a:solidFill>
@@ -19480,12 +20091,7 @@
             <p:ph type="sldNum" sz="quarter" idx="13"/>
           </p:nvPr>
         </p:nvSpPr>
-        <p:spPr>
-          <a:xfrm>
-            <a:off x="8172450" y="6886195"/>
-            <a:ext cx="914400" cy="244475"/>
-          </a:xfrm>
-        </p:spPr>
+        <p:spPr/>
         <p:txBody>
           <a:bodyPr/>
           <a:lstStyle/>
@@ -19499,289 +20105,6 @@
               </a:rPr>
               <a:pPr/>
               <a:t>7</a:t>
-            </a:fld>
-            <a:endParaRPr lang="en-US" dirty="0">
-              <a:solidFill>
-                <a:srgbClr val="D4D2D0"/>
-              </a:solidFill>
-              <a:latin typeface="Century Schoolbook"/>
-            </a:endParaRPr>
-          </a:p>
-        </p:txBody>
-      </p:sp>
-      <p:sp>
-        <p:nvSpPr>
-          <p:cNvPr id="2" name="文字方塊 1">
-            <a:extLst>
-              <a:ext uri="{FF2B5EF4-FFF2-40B4-BE49-F238E27FC236}">
-                <a16:creationId xmlns:a16="http://schemas.microsoft.com/office/drawing/2014/main" id="{E17C39F0-9527-522B-E55B-DAC3D2425E05}"/>
-              </a:ext>
-            </a:extLst>
-          </p:cNvPr>
-          <p:cNvSpPr txBox="1"/>
-          <p:nvPr/>
-        </p:nvSpPr>
-        <p:spPr>
-          <a:xfrm>
-            <a:off x="533400" y="1469837"/>
-            <a:ext cx="7924800" cy="4031873"/>
-          </a:xfrm>
-          <a:prstGeom prst="rect">
-            <a:avLst/>
-          </a:prstGeom>
-          <a:noFill/>
-        </p:spPr>
-        <p:txBody>
-          <a:bodyPr wrap="square" rtlCol="0">
-            <a:spAutoFit/>
-          </a:bodyPr>
-          <a:lstStyle/>
-          <a:p>
-            <a:pPr marL="457200" indent="-457200">
-              <a:buFont typeface="Arial" panose="020B0604020202020204" pitchFamily="34" charset="0"/>
-              <a:buChar char="•"/>
-            </a:pPr>
-            <a:r>
-              <a:rPr lang="en-US" altLang="zh-TW" sz="3200" dirty="0">
-                <a:solidFill>
-                  <a:prstClr val="white"/>
-                </a:solidFill>
-                <a:latin typeface="微軟正黑體" panose="020B0604030504040204" pitchFamily="34" charset="-120"/>
-                <a:ea typeface="微軟正黑體" panose="020B0604030504040204" pitchFamily="34" charset="-120"/>
-              </a:rPr>
-              <a:t>2020 </a:t>
-            </a:r>
-            <a:r>
-              <a:rPr lang="zh-TW" altLang="en-US" sz="3200" dirty="0">
-                <a:solidFill>
-                  <a:prstClr val="white"/>
-                </a:solidFill>
-                <a:latin typeface="微軟正黑體" panose="020B0604030504040204" pitchFamily="34" charset="-120"/>
-                <a:ea typeface="微軟正黑體" panose="020B0604030504040204" pitchFamily="34" charset="-120"/>
-              </a:rPr>
-              <a:t>年的一項分析發現，神經語言模型的能力（透過訓練損失衡量）在與參數數量、訓練資料量和用於訓練的計算的冪律關係中平穩增長</a:t>
-            </a:r>
-            <a:endParaRPr lang="en-US" altLang="zh-TW" sz="3200" dirty="0">
-              <a:solidFill>
-                <a:prstClr val="white"/>
-              </a:solidFill>
-              <a:latin typeface="微軟正黑體" panose="020B0604030504040204" pitchFamily="34" charset="-120"/>
-              <a:ea typeface="微軟正黑體" panose="020B0604030504040204" pitchFamily="34" charset="-120"/>
-            </a:endParaRPr>
-          </a:p>
-          <a:p>
-            <a:pPr marL="457200" indent="-457200">
-              <a:buFont typeface="Arial" panose="020B0604020202020204" pitchFamily="34" charset="0"/>
-              <a:buChar char="•"/>
-            </a:pPr>
-            <a:r>
-              <a:rPr lang="zh-TW" altLang="en-US" sz="3200" dirty="0">
-                <a:solidFill>
-                  <a:prstClr val="white"/>
-                </a:solidFill>
-                <a:latin typeface="微軟正黑體" panose="020B0604030504040204" pitchFamily="34" charset="-120"/>
-                <a:ea typeface="微軟正黑體" panose="020B0604030504040204" pitchFamily="34" charset="-120"/>
-              </a:rPr>
-              <a:t>這些關係在很寬的值範圍內（最多七個數量級）進行了測試</a:t>
-            </a:r>
-            <a:endParaRPr lang="en-US" altLang="zh-TW" sz="3200" dirty="0">
-              <a:solidFill>
-                <a:prstClr val="white"/>
-              </a:solidFill>
-              <a:latin typeface="微軟正黑體" panose="020B0604030504040204" pitchFamily="34" charset="-120"/>
-              <a:ea typeface="微軟正黑體" panose="020B0604030504040204" pitchFamily="34" charset="-120"/>
-            </a:endParaRPr>
-          </a:p>
-          <a:p>
-            <a:pPr marL="457200" indent="-457200">
-              <a:buFont typeface="Arial" panose="020B0604020202020204" pitchFamily="34" charset="0"/>
-              <a:buChar char="•"/>
-            </a:pPr>
-            <a:r>
-              <a:rPr lang="zh-TW" altLang="en-US" sz="3200" dirty="0">
-                <a:solidFill>
-                  <a:prstClr val="white"/>
-                </a:solidFill>
-                <a:latin typeface="微軟正黑體" panose="020B0604030504040204" pitchFamily="34" charset="-120"/>
-                <a:ea typeface="微軟正黑體" panose="020B0604030504040204" pitchFamily="34" charset="-120"/>
-              </a:rPr>
-              <a:t>在範圍的最高端（包括高達數萬億個參數的網路規模）沒有觀察到關係的衰減</a:t>
-            </a:r>
-            <a:endParaRPr lang="en-US" altLang="zh-TW" sz="3200" dirty="0">
-              <a:solidFill>
-                <a:prstClr val="white"/>
-              </a:solidFill>
-              <a:latin typeface="微軟正黑體" panose="020B0604030504040204" pitchFamily="34" charset="-120"/>
-              <a:ea typeface="微軟正黑體" panose="020B0604030504040204" pitchFamily="34" charset="-120"/>
-            </a:endParaRPr>
-          </a:p>
-        </p:txBody>
-      </p:sp>
-    </p:spTree>
-    <p:extLst>
-      <p:ext uri="{BB962C8B-B14F-4D97-AF65-F5344CB8AC3E}">
-        <p14:creationId xmlns:p14="http://schemas.microsoft.com/office/powerpoint/2010/main" val="3616203541"/>
-      </p:ext>
-    </p:extLst>
-  </p:cSld>
-  <p:clrMapOvr>
-    <a:masterClrMapping/>
-  </p:clrMapOvr>
-  <p:transition>
-    <p:fade/>
-  </p:transition>
-</p:sld>
-</file>
-
-<file path=ppt/slides/slide8.xml><?xml version="1.0" encoding="utf-8"?>
-<p:sld xmlns:a="http://schemas.openxmlformats.org/drawingml/2006/main" xmlns:r="http://schemas.openxmlformats.org/officeDocument/2006/relationships" xmlns:p="http://schemas.openxmlformats.org/presentationml/2006/main">
-  <p:cSld>
-    <p:spTree>
-      <p:nvGrpSpPr>
-        <p:cNvPr id="1" name=""/>
-        <p:cNvGrpSpPr/>
-        <p:nvPr/>
-      </p:nvGrpSpPr>
-      <p:grpSpPr>
-        <a:xfrm>
-          <a:off x="0" y="0"/>
-          <a:ext cx="0" cy="0"/>
-          <a:chOff x="0" y="0"/>
-          <a:chExt cx="0" cy="0"/>
-        </a:xfrm>
-      </p:grpSpPr>
-      <p:sp>
-        <p:nvSpPr>
-          <p:cNvPr id="4" name="文字版面配置區 2"/>
-          <p:cNvSpPr txBox="1">
-            <a:spLocks/>
-          </p:cNvSpPr>
-          <p:nvPr/>
-        </p:nvSpPr>
-        <p:spPr>
-          <a:xfrm>
-            <a:off x="2743200" y="54165"/>
-            <a:ext cx="5943600" cy="990600"/>
-          </a:xfrm>
-          <a:prstGeom prst="rect">
-            <a:avLst/>
-          </a:prstGeom>
-        </p:spPr>
-        <p:txBody>
-          <a:bodyPr tIns="91440" bIns="91440" anchor="b" anchorCtr="0">
-            <a:noAutofit/>
-          </a:bodyPr>
-          <a:lstStyle/>
-          <a:p>
-            <a:r>
-              <a:rPr kumimoji="1" lang="zh-TW" altLang="en-US" sz="4800" b="1" dirty="0">
-                <a:solidFill>
-                  <a:srgbClr val="00B0F0"/>
-                </a:solidFill>
-                <a:effectLst>
-                  <a:outerShdw blurRad="38100" dist="38100" dir="2700000" algn="tl">
-                    <a:srgbClr val="000000">
-                      <a:alpha val="43137"/>
-                    </a:srgbClr>
-                  </a:outerShdw>
-                </a:effectLst>
-                <a:latin typeface="微軟正黑體" panose="020B0604030504040204" pitchFamily="34" charset="-120"/>
-                <a:ea typeface="微軟正黑體" panose="020B0604030504040204" pitchFamily="34" charset="-120"/>
-                <a:cs typeface="Heiti TC Light"/>
-              </a:rPr>
-              <a:t>大型語言模型</a:t>
-            </a:r>
-            <a:endParaRPr kumimoji="1" lang="en-US" altLang="zh-TW" sz="4800" b="1" dirty="0">
-              <a:solidFill>
-                <a:srgbClr val="00B0F0"/>
-              </a:solidFill>
-              <a:effectLst>
-                <a:outerShdw blurRad="38100" dist="38100" dir="2700000" algn="tl">
-                  <a:srgbClr val="000000">
-                    <a:alpha val="43137"/>
-                  </a:srgbClr>
-                </a:outerShdw>
-              </a:effectLst>
-              <a:latin typeface="微軟正黑體" panose="020B0604030504040204" pitchFamily="34" charset="-120"/>
-              <a:ea typeface="微軟正黑體" panose="020B0604030504040204" pitchFamily="34" charset="-120"/>
-              <a:cs typeface="Heiti TC Light"/>
-            </a:endParaRPr>
-          </a:p>
-        </p:txBody>
-      </p:sp>
-      <p:sp>
-        <p:nvSpPr>
-          <p:cNvPr id="3" name="日期版面配置區 2">
-            <a:extLst>
-              <a:ext uri="{FF2B5EF4-FFF2-40B4-BE49-F238E27FC236}">
-                <a16:creationId xmlns:a16="http://schemas.microsoft.com/office/drawing/2014/main" id="{1C536CB5-3C58-6CF1-767E-952B76F12DEE}"/>
-              </a:ext>
-            </a:extLst>
-          </p:cNvPr>
-          <p:cNvSpPr>
-            <a:spLocks noGrp="1"/>
-          </p:cNvSpPr>
-          <p:nvPr>
-            <p:ph type="dt" sz="half" idx="12"/>
-          </p:nvPr>
-        </p:nvSpPr>
-        <p:spPr/>
-        <p:txBody>
-          <a:bodyPr/>
-          <a:lstStyle/>
-          <a:p>
-            <a:fld id="{0B520B05-2240-4566-BE2A-9338980FE8EB}" type="datetime1">
-              <a:rPr lang="en-US" altLang="zh-TW">
-                <a:solidFill>
-                  <a:srgbClr val="D4D2D0"/>
-                </a:solidFill>
-                <a:latin typeface="Arial" panose="020B0604020202020204" pitchFamily="34" charset="0"/>
-                <a:ea typeface="新細明體" panose="02020500000000000000" pitchFamily="18" charset="-120"/>
-                <a:cs typeface="Arial" panose="020B0604020202020204" pitchFamily="34" charset="0"/>
-              </a:rPr>
-              <a:pPr/>
-              <a:t>3/14/2024</a:t>
-            </a:fld>
-            <a:endParaRPr lang="en-US" dirty="0">
-              <a:solidFill>
-                <a:srgbClr val="D4D2D0"/>
-              </a:solidFill>
-              <a:latin typeface="Arial" panose="020B0604020202020204" pitchFamily="34" charset="0"/>
-              <a:cs typeface="Arial" panose="020B0604020202020204" pitchFamily="34" charset="0"/>
-            </a:endParaRPr>
-          </a:p>
-        </p:txBody>
-      </p:sp>
-      <p:sp>
-        <p:nvSpPr>
-          <p:cNvPr id="7" name="投影片編號版面配置區 6">
-            <a:extLst>
-              <a:ext uri="{FF2B5EF4-FFF2-40B4-BE49-F238E27FC236}">
-                <a16:creationId xmlns:a16="http://schemas.microsoft.com/office/drawing/2014/main" id="{DA316F56-AF12-D872-611F-78AE7ACCBF93}"/>
-              </a:ext>
-            </a:extLst>
-          </p:cNvPr>
-          <p:cNvSpPr>
-            <a:spLocks noGrp="1"/>
-          </p:cNvSpPr>
-          <p:nvPr>
-            <p:ph type="sldNum" sz="quarter" idx="13"/>
-          </p:nvPr>
-        </p:nvSpPr>
-        <p:spPr/>
-        <p:txBody>
-          <a:bodyPr/>
-          <a:lstStyle/>
-          <a:p>
-            <a:fld id="{F99EC173-99AE-4773-AB25-02E469A13EAE}" type="slidenum">
-              <a:rPr lang="en-US">
-                <a:solidFill>
-                  <a:srgbClr val="D4D2D0"/>
-                </a:solidFill>
-                <a:latin typeface="Century Schoolbook"/>
-              </a:rPr>
-              <a:pPr/>
-              <a:t>8</a:t>
             </a:fld>
             <a:endParaRPr lang="en-US" dirty="0">
               <a:solidFill>
@@ -19838,7 +20161,7 @@
 </p:sld>
 </file>
 
-<file path=ppt/slides/slide9.xml><?xml version="1.0" encoding="utf-8"?>
+<file path=ppt/slides/slide8.xml><?xml version="1.0" encoding="utf-8"?>
 <p:sld xmlns:a="http://schemas.openxmlformats.org/drawingml/2006/main" xmlns:r="http://schemas.openxmlformats.org/officeDocument/2006/relationships" xmlns:p="http://schemas.openxmlformats.org/presentationml/2006/main">
   <p:cSld>
     <p:spTree>
@@ -19945,7 +20268,7 @@
                 <a:cs typeface="Arial" panose="020B0604020202020204" pitchFamily="34" charset="0"/>
               </a:rPr>
               <a:pPr/>
-              <a:t>3/14/2024</a:t>
+              <a:t>11/27/2024</a:t>
             </a:fld>
             <a:endParaRPr lang="en-US" dirty="0">
               <a:solidFill>
@@ -19986,7 +20309,7 @@
                 <a:latin typeface="Century Schoolbook"/>
               </a:rPr>
               <a:pPr/>
-              <a:t>9</a:t>
+              <a:t>8</a:t>
             </a:fld>
             <a:endParaRPr lang="en-US" dirty="0">
               <a:solidFill>
@@ -20031,6 +20354,297 @@
     <p:extLst>
       <p:ext uri="{BB962C8B-B14F-4D97-AF65-F5344CB8AC3E}">
         <p14:creationId xmlns:p14="http://schemas.microsoft.com/office/powerpoint/2010/main" val="1690903790"/>
+      </p:ext>
+    </p:extLst>
+  </p:cSld>
+  <p:clrMapOvr>
+    <a:masterClrMapping/>
+  </p:clrMapOvr>
+  <p:transition>
+    <p:fade/>
+  </p:transition>
+</p:sld>
+</file>
+
+<file path=ppt/slides/slide9.xml><?xml version="1.0" encoding="utf-8"?>
+<p:sld xmlns:a="http://schemas.openxmlformats.org/drawingml/2006/main" xmlns:r="http://schemas.openxmlformats.org/officeDocument/2006/relationships" xmlns:p="http://schemas.openxmlformats.org/presentationml/2006/main">
+  <p:cSld>
+    <p:spTree>
+      <p:nvGrpSpPr>
+        <p:cNvPr id="1" name=""/>
+        <p:cNvGrpSpPr/>
+        <p:nvPr/>
+      </p:nvGrpSpPr>
+      <p:grpSpPr>
+        <a:xfrm>
+          <a:off x="0" y="0"/>
+          <a:ext cx="0" cy="0"/>
+          <a:chOff x="0" y="0"/>
+          <a:chExt cx="0" cy="0"/>
+        </a:xfrm>
+      </p:grpSpPr>
+      <p:sp>
+        <p:nvSpPr>
+          <p:cNvPr id="4" name="文字版面配置區 2"/>
+          <p:cNvSpPr txBox="1">
+            <a:spLocks/>
+          </p:cNvSpPr>
+          <p:nvPr/>
+        </p:nvSpPr>
+        <p:spPr>
+          <a:xfrm>
+            <a:off x="1962150" y="425393"/>
+            <a:ext cx="5943600" cy="990600"/>
+          </a:xfrm>
+          <a:prstGeom prst="rect">
+            <a:avLst/>
+          </a:prstGeom>
+        </p:spPr>
+        <p:txBody>
+          <a:bodyPr tIns="91440" bIns="91440" anchor="b" anchorCtr="0">
+            <a:noAutofit/>
+          </a:bodyPr>
+          <a:lstStyle/>
+          <a:p>
+            <a:r>
+              <a:rPr kumimoji="1" lang="en-US" altLang="zh-TW" sz="4800" b="1" dirty="0">
+                <a:solidFill>
+                  <a:srgbClr val="00B0F0"/>
+                </a:solidFill>
+                <a:effectLst>
+                  <a:outerShdw blurRad="38100" dist="38100" dir="2700000" algn="tl">
+                    <a:srgbClr val="000000">
+                      <a:alpha val="43137"/>
+                    </a:srgbClr>
+                  </a:outerShdw>
+                </a:effectLst>
+                <a:latin typeface="微軟正黑體" panose="020B0604030504040204" pitchFamily="34" charset="-120"/>
+                <a:ea typeface="微軟正黑體" panose="020B0604030504040204" pitchFamily="34" charset="-120"/>
+                <a:cs typeface="Heiti TC Light"/>
+              </a:rPr>
+              <a:t>Emergent abilities</a:t>
+            </a:r>
+          </a:p>
+        </p:txBody>
+      </p:sp>
+      <p:sp>
+        <p:nvSpPr>
+          <p:cNvPr id="3" name="日期版面配置區 2">
+            <a:extLst>
+              <a:ext uri="{FF2B5EF4-FFF2-40B4-BE49-F238E27FC236}">
+                <a16:creationId xmlns:a16="http://schemas.microsoft.com/office/drawing/2014/main" id="{1C536CB5-3C58-6CF1-767E-952B76F12DEE}"/>
+              </a:ext>
+            </a:extLst>
+          </p:cNvPr>
+          <p:cNvSpPr>
+            <a:spLocks noGrp="1"/>
+          </p:cNvSpPr>
+          <p:nvPr>
+            <p:ph type="dt" sz="half" idx="12"/>
+          </p:nvPr>
+        </p:nvSpPr>
+        <p:spPr>
+          <a:xfrm>
+            <a:off x="47625" y="6918325"/>
+            <a:ext cx="2438400" cy="244475"/>
+          </a:xfrm>
+        </p:spPr>
+        <p:txBody>
+          <a:bodyPr/>
+          <a:lstStyle/>
+          <a:p>
+            <a:fld id="{0B520B05-2240-4566-BE2A-9338980FE8EB}" type="datetime1">
+              <a:rPr lang="en-US" altLang="zh-TW">
+                <a:solidFill>
+                  <a:srgbClr val="D4D2D0"/>
+                </a:solidFill>
+                <a:latin typeface="Arial" panose="020B0604020202020204" pitchFamily="34" charset="0"/>
+                <a:ea typeface="新細明體" panose="02020500000000000000" pitchFamily="18" charset="-120"/>
+                <a:cs typeface="Arial" panose="020B0604020202020204" pitchFamily="34" charset="0"/>
+              </a:rPr>
+              <a:pPr/>
+              <a:t>11/27/2024</a:t>
+            </a:fld>
+            <a:endParaRPr lang="en-US" dirty="0">
+              <a:solidFill>
+                <a:srgbClr val="D4D2D0"/>
+              </a:solidFill>
+              <a:latin typeface="Arial" panose="020B0604020202020204" pitchFamily="34" charset="0"/>
+              <a:cs typeface="Arial" panose="020B0604020202020204" pitchFamily="34" charset="0"/>
+            </a:endParaRPr>
+          </a:p>
+        </p:txBody>
+      </p:sp>
+      <p:sp>
+        <p:nvSpPr>
+          <p:cNvPr id="7" name="投影片編號版面配置區 6">
+            <a:extLst>
+              <a:ext uri="{FF2B5EF4-FFF2-40B4-BE49-F238E27FC236}">
+                <a16:creationId xmlns:a16="http://schemas.microsoft.com/office/drawing/2014/main" id="{DA316F56-AF12-D872-611F-78AE7ACCBF93}"/>
+              </a:ext>
+            </a:extLst>
+          </p:cNvPr>
+          <p:cNvSpPr>
+            <a:spLocks noGrp="1"/>
+          </p:cNvSpPr>
+          <p:nvPr>
+            <p:ph type="sldNum" sz="quarter" idx="13"/>
+          </p:nvPr>
+        </p:nvSpPr>
+        <p:spPr>
+          <a:xfrm>
+            <a:off x="8153400" y="6918325"/>
+            <a:ext cx="914400" cy="244475"/>
+          </a:xfrm>
+        </p:spPr>
+        <p:txBody>
+          <a:bodyPr/>
+          <a:lstStyle/>
+          <a:p>
+            <a:fld id="{F99EC173-99AE-4773-AB25-02E469A13EAE}" type="slidenum">
+              <a:rPr lang="en-US">
+                <a:solidFill>
+                  <a:srgbClr val="D4D2D0"/>
+                </a:solidFill>
+                <a:latin typeface="Century Schoolbook"/>
+              </a:rPr>
+              <a:pPr/>
+              <a:t>9</a:t>
+            </a:fld>
+            <a:endParaRPr lang="en-US" dirty="0">
+              <a:solidFill>
+                <a:srgbClr val="D4D2D0"/>
+              </a:solidFill>
+              <a:latin typeface="Century Schoolbook"/>
+            </a:endParaRPr>
+          </a:p>
+        </p:txBody>
+      </p:sp>
+      <p:sp>
+        <p:nvSpPr>
+          <p:cNvPr id="2" name="文字方塊 1">
+            <a:extLst>
+              <a:ext uri="{FF2B5EF4-FFF2-40B4-BE49-F238E27FC236}">
+                <a16:creationId xmlns:a16="http://schemas.microsoft.com/office/drawing/2014/main" id="{E17C39F0-9527-522B-E55B-DAC3D2425E05}"/>
+              </a:ext>
+            </a:extLst>
+          </p:cNvPr>
+          <p:cNvSpPr txBox="1"/>
+          <p:nvPr/>
+        </p:nvSpPr>
+        <p:spPr>
+          <a:xfrm>
+            <a:off x="590550" y="1730565"/>
+            <a:ext cx="7924800" cy="3539430"/>
+          </a:xfrm>
+          <a:prstGeom prst="rect">
+            <a:avLst/>
+          </a:prstGeom>
+          <a:noFill/>
+        </p:spPr>
+        <p:txBody>
+          <a:bodyPr wrap="square" rtlCol="0">
+            <a:spAutoFit/>
+          </a:bodyPr>
+          <a:lstStyle/>
+          <a:p>
+            <a:pPr marL="457200" indent="-457200">
+              <a:buFont typeface="Arial" panose="020B0604020202020204" pitchFamily="34" charset="0"/>
+              <a:buChar char="•"/>
+            </a:pPr>
+            <a:r>
+              <a:rPr lang="zh-TW" altLang="en-US" sz="3200" dirty="0">
+                <a:solidFill>
+                  <a:prstClr val="white"/>
+                </a:solidFill>
+                <a:latin typeface="微軟正黑體" panose="020B0604030504040204" pitchFamily="34" charset="-120"/>
+                <a:ea typeface="微軟正黑體" panose="020B0604030504040204" pitchFamily="34" charset="-120"/>
+              </a:rPr>
+              <a:t>研究不同規模大小的模型對於各種任務的表現能力</a:t>
+            </a:r>
+            <a:endParaRPr lang="en-US" altLang="zh-TW" sz="3200" dirty="0">
+              <a:solidFill>
+                <a:prstClr val="white"/>
+              </a:solidFill>
+              <a:latin typeface="微軟正黑體" panose="020B0604030504040204" pitchFamily="34" charset="-120"/>
+              <a:ea typeface="微軟正黑體" panose="020B0604030504040204" pitchFamily="34" charset="-120"/>
+            </a:endParaRPr>
+          </a:p>
+          <a:p>
+            <a:pPr marL="457200" indent="-457200">
+              <a:buFont typeface="Arial" panose="020B0604020202020204" pitchFamily="34" charset="0"/>
+              <a:buChar char="•"/>
+            </a:pPr>
+            <a:r>
+              <a:rPr lang="zh-TW" altLang="en-US" sz="3200" dirty="0">
+                <a:solidFill>
+                  <a:prstClr val="white"/>
+                </a:solidFill>
+                <a:latin typeface="微軟正黑體" panose="020B0604030504040204" pitchFamily="34" charset="-120"/>
+                <a:ea typeface="微軟正黑體" panose="020B0604030504040204" pitchFamily="34" charset="-120"/>
+              </a:rPr>
+              <a:t>當模型夠大時，竟出現小型專業微調模型的能力，各種任務表現皆大幅度提升</a:t>
+            </a:r>
+            <a:endParaRPr lang="en-US" altLang="zh-TW" sz="3200" dirty="0">
+              <a:solidFill>
+                <a:prstClr val="white"/>
+              </a:solidFill>
+              <a:latin typeface="微軟正黑體" panose="020B0604030504040204" pitchFamily="34" charset="-120"/>
+              <a:ea typeface="微軟正黑體" panose="020B0604030504040204" pitchFamily="34" charset="-120"/>
+            </a:endParaRPr>
+          </a:p>
+          <a:p>
+            <a:pPr marL="457200" indent="-457200">
+              <a:buFont typeface="Arial" panose="020B0604020202020204" pitchFamily="34" charset="0"/>
+              <a:buChar char="•"/>
+            </a:pPr>
+            <a:r>
+              <a:rPr lang="zh-TW" altLang="en-US" sz="3200" dirty="0">
+                <a:solidFill>
+                  <a:prstClr val="white"/>
+                </a:solidFill>
+                <a:latin typeface="微軟正黑體" panose="020B0604030504040204" pitchFamily="34" charset="-120"/>
+                <a:ea typeface="微軟正黑體" panose="020B0604030504040204" pitchFamily="34" charset="-120"/>
+              </a:rPr>
+              <a:t>這些能力是被自己發現的</a:t>
+            </a:r>
+            <a:endParaRPr lang="en-US" altLang="zh-TW" sz="3200" dirty="0">
+              <a:solidFill>
+                <a:prstClr val="white"/>
+              </a:solidFill>
+              <a:latin typeface="微軟正黑體" panose="020B0604030504040204" pitchFamily="34" charset="-120"/>
+              <a:ea typeface="微軟正黑體" panose="020B0604030504040204" pitchFamily="34" charset="-120"/>
+            </a:endParaRPr>
+          </a:p>
+          <a:p>
+            <a:pPr marL="457200" indent="-457200">
+              <a:buFont typeface="Arial" panose="020B0604020202020204" pitchFamily="34" charset="0"/>
+              <a:buChar char="•"/>
+            </a:pPr>
+            <a:r>
+              <a:rPr lang="zh-TW" altLang="en-US" sz="3200" dirty="0">
+                <a:solidFill>
+                  <a:prstClr val="white"/>
+                </a:solidFill>
+                <a:latin typeface="微軟正黑體" panose="020B0604030504040204" pitchFamily="34" charset="-120"/>
+                <a:ea typeface="微軟正黑體" panose="020B0604030504040204" pitchFamily="34" charset="-120"/>
+              </a:rPr>
+              <a:t>準確度並不是等距成長，而是在參數量最大的模型中準確率急劇上升</a:t>
+            </a:r>
+            <a:endParaRPr lang="en-US" altLang="zh-TW" sz="3200" dirty="0">
+              <a:solidFill>
+                <a:prstClr val="white"/>
+              </a:solidFill>
+              <a:latin typeface="微軟正黑體" panose="020B0604030504040204" pitchFamily="34" charset="-120"/>
+              <a:ea typeface="微軟正黑體" panose="020B0604030504040204" pitchFamily="34" charset="-120"/>
+            </a:endParaRPr>
+          </a:p>
+        </p:txBody>
+      </p:sp>
+    </p:spTree>
+    <p:extLst>
+      <p:ext uri="{BB962C8B-B14F-4D97-AF65-F5344CB8AC3E}">
+        <p14:creationId xmlns:p14="http://schemas.microsoft.com/office/powerpoint/2010/main" val="1983433871"/>
       </p:ext>
     </p:extLst>
   </p:cSld>
